--- a/.claude/skills/presentation/templates/cellularintelligence.pptx
+++ b/.claude/skills/presentation/templates/cellularintelligence.pptx
@@ -5,13 +5,10 @@
     <p:sldMasterId id="2147483648" r:id="rId4"/>
   </p:sldMasterIdLst>
   <p:notesMasterIdLst>
-    <p:notesMasterId r:id="rId6"/>
+    <p:notesMasterId r:id="rId18"/>
   </p:notesMasterIdLst>
-  <p:handoutMasterIdLst>
-    <p:handoutMasterId r:id="rId7"/>
-  </p:handoutMasterIdLst>
   <p:sldIdLst>
-    <p:sldId id="256" r:id="rId5"/>
+    <p:sldId id="256" r:id="rId12"/>
   </p:sldIdLst>
   <p:sldSz cx="12192000" cy="6858000"/>
   <p:notesSz cx="6858000" cy="9144000"/>
@@ -348,193 +345,12 @@
 </p:cmAuthorLst>
 </file>
 
-<file path=ppt/handoutMasters/handoutMaster1.xml><?xml version="1.0" encoding="utf-8"?>
-<p:handoutMaster xmlns:a="http://schemas.openxmlformats.org/drawingml/2006/main" xmlns:r="http://schemas.openxmlformats.org/officeDocument/2006/relationships" xmlns:p="http://schemas.openxmlformats.org/presentationml/2006/main">
-  <p:cSld>
-    <p:bg>
-      <p:bgRef idx="1001">
-        <a:schemeClr val="bg1"/>
-      </p:bgRef>
-    </p:bg>
-    <p:spTree>
-      <p:nvGrpSpPr>
-        <p:cNvPr id="1" name=""/>
-        <p:cNvGrpSpPr/>
-        <p:nvPr/>
-      </p:nvGrpSpPr>
-      <p:grpSpPr>
-        <a:xfrm>
-          <a:off x="0" y="0"/>
-          <a:ext cx="0" cy="0"/>
-          <a:chOff x="0" y="0"/>
-          <a:chExt cx="0" cy="0"/>
-        </a:xfrm>
-      </p:grpSpPr>
-      <p:sp>
-        <p:nvSpPr>
-          <p:cNvPr id="2" name="Header Placeholder 1">
-            <a:extLst>
-              <a:ext uri="{FF2B5EF4-FFF2-40B4-BE49-F238E27FC236}">
-                <a16:creationId xmlns:a16="http://schemas.microsoft.com/office/drawing/2014/main" id="{F38C4DA5-1F50-07BA-61AB-EC375CAA0C62}"/>
-              </a:ext>
-            </a:extLst>
-          </p:cNvPr>
-          <p:cNvSpPr>
-            <a:spLocks noGrp="1"/>
-          </p:cNvSpPr>
-          <p:nvPr>
-            <p:ph type="hdr" sz="quarter"/>
-          </p:nvPr>
-        </p:nvSpPr>
-        <p:spPr>
-          <a:xfrm>
-            <a:off x="0" y="0"/>
-            <a:ext cx="2971800" cy="458788"/>
-          </a:xfrm>
-          <a:prstGeom prst="rect">
-            <a:avLst/>
-          </a:prstGeom>
-        </p:spPr>
-        <p:txBody>
-          <a:bodyPr vert="horz" lIns="91440" tIns="45720" rIns="91440" bIns="45720" rtlCol="0"/>
-          <a:lstStyle>
-            <a:lvl1pPr algn="l">
-              <a:defRPr sz="1200"/>
-            </a:lvl1pPr>
-          </a:lstStyle>
-          <a:p>
-            <a:endParaRPr lang="en-US"/>
-          </a:p>
-        </p:txBody>
-      </p:sp>
-      <p:sp>
-        <p:nvSpPr>
-          <p:cNvPr id="3" name="Date Placeholder 2">
-            <a:extLst>
-              <a:ext uri="{FF2B5EF4-FFF2-40B4-BE49-F238E27FC236}">
-                <a16:creationId xmlns:a16="http://schemas.microsoft.com/office/drawing/2014/main" id="{B7C081F7-2215-2CF4-28B4-9CECFC4AAFF1}"/>
-              </a:ext>
-            </a:extLst>
-          </p:cNvPr>
-          <p:cNvSpPr>
-            <a:spLocks noGrp="1"/>
-          </p:cNvSpPr>
-          <p:nvPr>
-            <p:ph type="dt" sz="quarter" idx="1"/>
-          </p:nvPr>
-        </p:nvSpPr>
-        <p:spPr>
-          <a:xfrm>
-            <a:off x="3884613" y="0"/>
-            <a:ext cx="2971800" cy="458788"/>
-          </a:xfrm>
-          <a:prstGeom prst="rect">
-            <a:avLst/>
-          </a:prstGeom>
-        </p:spPr>
-        <p:txBody>
-          <a:bodyPr vert="horz" lIns="91440" tIns="45720" rIns="91440" bIns="45720" rtlCol="0"/>
-          <a:lstStyle>
-            <a:lvl1pPr algn="r">
-              <a:defRPr sz="1200"/>
-            </a:lvl1pPr>
-          </a:lstStyle>
-          <a:p>
-            <a:fld id="{40602C26-7A89-43ED-8411-2303B4D08797}" type="datetimeFigureOut">
-              <a:rPr lang="en-US" smtClean="0"/>
-              <a:t>1/29/26</a:t>
-            </a:fld>
-            <a:endParaRPr lang="en-US"/>
-          </a:p>
-        </p:txBody>
-      </p:sp>
-      <p:sp>
-        <p:nvSpPr>
-          <p:cNvPr id="4" name="Footer Placeholder 3">
-            <a:extLst>
-              <a:ext uri="{FF2B5EF4-FFF2-40B4-BE49-F238E27FC236}">
-                <a16:creationId xmlns:a16="http://schemas.microsoft.com/office/drawing/2014/main" id="{C6E85004-CDBA-4130-C170-DD807213727A}"/>
-              </a:ext>
-            </a:extLst>
-          </p:cNvPr>
-          <p:cNvSpPr>
-            <a:spLocks noGrp="1"/>
-          </p:cNvSpPr>
-          <p:nvPr>
-            <p:ph type="ftr" sz="quarter" idx="2"/>
-          </p:nvPr>
-        </p:nvSpPr>
-        <p:spPr>
-          <a:xfrm>
-            <a:off x="0" y="8685213"/>
-            <a:ext cx="2971800" cy="458787"/>
-          </a:xfrm>
-          <a:prstGeom prst="rect">
-            <a:avLst/>
-          </a:prstGeom>
-        </p:spPr>
-        <p:txBody>
-          <a:bodyPr vert="horz" lIns="91440" tIns="45720" rIns="91440" bIns="45720" rtlCol="0" anchor="b"/>
-          <a:lstStyle>
-            <a:lvl1pPr algn="l">
-              <a:defRPr sz="1200"/>
-            </a:lvl1pPr>
-          </a:lstStyle>
-          <a:p>
-            <a:endParaRPr lang="en-US"/>
-          </a:p>
-        </p:txBody>
-      </p:sp>
-      <p:sp>
-        <p:nvSpPr>
-          <p:cNvPr id="5" name="Slide Number Placeholder 4">
-            <a:extLst>
-              <a:ext uri="{FF2B5EF4-FFF2-40B4-BE49-F238E27FC236}">
-                <a16:creationId xmlns:a16="http://schemas.microsoft.com/office/drawing/2014/main" id="{8ED524A8-90CF-47B3-629C-01F2E5D97E63}"/>
-              </a:ext>
-            </a:extLst>
-          </p:cNvPr>
-          <p:cNvSpPr>
-            <a:spLocks noGrp="1"/>
-          </p:cNvSpPr>
-          <p:nvPr>
-            <p:ph type="sldNum" sz="quarter" idx="3"/>
-          </p:nvPr>
-        </p:nvSpPr>
-        <p:spPr>
-          <a:xfrm>
-            <a:off x="3884613" y="8685213"/>
-            <a:ext cx="2971800" cy="458787"/>
-          </a:xfrm>
-          <a:prstGeom prst="rect">
-            <a:avLst/>
-          </a:prstGeom>
-        </p:spPr>
-        <p:txBody>
-          <a:bodyPr vert="horz" lIns="91440" tIns="45720" rIns="91440" bIns="45720" rtlCol="0" anchor="b"/>
-          <a:lstStyle>
-            <a:lvl1pPr algn="r">
-              <a:defRPr sz="1200"/>
-            </a:lvl1pPr>
-          </a:lstStyle>
-          <a:p>
-            <a:fld id="{EC6CA07C-3E08-48E7-B2B3-670A1D7D82B1}" type="slidenum">
-              <a:rPr lang="en-US" smtClean="0"/>
-              <a:t>‹#›</a:t>
-            </a:fld>
-            <a:endParaRPr lang="en-US"/>
-          </a:p>
-        </p:txBody>
-      </p:sp>
-    </p:spTree>
-    <p:extLst>
-      <p:ext uri="{BB962C8B-B14F-4D97-AF65-F5344CB8AC3E}">
-        <p14:creationId xmlns:p14="http://schemas.microsoft.com/office/powerpoint/2010/main" val="225938947"/>
-      </p:ext>
-    </p:extLst>
-  </p:cSld>
-  <p:clrMap bg1="lt1" tx1="dk1" bg2="lt2" tx2="dk2" accent1="accent1" accent2="accent2" accent3="accent3" accent4="accent4" accent5="accent5" accent6="accent6" hlink="hlink" folHlink="folHlink"/>
-</p:handoutMaster>
+<file path=ppt/revisionInfo.xml><?xml version="1.0" encoding="utf-8"?>
+<p1510:revInfo xmlns:a="http://schemas.openxmlformats.org/drawingml/2006/main" xmlns:r="http://schemas.openxmlformats.org/officeDocument/2006/relationships" xmlns:p1510="http://schemas.microsoft.com/office/powerpoint/2015/10/main">
+  <p1510:revLst>
+    <p1510:client id="{665124AF-B22F-17ED-D7C7-2EFBAFD3C007}" v="5" dt="2026-01-27T21:04:04.426"/>
+  </p1510:revLst>
+</p1510:revInfo>
 </file>
 
 <file path=ppt/notesMasters/notesMaster1.xml><?xml version="1.0" encoding="utf-8"?>
@@ -773,13 +589,13 @@
             <a:spLocks noGrp="1"/>
           </p:cNvSpPr>
           <p:nvPr>
-            <p:ph type="body" sz="quarter" idx="1" hasCustomPrompt="1"/>
+            <p:ph type="body" sz="quarter" idx="1"/>
           </p:nvPr>
         </p:nvSpPr>
         <p:spPr>
           <a:xfrm>
-            <a:off x="889000" y="4092121"/>
-            <a:ext cx="10414000" cy="1440578"/>
+            <a:off x="889000" y="3536950"/>
+            <a:ext cx="10414000" cy="793750"/>
           </a:xfrm>
           <a:prstGeom prst="rect">
             <a:avLst/>
@@ -836,8 +652,31 @@
           </a:lstStyle>
           <a:p>
             <a:r>
-              <a:rPr dirty="0"/>
               <a:t>Body Level One</a:t>
+            </a:r>
+          </a:p>
+          <a:p>
+            <a:pPr lvl="1"/>
+            <a:r>
+              <a:t>Body Level Two</a:t>
+            </a:r>
+          </a:p>
+          <a:p>
+            <a:pPr lvl="2"/>
+            <a:r>
+              <a:t>Body Level Three</a:t>
+            </a:r>
+          </a:p>
+          <a:p>
+            <a:pPr lvl="3"/>
+            <a:r>
+              <a:t>Body Level Four</a:t>
+            </a:r>
+          </a:p>
+          <a:p>
+            <a:pPr lvl="4"/>
+            <a:r>
+              <a:t>Body Level Five</a:t>
             </a:r>
           </a:p>
         </p:txBody>
@@ -868,37 +707,6 @@
           </a:p>
         </p:txBody>
       </p:sp>
-      <p:pic>
-        <p:nvPicPr>
-          <p:cNvPr id="2" name="Picture 1">
-            <a:extLst>
-              <a:ext uri="{FF2B5EF4-FFF2-40B4-BE49-F238E27FC236}">
-                <a16:creationId xmlns:a16="http://schemas.microsoft.com/office/drawing/2014/main" id="{0659FC22-3F39-2F95-295D-0587C933D039}"/>
-              </a:ext>
-            </a:extLst>
-          </p:cNvPr>
-          <p:cNvPicPr>
-            <a:picLocks noChangeAspect="1"/>
-          </p:cNvPicPr>
-          <p:nvPr userDrawn="1"/>
-        </p:nvPicPr>
-        <p:blipFill>
-          <a:blip r:embed="rId2"/>
-          <a:srcRect l="245"/>
-          <a:stretch>
-            <a:fillRect/>
-          </a:stretch>
-        </p:blipFill>
-        <p:spPr>
-          <a:xfrm>
-            <a:off x="6140699" y="5625296"/>
-            <a:ext cx="6051302" cy="1204579"/>
-          </a:xfrm>
-          <a:prstGeom prst="rect">
-            <a:avLst/>
-          </a:prstGeom>
-        </p:spPr>
-      </p:pic>
     </p:spTree>
   </p:cSld>
   <p:clrMapOvr>
@@ -924,7 +732,1788 @@
 </p:sldLayout>
 </file>
 
+<file path=ppt/slideLayouts/slideLayout10.xml><?xml version="1.0" encoding="utf-8"?>
+<p:sldLayout xmlns:a="http://schemas.openxmlformats.org/drawingml/2006/main" xmlns:r="http://schemas.openxmlformats.org/officeDocument/2006/relationships" xmlns:p="http://schemas.openxmlformats.org/presentationml/2006/main" preserve="1" userDrawn="1">
+  <p:cSld name="Two Content (vertical)">
+    <p:spTree>
+      <p:nvGrpSpPr>
+        <p:cNvPr id="1" name=""/>
+        <p:cNvGrpSpPr/>
+        <p:nvPr/>
+      </p:nvGrpSpPr>
+      <p:grpSpPr>
+        <a:xfrm>
+          <a:off x="0" y="0"/>
+          <a:ext cx="0" cy="0"/>
+          <a:chOff x="0" y="0"/>
+          <a:chExt cx="0" cy="0"/>
+        </a:xfrm>
+      </p:grpSpPr>
+      <p:sp>
+        <p:nvSpPr>
+          <p:cNvPr id="3" name="Content Placeholder 2">
+            <a:extLst>
+              <a:ext uri="{FF2B5EF4-FFF2-40B4-BE49-F238E27FC236}">
+                <a16:creationId xmlns:a16="http://schemas.microsoft.com/office/drawing/2014/main" id="{EB85AEC4-1825-0A29-E8E9-2EBD1391FDC6}"/>
+              </a:ext>
+            </a:extLst>
+          </p:cNvPr>
+          <p:cNvSpPr>
+            <a:spLocks noGrp="1"/>
+          </p:cNvSpPr>
+          <p:nvPr>
+            <p:ph sz="half" idx="1"/>
+          </p:nvPr>
+        </p:nvSpPr>
+        <p:spPr>
+          <a:xfrm>
+            <a:off x="838199" y="1267959"/>
+            <a:ext cx="10509251" cy="2389642"/>
+          </a:xfrm>
+        </p:spPr>
+        <p:txBody>
+          <a:bodyPr/>
+          <a:lstStyle/>
+          <a:p>
+            <a:pPr lvl="0"/>
+            <a:r>
+              <a:rPr lang="en-US" dirty="0"/>
+              <a:t>Click to edit Master text styles</a:t>
+            </a:r>
+          </a:p>
+          <a:p>
+            <a:pPr lvl="1"/>
+            <a:r>
+              <a:rPr lang="en-US" dirty="0"/>
+              <a:t>Second level</a:t>
+            </a:r>
+          </a:p>
+        </p:txBody>
+      </p:sp>
+      <p:sp>
+        <p:nvSpPr>
+          <p:cNvPr id="4" name="Content Placeholder 3">
+            <a:extLst>
+              <a:ext uri="{FF2B5EF4-FFF2-40B4-BE49-F238E27FC236}">
+                <a16:creationId xmlns:a16="http://schemas.microsoft.com/office/drawing/2014/main" id="{0AB39CB5-2C12-3F62-C6D7-6E06D5B52E2B}"/>
+              </a:ext>
+            </a:extLst>
+          </p:cNvPr>
+          <p:cNvSpPr>
+            <a:spLocks noGrp="1"/>
+          </p:cNvSpPr>
+          <p:nvPr>
+            <p:ph sz="half" idx="2"/>
+          </p:nvPr>
+        </p:nvSpPr>
+        <p:spPr>
+          <a:xfrm>
+            <a:off x="850900" y="3836989"/>
+            <a:ext cx="10496550" cy="2339974"/>
+          </a:xfrm>
+        </p:spPr>
+        <p:txBody>
+          <a:bodyPr/>
+          <a:lstStyle/>
+          <a:p>
+            <a:pPr lvl="0"/>
+            <a:r>
+              <a:rPr lang="en-US" dirty="0"/>
+              <a:t>Click to edit Master text styles</a:t>
+            </a:r>
+          </a:p>
+          <a:p>
+            <a:pPr lvl="1"/>
+            <a:r>
+              <a:rPr lang="en-US" dirty="0"/>
+              <a:t>Second level</a:t>
+            </a:r>
+          </a:p>
+        </p:txBody>
+      </p:sp>
+      <p:sp>
+        <p:nvSpPr>
+          <p:cNvPr id="5" name="Date Placeholder 4">
+            <a:extLst>
+              <a:ext uri="{FF2B5EF4-FFF2-40B4-BE49-F238E27FC236}">
+                <a16:creationId xmlns:a16="http://schemas.microsoft.com/office/drawing/2014/main" id="{71515902-1B4F-1080-8519-F743FA0C5D3C}"/>
+              </a:ext>
+            </a:extLst>
+          </p:cNvPr>
+          <p:cNvSpPr>
+            <a:spLocks noGrp="1"/>
+          </p:cNvSpPr>
+          <p:nvPr>
+            <p:ph type="dt" sz="half" idx="10"/>
+          </p:nvPr>
+        </p:nvSpPr>
+        <p:spPr>
+          <a:xfrm>
+            <a:off x="838200" y="6356350"/>
+            <a:ext cx="2743200" cy="365125"/>
+          </a:xfrm>
+          <a:prstGeom prst="rect">
+            <a:avLst/>
+          </a:prstGeom>
+        </p:spPr>
+        <p:txBody>
+          <a:bodyPr vert="horz" lIns="91440" tIns="45720" rIns="91440" bIns="45720" rtlCol="0" anchor="ctr"/>
+          <a:lstStyle>
+            <a:defPPr marL="0" marR="0" indent="0" algn="l" defTabSz="457200" rtl="0" fontAlgn="auto" latinLnBrk="1" hangingPunct="0">
+              <a:lnSpc>
+                <a:spcPct val="100000"/>
+              </a:lnSpc>
+              <a:spcBef>
+                <a:spcPts val="0"/>
+              </a:spcBef>
+              <a:spcAft>
+                <a:spcPts val="0"/>
+              </a:spcAft>
+              <a:buClrTx/>
+              <a:buSzTx/>
+              <a:buFontTx/>
+              <a:buNone/>
+              <a:tabLst/>
+              <a:defRPr kumimoji="0" sz="900" b="0" i="0" u="none" strike="noStrike" cap="none" spc="0" normalizeH="0" baseline="0">
+                <a:ln>
+                  <a:noFill/>
+                </a:ln>
+                <a:solidFill>
+                  <a:srgbClr val="000000"/>
+                </a:solidFill>
+                <a:effectLst/>
+                <a:uFillTx/>
+              </a:defRPr>
+            </a:defPPr>
+            <a:lvl1pPr marL="0" marR="0" indent="0" algn="l" defTabSz="412750" rtl="0" fontAlgn="auto" latinLnBrk="0" hangingPunct="0">
+              <a:lnSpc>
+                <a:spcPct val="100000"/>
+              </a:lnSpc>
+              <a:spcBef>
+                <a:spcPts val="2950"/>
+              </a:spcBef>
+              <a:spcAft>
+                <a:spcPts val="0"/>
+              </a:spcAft>
+              <a:buClrTx/>
+              <a:buSzTx/>
+              <a:buFontTx/>
+              <a:buNone/>
+              <a:tabLst/>
+              <a:defRPr kumimoji="0" sz="1200" b="0" i="0" u="none" strike="noStrike" cap="none" spc="0" normalizeH="0" baseline="0">
+                <a:ln>
+                  <a:noFill/>
+                </a:ln>
+                <a:solidFill>
+                  <a:schemeClr val="tx1">
+                    <a:tint val="82000"/>
+                  </a:schemeClr>
+                </a:solidFill>
+                <a:effectLst/>
+                <a:uFillTx/>
+                <a:latin typeface="Helvetica Neue"/>
+                <a:ea typeface="Helvetica Neue"/>
+                <a:cs typeface="Helvetica Neue"/>
+                <a:sym typeface="Helvetica Neue"/>
+              </a:defRPr>
+            </a:lvl1pPr>
+            <a:lvl2pPr marL="0" marR="0" indent="0" algn="l" defTabSz="412750" rtl="0" fontAlgn="auto" latinLnBrk="0" hangingPunct="0">
+              <a:lnSpc>
+                <a:spcPct val="100000"/>
+              </a:lnSpc>
+              <a:spcBef>
+                <a:spcPts val="2950"/>
+              </a:spcBef>
+              <a:spcAft>
+                <a:spcPts val="0"/>
+              </a:spcAft>
+              <a:buClrTx/>
+              <a:buSzTx/>
+              <a:buFontTx/>
+              <a:buNone/>
+              <a:tabLst/>
+              <a:defRPr kumimoji="0" sz="2400" b="0" i="0" u="none" strike="noStrike" cap="none" spc="0" normalizeH="0" baseline="0">
+                <a:ln>
+                  <a:noFill/>
+                </a:ln>
+                <a:solidFill>
+                  <a:srgbClr val="FFFFFF"/>
+                </a:solidFill>
+                <a:effectLst/>
+                <a:uFillTx/>
+                <a:latin typeface="Helvetica Neue"/>
+                <a:ea typeface="Helvetica Neue"/>
+                <a:cs typeface="Helvetica Neue"/>
+                <a:sym typeface="Helvetica Neue"/>
+              </a:defRPr>
+            </a:lvl2pPr>
+            <a:lvl3pPr marL="0" marR="0" indent="0" algn="l" defTabSz="412750" rtl="0" fontAlgn="auto" latinLnBrk="0" hangingPunct="0">
+              <a:lnSpc>
+                <a:spcPct val="100000"/>
+              </a:lnSpc>
+              <a:spcBef>
+                <a:spcPts val="2950"/>
+              </a:spcBef>
+              <a:spcAft>
+                <a:spcPts val="0"/>
+              </a:spcAft>
+              <a:buClrTx/>
+              <a:buSzTx/>
+              <a:buFontTx/>
+              <a:buNone/>
+              <a:tabLst/>
+              <a:defRPr kumimoji="0" sz="2400" b="0" i="0" u="none" strike="noStrike" cap="none" spc="0" normalizeH="0" baseline="0">
+                <a:ln>
+                  <a:noFill/>
+                </a:ln>
+                <a:solidFill>
+                  <a:srgbClr val="FFFFFF"/>
+                </a:solidFill>
+                <a:effectLst/>
+                <a:uFillTx/>
+                <a:latin typeface="Helvetica Neue"/>
+                <a:ea typeface="Helvetica Neue"/>
+                <a:cs typeface="Helvetica Neue"/>
+                <a:sym typeface="Helvetica Neue"/>
+              </a:defRPr>
+            </a:lvl3pPr>
+            <a:lvl4pPr marL="0" marR="0" indent="0" algn="l" defTabSz="412750" rtl="0" fontAlgn="auto" latinLnBrk="0" hangingPunct="0">
+              <a:lnSpc>
+                <a:spcPct val="100000"/>
+              </a:lnSpc>
+              <a:spcBef>
+                <a:spcPts val="2950"/>
+              </a:spcBef>
+              <a:spcAft>
+                <a:spcPts val="0"/>
+              </a:spcAft>
+              <a:buClrTx/>
+              <a:buSzTx/>
+              <a:buFontTx/>
+              <a:buNone/>
+              <a:tabLst/>
+              <a:defRPr kumimoji="0" sz="2400" b="0" i="0" u="none" strike="noStrike" cap="none" spc="0" normalizeH="0" baseline="0">
+                <a:ln>
+                  <a:noFill/>
+                </a:ln>
+                <a:solidFill>
+                  <a:srgbClr val="FFFFFF"/>
+                </a:solidFill>
+                <a:effectLst/>
+                <a:uFillTx/>
+                <a:latin typeface="Helvetica Neue"/>
+                <a:ea typeface="Helvetica Neue"/>
+                <a:cs typeface="Helvetica Neue"/>
+                <a:sym typeface="Helvetica Neue"/>
+              </a:defRPr>
+            </a:lvl4pPr>
+            <a:lvl5pPr marL="0" marR="0" indent="0" algn="l" defTabSz="412750" rtl="0" fontAlgn="auto" latinLnBrk="0" hangingPunct="0">
+              <a:lnSpc>
+                <a:spcPct val="100000"/>
+              </a:lnSpc>
+              <a:spcBef>
+                <a:spcPts val="2950"/>
+              </a:spcBef>
+              <a:spcAft>
+                <a:spcPts val="0"/>
+              </a:spcAft>
+              <a:buClrTx/>
+              <a:buSzTx/>
+              <a:buFontTx/>
+              <a:buNone/>
+              <a:tabLst/>
+              <a:defRPr kumimoji="0" sz="2400" b="0" i="0" u="none" strike="noStrike" cap="none" spc="0" normalizeH="0" baseline="0">
+                <a:ln>
+                  <a:noFill/>
+                </a:ln>
+                <a:solidFill>
+                  <a:srgbClr val="FFFFFF"/>
+                </a:solidFill>
+                <a:effectLst/>
+                <a:uFillTx/>
+                <a:latin typeface="Helvetica Neue"/>
+                <a:ea typeface="Helvetica Neue"/>
+                <a:cs typeface="Helvetica Neue"/>
+                <a:sym typeface="Helvetica Neue"/>
+              </a:defRPr>
+            </a:lvl5pPr>
+            <a:lvl6pPr marL="0" marR="0" indent="0" algn="l" defTabSz="412750" rtl="0" fontAlgn="auto" latinLnBrk="0" hangingPunct="0">
+              <a:lnSpc>
+                <a:spcPct val="100000"/>
+              </a:lnSpc>
+              <a:spcBef>
+                <a:spcPts val="2950"/>
+              </a:spcBef>
+              <a:spcAft>
+                <a:spcPts val="0"/>
+              </a:spcAft>
+              <a:buClrTx/>
+              <a:buSzTx/>
+              <a:buFontTx/>
+              <a:buNone/>
+              <a:tabLst/>
+              <a:defRPr kumimoji="0" sz="2400" b="0" i="0" u="none" strike="noStrike" cap="none" spc="0" normalizeH="0" baseline="0">
+                <a:ln>
+                  <a:noFill/>
+                </a:ln>
+                <a:solidFill>
+                  <a:srgbClr val="FFFFFF"/>
+                </a:solidFill>
+                <a:effectLst/>
+                <a:uFillTx/>
+                <a:latin typeface="Helvetica Neue"/>
+                <a:ea typeface="Helvetica Neue"/>
+                <a:cs typeface="Helvetica Neue"/>
+                <a:sym typeface="Helvetica Neue"/>
+              </a:defRPr>
+            </a:lvl6pPr>
+            <a:lvl7pPr marL="0" marR="0" indent="0" algn="l" defTabSz="412750" rtl="0" fontAlgn="auto" latinLnBrk="0" hangingPunct="0">
+              <a:lnSpc>
+                <a:spcPct val="100000"/>
+              </a:lnSpc>
+              <a:spcBef>
+                <a:spcPts val="2950"/>
+              </a:spcBef>
+              <a:spcAft>
+                <a:spcPts val="0"/>
+              </a:spcAft>
+              <a:buClrTx/>
+              <a:buSzTx/>
+              <a:buFontTx/>
+              <a:buNone/>
+              <a:tabLst/>
+              <a:defRPr kumimoji="0" sz="2400" b="0" i="0" u="none" strike="noStrike" cap="none" spc="0" normalizeH="0" baseline="0">
+                <a:ln>
+                  <a:noFill/>
+                </a:ln>
+                <a:solidFill>
+                  <a:srgbClr val="FFFFFF"/>
+                </a:solidFill>
+                <a:effectLst/>
+                <a:uFillTx/>
+                <a:latin typeface="Helvetica Neue"/>
+                <a:ea typeface="Helvetica Neue"/>
+                <a:cs typeface="Helvetica Neue"/>
+                <a:sym typeface="Helvetica Neue"/>
+              </a:defRPr>
+            </a:lvl7pPr>
+            <a:lvl8pPr marL="0" marR="0" indent="0" algn="l" defTabSz="412750" rtl="0" fontAlgn="auto" latinLnBrk="0" hangingPunct="0">
+              <a:lnSpc>
+                <a:spcPct val="100000"/>
+              </a:lnSpc>
+              <a:spcBef>
+                <a:spcPts val="2950"/>
+              </a:spcBef>
+              <a:spcAft>
+                <a:spcPts val="0"/>
+              </a:spcAft>
+              <a:buClrTx/>
+              <a:buSzTx/>
+              <a:buFontTx/>
+              <a:buNone/>
+              <a:tabLst/>
+              <a:defRPr kumimoji="0" sz="2400" b="0" i="0" u="none" strike="noStrike" cap="none" spc="0" normalizeH="0" baseline="0">
+                <a:ln>
+                  <a:noFill/>
+                </a:ln>
+                <a:solidFill>
+                  <a:srgbClr val="FFFFFF"/>
+                </a:solidFill>
+                <a:effectLst/>
+                <a:uFillTx/>
+                <a:latin typeface="Helvetica Neue"/>
+                <a:ea typeface="Helvetica Neue"/>
+                <a:cs typeface="Helvetica Neue"/>
+                <a:sym typeface="Helvetica Neue"/>
+              </a:defRPr>
+            </a:lvl8pPr>
+            <a:lvl9pPr marL="0" marR="0" indent="0" algn="l" defTabSz="412750" rtl="0" fontAlgn="auto" latinLnBrk="0" hangingPunct="0">
+              <a:lnSpc>
+                <a:spcPct val="100000"/>
+              </a:lnSpc>
+              <a:spcBef>
+                <a:spcPts val="2950"/>
+              </a:spcBef>
+              <a:spcAft>
+                <a:spcPts val="0"/>
+              </a:spcAft>
+              <a:buClrTx/>
+              <a:buSzTx/>
+              <a:buFontTx/>
+              <a:buNone/>
+              <a:tabLst/>
+              <a:defRPr kumimoji="0" sz="2400" b="0" i="0" u="none" strike="noStrike" cap="none" spc="0" normalizeH="0" baseline="0">
+                <a:ln>
+                  <a:noFill/>
+                </a:ln>
+                <a:solidFill>
+                  <a:srgbClr val="FFFFFF"/>
+                </a:solidFill>
+                <a:effectLst/>
+                <a:uFillTx/>
+                <a:latin typeface="Helvetica Neue"/>
+                <a:ea typeface="Helvetica Neue"/>
+                <a:cs typeface="Helvetica Neue"/>
+                <a:sym typeface="Helvetica Neue"/>
+              </a:defRPr>
+            </a:lvl9pPr>
+          </a:lstStyle>
+          <a:p>
+            <a:fld id="{FB2935F8-297A-F844-8555-D6E4631F7E59}" type="datetimeFigureOut">
+              <a:rPr lang="en-US" smtClean="0"/>
+              <a:pPr/>
+              <a:t>1/29/26</a:t>
+            </a:fld>
+            <a:endParaRPr lang="en-US"/>
+          </a:p>
+        </p:txBody>
+      </p:sp>
+      <p:sp>
+        <p:nvSpPr>
+          <p:cNvPr id="6" name="Footer Placeholder 5">
+            <a:extLst>
+              <a:ext uri="{FF2B5EF4-FFF2-40B4-BE49-F238E27FC236}">
+                <a16:creationId xmlns:a16="http://schemas.microsoft.com/office/drawing/2014/main" id="{17F6F134-AA6E-8596-3247-DDDBBB1FE512}"/>
+              </a:ext>
+            </a:extLst>
+          </p:cNvPr>
+          <p:cNvSpPr>
+            <a:spLocks noGrp="1"/>
+          </p:cNvSpPr>
+          <p:nvPr>
+            <p:ph type="ftr" sz="quarter" idx="11"/>
+          </p:nvPr>
+        </p:nvSpPr>
+        <p:spPr>
+          <a:xfrm>
+            <a:off x="4038600" y="6356350"/>
+            <a:ext cx="4114800" cy="365125"/>
+          </a:xfrm>
+          <a:prstGeom prst="rect">
+            <a:avLst/>
+          </a:prstGeom>
+        </p:spPr>
+        <p:txBody>
+          <a:bodyPr vert="horz" lIns="91440" tIns="45720" rIns="91440" bIns="45720" rtlCol="0" anchor="ctr"/>
+          <a:lstStyle>
+            <a:defPPr marL="0" marR="0" indent="0" algn="l" defTabSz="457200" rtl="0" fontAlgn="auto" latinLnBrk="1" hangingPunct="0">
+              <a:lnSpc>
+                <a:spcPct val="100000"/>
+              </a:lnSpc>
+              <a:spcBef>
+                <a:spcPts val="0"/>
+              </a:spcBef>
+              <a:spcAft>
+                <a:spcPts val="0"/>
+              </a:spcAft>
+              <a:buClrTx/>
+              <a:buSzTx/>
+              <a:buFontTx/>
+              <a:buNone/>
+              <a:tabLst/>
+              <a:defRPr kumimoji="0" sz="900" b="0" i="0" u="none" strike="noStrike" cap="none" spc="0" normalizeH="0" baseline="0">
+                <a:ln>
+                  <a:noFill/>
+                </a:ln>
+                <a:solidFill>
+                  <a:srgbClr val="000000"/>
+                </a:solidFill>
+                <a:effectLst/>
+                <a:uFillTx/>
+              </a:defRPr>
+            </a:defPPr>
+            <a:lvl1pPr marL="0" marR="0" indent="0" algn="ctr" defTabSz="412750" rtl="0" fontAlgn="auto" latinLnBrk="0" hangingPunct="0">
+              <a:lnSpc>
+                <a:spcPct val="100000"/>
+              </a:lnSpc>
+              <a:spcBef>
+                <a:spcPts val="2950"/>
+              </a:spcBef>
+              <a:spcAft>
+                <a:spcPts val="0"/>
+              </a:spcAft>
+              <a:buClrTx/>
+              <a:buSzTx/>
+              <a:buFontTx/>
+              <a:buNone/>
+              <a:tabLst/>
+              <a:defRPr kumimoji="0" sz="1200" b="0" i="0" u="none" strike="noStrike" cap="none" spc="0" normalizeH="0" baseline="0">
+                <a:ln>
+                  <a:noFill/>
+                </a:ln>
+                <a:solidFill>
+                  <a:schemeClr val="tx1">
+                    <a:tint val="82000"/>
+                  </a:schemeClr>
+                </a:solidFill>
+                <a:effectLst/>
+                <a:uFillTx/>
+                <a:latin typeface="Helvetica Neue"/>
+                <a:ea typeface="Helvetica Neue"/>
+                <a:cs typeface="Helvetica Neue"/>
+                <a:sym typeface="Helvetica Neue"/>
+              </a:defRPr>
+            </a:lvl1pPr>
+            <a:lvl2pPr marL="0" marR="0" indent="0" algn="l" defTabSz="412750" rtl="0" fontAlgn="auto" latinLnBrk="0" hangingPunct="0">
+              <a:lnSpc>
+                <a:spcPct val="100000"/>
+              </a:lnSpc>
+              <a:spcBef>
+                <a:spcPts val="2950"/>
+              </a:spcBef>
+              <a:spcAft>
+                <a:spcPts val="0"/>
+              </a:spcAft>
+              <a:buClrTx/>
+              <a:buSzTx/>
+              <a:buFontTx/>
+              <a:buNone/>
+              <a:tabLst/>
+              <a:defRPr kumimoji="0" sz="2400" b="0" i="0" u="none" strike="noStrike" cap="none" spc="0" normalizeH="0" baseline="0">
+                <a:ln>
+                  <a:noFill/>
+                </a:ln>
+                <a:solidFill>
+                  <a:srgbClr val="FFFFFF"/>
+                </a:solidFill>
+                <a:effectLst/>
+                <a:uFillTx/>
+                <a:latin typeface="Helvetica Neue"/>
+                <a:ea typeface="Helvetica Neue"/>
+                <a:cs typeface="Helvetica Neue"/>
+                <a:sym typeface="Helvetica Neue"/>
+              </a:defRPr>
+            </a:lvl2pPr>
+            <a:lvl3pPr marL="0" marR="0" indent="0" algn="l" defTabSz="412750" rtl="0" fontAlgn="auto" latinLnBrk="0" hangingPunct="0">
+              <a:lnSpc>
+                <a:spcPct val="100000"/>
+              </a:lnSpc>
+              <a:spcBef>
+                <a:spcPts val="2950"/>
+              </a:spcBef>
+              <a:spcAft>
+                <a:spcPts val="0"/>
+              </a:spcAft>
+              <a:buClrTx/>
+              <a:buSzTx/>
+              <a:buFontTx/>
+              <a:buNone/>
+              <a:tabLst/>
+              <a:defRPr kumimoji="0" sz="2400" b="0" i="0" u="none" strike="noStrike" cap="none" spc="0" normalizeH="0" baseline="0">
+                <a:ln>
+                  <a:noFill/>
+                </a:ln>
+                <a:solidFill>
+                  <a:srgbClr val="FFFFFF"/>
+                </a:solidFill>
+                <a:effectLst/>
+                <a:uFillTx/>
+                <a:latin typeface="Helvetica Neue"/>
+                <a:ea typeface="Helvetica Neue"/>
+                <a:cs typeface="Helvetica Neue"/>
+                <a:sym typeface="Helvetica Neue"/>
+              </a:defRPr>
+            </a:lvl3pPr>
+            <a:lvl4pPr marL="0" marR="0" indent="0" algn="l" defTabSz="412750" rtl="0" fontAlgn="auto" latinLnBrk="0" hangingPunct="0">
+              <a:lnSpc>
+                <a:spcPct val="100000"/>
+              </a:lnSpc>
+              <a:spcBef>
+                <a:spcPts val="2950"/>
+              </a:spcBef>
+              <a:spcAft>
+                <a:spcPts val="0"/>
+              </a:spcAft>
+              <a:buClrTx/>
+              <a:buSzTx/>
+              <a:buFontTx/>
+              <a:buNone/>
+              <a:tabLst/>
+              <a:defRPr kumimoji="0" sz="2400" b="0" i="0" u="none" strike="noStrike" cap="none" spc="0" normalizeH="0" baseline="0">
+                <a:ln>
+                  <a:noFill/>
+                </a:ln>
+                <a:solidFill>
+                  <a:srgbClr val="FFFFFF"/>
+                </a:solidFill>
+                <a:effectLst/>
+                <a:uFillTx/>
+                <a:latin typeface="Helvetica Neue"/>
+                <a:ea typeface="Helvetica Neue"/>
+                <a:cs typeface="Helvetica Neue"/>
+                <a:sym typeface="Helvetica Neue"/>
+              </a:defRPr>
+            </a:lvl4pPr>
+            <a:lvl5pPr marL="0" marR="0" indent="0" algn="l" defTabSz="412750" rtl="0" fontAlgn="auto" latinLnBrk="0" hangingPunct="0">
+              <a:lnSpc>
+                <a:spcPct val="100000"/>
+              </a:lnSpc>
+              <a:spcBef>
+                <a:spcPts val="2950"/>
+              </a:spcBef>
+              <a:spcAft>
+                <a:spcPts val="0"/>
+              </a:spcAft>
+              <a:buClrTx/>
+              <a:buSzTx/>
+              <a:buFontTx/>
+              <a:buNone/>
+              <a:tabLst/>
+              <a:defRPr kumimoji="0" sz="2400" b="0" i="0" u="none" strike="noStrike" cap="none" spc="0" normalizeH="0" baseline="0">
+                <a:ln>
+                  <a:noFill/>
+                </a:ln>
+                <a:solidFill>
+                  <a:srgbClr val="FFFFFF"/>
+                </a:solidFill>
+                <a:effectLst/>
+                <a:uFillTx/>
+                <a:latin typeface="Helvetica Neue"/>
+                <a:ea typeface="Helvetica Neue"/>
+                <a:cs typeface="Helvetica Neue"/>
+                <a:sym typeface="Helvetica Neue"/>
+              </a:defRPr>
+            </a:lvl5pPr>
+            <a:lvl6pPr marL="0" marR="0" indent="0" algn="l" defTabSz="412750" rtl="0" fontAlgn="auto" latinLnBrk="0" hangingPunct="0">
+              <a:lnSpc>
+                <a:spcPct val="100000"/>
+              </a:lnSpc>
+              <a:spcBef>
+                <a:spcPts val="2950"/>
+              </a:spcBef>
+              <a:spcAft>
+                <a:spcPts val="0"/>
+              </a:spcAft>
+              <a:buClrTx/>
+              <a:buSzTx/>
+              <a:buFontTx/>
+              <a:buNone/>
+              <a:tabLst/>
+              <a:defRPr kumimoji="0" sz="2400" b="0" i="0" u="none" strike="noStrike" cap="none" spc="0" normalizeH="0" baseline="0">
+                <a:ln>
+                  <a:noFill/>
+                </a:ln>
+                <a:solidFill>
+                  <a:srgbClr val="FFFFFF"/>
+                </a:solidFill>
+                <a:effectLst/>
+                <a:uFillTx/>
+                <a:latin typeface="Helvetica Neue"/>
+                <a:ea typeface="Helvetica Neue"/>
+                <a:cs typeface="Helvetica Neue"/>
+                <a:sym typeface="Helvetica Neue"/>
+              </a:defRPr>
+            </a:lvl6pPr>
+            <a:lvl7pPr marL="0" marR="0" indent="0" algn="l" defTabSz="412750" rtl="0" fontAlgn="auto" latinLnBrk="0" hangingPunct="0">
+              <a:lnSpc>
+                <a:spcPct val="100000"/>
+              </a:lnSpc>
+              <a:spcBef>
+                <a:spcPts val="2950"/>
+              </a:spcBef>
+              <a:spcAft>
+                <a:spcPts val="0"/>
+              </a:spcAft>
+              <a:buClrTx/>
+              <a:buSzTx/>
+              <a:buFontTx/>
+              <a:buNone/>
+              <a:tabLst/>
+              <a:defRPr kumimoji="0" sz="2400" b="0" i="0" u="none" strike="noStrike" cap="none" spc="0" normalizeH="0" baseline="0">
+                <a:ln>
+                  <a:noFill/>
+                </a:ln>
+                <a:solidFill>
+                  <a:srgbClr val="FFFFFF"/>
+                </a:solidFill>
+                <a:effectLst/>
+                <a:uFillTx/>
+                <a:latin typeface="Helvetica Neue"/>
+                <a:ea typeface="Helvetica Neue"/>
+                <a:cs typeface="Helvetica Neue"/>
+                <a:sym typeface="Helvetica Neue"/>
+              </a:defRPr>
+            </a:lvl7pPr>
+            <a:lvl8pPr marL="0" marR="0" indent="0" algn="l" defTabSz="412750" rtl="0" fontAlgn="auto" latinLnBrk="0" hangingPunct="0">
+              <a:lnSpc>
+                <a:spcPct val="100000"/>
+              </a:lnSpc>
+              <a:spcBef>
+                <a:spcPts val="2950"/>
+              </a:spcBef>
+              <a:spcAft>
+                <a:spcPts val="0"/>
+              </a:spcAft>
+              <a:buClrTx/>
+              <a:buSzTx/>
+              <a:buFontTx/>
+              <a:buNone/>
+              <a:tabLst/>
+              <a:defRPr kumimoji="0" sz="2400" b="0" i="0" u="none" strike="noStrike" cap="none" spc="0" normalizeH="0" baseline="0">
+                <a:ln>
+                  <a:noFill/>
+                </a:ln>
+                <a:solidFill>
+                  <a:srgbClr val="FFFFFF"/>
+                </a:solidFill>
+                <a:effectLst/>
+                <a:uFillTx/>
+                <a:latin typeface="Helvetica Neue"/>
+                <a:ea typeface="Helvetica Neue"/>
+                <a:cs typeface="Helvetica Neue"/>
+                <a:sym typeface="Helvetica Neue"/>
+              </a:defRPr>
+            </a:lvl8pPr>
+            <a:lvl9pPr marL="0" marR="0" indent="0" algn="l" defTabSz="412750" rtl="0" fontAlgn="auto" latinLnBrk="0" hangingPunct="0">
+              <a:lnSpc>
+                <a:spcPct val="100000"/>
+              </a:lnSpc>
+              <a:spcBef>
+                <a:spcPts val="2950"/>
+              </a:spcBef>
+              <a:spcAft>
+                <a:spcPts val="0"/>
+              </a:spcAft>
+              <a:buClrTx/>
+              <a:buSzTx/>
+              <a:buFontTx/>
+              <a:buNone/>
+              <a:tabLst/>
+              <a:defRPr kumimoji="0" sz="2400" b="0" i="0" u="none" strike="noStrike" cap="none" spc="0" normalizeH="0" baseline="0">
+                <a:ln>
+                  <a:noFill/>
+                </a:ln>
+                <a:solidFill>
+                  <a:srgbClr val="FFFFFF"/>
+                </a:solidFill>
+                <a:effectLst/>
+                <a:uFillTx/>
+                <a:latin typeface="Helvetica Neue"/>
+                <a:ea typeface="Helvetica Neue"/>
+                <a:cs typeface="Helvetica Neue"/>
+                <a:sym typeface="Helvetica Neue"/>
+              </a:defRPr>
+            </a:lvl9pPr>
+          </a:lstStyle>
+          <a:p>
+            <a:endParaRPr lang="en-US"/>
+          </a:p>
+        </p:txBody>
+      </p:sp>
+      <p:sp>
+        <p:nvSpPr>
+          <p:cNvPr id="7" name="Slide Number Placeholder 6">
+            <a:extLst>
+              <a:ext uri="{FF2B5EF4-FFF2-40B4-BE49-F238E27FC236}">
+                <a16:creationId xmlns:a16="http://schemas.microsoft.com/office/drawing/2014/main" id="{5AEB01C0-E681-E320-C36D-777A2BC4D6D1}"/>
+              </a:ext>
+            </a:extLst>
+          </p:cNvPr>
+          <p:cNvSpPr>
+            <a:spLocks noGrp="1"/>
+          </p:cNvSpPr>
+          <p:nvPr>
+            <p:ph type="sldNum" sz="quarter" idx="12"/>
+          </p:nvPr>
+        </p:nvSpPr>
+        <p:spPr/>
+        <p:txBody>
+          <a:bodyPr/>
+          <a:lstStyle/>
+          <a:p>
+            <a:fld id="{81D3CA6A-5F61-7D45-9E78-D3AD76A392F9}" type="slidenum">
+              <a:rPr lang="en-US" smtClean="0"/>
+              <a:t>‹#›</a:t>
+            </a:fld>
+            <a:endParaRPr lang="en-US"/>
+          </a:p>
+        </p:txBody>
+      </p:sp>
+      <p:sp>
+        <p:nvSpPr>
+          <p:cNvPr id="9" name="Title 1">
+            <a:extLst>
+              <a:ext uri="{FF2B5EF4-FFF2-40B4-BE49-F238E27FC236}">
+                <a16:creationId xmlns:a16="http://schemas.microsoft.com/office/drawing/2014/main" id="{01ECDBB8-7786-A968-428A-A6CF13DF0497}"/>
+              </a:ext>
+            </a:extLst>
+          </p:cNvPr>
+          <p:cNvSpPr>
+            <a:spLocks noGrp="1"/>
+          </p:cNvSpPr>
+          <p:nvPr>
+            <p:ph type="title"/>
+          </p:nvPr>
+        </p:nvSpPr>
+        <p:spPr>
+          <a:xfrm>
+            <a:off x="850901" y="386899"/>
+            <a:ext cx="10496550" cy="603701"/>
+          </a:xfrm>
+        </p:spPr>
+        <p:txBody>
+          <a:bodyPr/>
+          <a:lstStyle/>
+          <a:p>
+            <a:r>
+              <a:rPr lang="en-US" dirty="0"/>
+              <a:t>Click to edit Master title style</a:t>
+            </a:r>
+          </a:p>
+        </p:txBody>
+      </p:sp>
+    </p:spTree>
+    <p:extLst>
+      <p:ext uri="{BB962C8B-B14F-4D97-AF65-F5344CB8AC3E}">
+        <p14:creationId xmlns:p14="http://schemas.microsoft.com/office/powerpoint/2010/main" val="328191448"/>
+      </p:ext>
+    </p:extLst>
+  </p:cSld>
+  <p:clrMapOvr>
+    <a:masterClrMapping/>
+  </p:clrMapOvr>
+  <p:transition spd="med"/>
+</p:sldLayout>
+</file>
+
+<file path=ppt/slideLayouts/slideLayout11.xml><?xml version="1.0" encoding="utf-8"?>
+<p:sldLayout xmlns:a="http://schemas.openxmlformats.org/drawingml/2006/main" xmlns:r="http://schemas.openxmlformats.org/officeDocument/2006/relationships" xmlns:p="http://schemas.openxmlformats.org/presentationml/2006/main" preserve="1" userDrawn="1">
+  <p:cSld name="Content and Text (vertical)">
+    <p:spTree>
+      <p:nvGrpSpPr>
+        <p:cNvPr id="1" name=""/>
+        <p:cNvGrpSpPr/>
+        <p:nvPr/>
+      </p:nvGrpSpPr>
+      <p:grpSpPr>
+        <a:xfrm>
+          <a:off x="0" y="0"/>
+          <a:ext cx="0" cy="0"/>
+          <a:chOff x="0" y="0"/>
+          <a:chExt cx="0" cy="0"/>
+        </a:xfrm>
+      </p:grpSpPr>
+      <p:sp>
+        <p:nvSpPr>
+          <p:cNvPr id="3" name="Content Placeholder 2">
+            <a:extLst>
+              <a:ext uri="{FF2B5EF4-FFF2-40B4-BE49-F238E27FC236}">
+                <a16:creationId xmlns:a16="http://schemas.microsoft.com/office/drawing/2014/main" id="{EB85AEC4-1825-0A29-E8E9-2EBD1391FDC6}"/>
+              </a:ext>
+            </a:extLst>
+          </p:cNvPr>
+          <p:cNvSpPr>
+            <a:spLocks noGrp="1"/>
+          </p:cNvSpPr>
+          <p:nvPr>
+            <p:ph sz="half" idx="1"/>
+          </p:nvPr>
+        </p:nvSpPr>
+        <p:spPr>
+          <a:xfrm>
+            <a:off x="838199" y="1267959"/>
+            <a:ext cx="10509251" cy="2389642"/>
+          </a:xfrm>
+        </p:spPr>
+        <p:txBody>
+          <a:bodyPr/>
+          <a:lstStyle/>
+          <a:p>
+            <a:pPr lvl="0"/>
+            <a:r>
+              <a:rPr lang="en-US" dirty="0"/>
+              <a:t>Click to edit Master text styles</a:t>
+            </a:r>
+          </a:p>
+          <a:p>
+            <a:pPr lvl="1"/>
+            <a:r>
+              <a:rPr lang="en-US" dirty="0"/>
+              <a:t>Second level</a:t>
+            </a:r>
+          </a:p>
+        </p:txBody>
+      </p:sp>
+      <p:sp>
+        <p:nvSpPr>
+          <p:cNvPr id="5" name="Date Placeholder 4">
+            <a:extLst>
+              <a:ext uri="{FF2B5EF4-FFF2-40B4-BE49-F238E27FC236}">
+                <a16:creationId xmlns:a16="http://schemas.microsoft.com/office/drawing/2014/main" id="{71515902-1B4F-1080-8519-F743FA0C5D3C}"/>
+              </a:ext>
+            </a:extLst>
+          </p:cNvPr>
+          <p:cNvSpPr>
+            <a:spLocks noGrp="1"/>
+          </p:cNvSpPr>
+          <p:nvPr>
+            <p:ph type="dt" sz="half" idx="10"/>
+          </p:nvPr>
+        </p:nvSpPr>
+        <p:spPr>
+          <a:xfrm>
+            <a:off x="838200" y="6356350"/>
+            <a:ext cx="2743200" cy="365125"/>
+          </a:xfrm>
+          <a:prstGeom prst="rect">
+            <a:avLst/>
+          </a:prstGeom>
+        </p:spPr>
+        <p:txBody>
+          <a:bodyPr vert="horz" lIns="91440" tIns="45720" rIns="91440" bIns="45720" rtlCol="0" anchor="ctr"/>
+          <a:lstStyle>
+            <a:defPPr marL="0" marR="0" indent="0" algn="l" defTabSz="457200" rtl="0" fontAlgn="auto" latinLnBrk="1" hangingPunct="0">
+              <a:lnSpc>
+                <a:spcPct val="100000"/>
+              </a:lnSpc>
+              <a:spcBef>
+                <a:spcPts val="0"/>
+              </a:spcBef>
+              <a:spcAft>
+                <a:spcPts val="0"/>
+              </a:spcAft>
+              <a:buClrTx/>
+              <a:buSzTx/>
+              <a:buFontTx/>
+              <a:buNone/>
+              <a:tabLst/>
+              <a:defRPr kumimoji="0" sz="900" b="0" i="0" u="none" strike="noStrike" cap="none" spc="0" normalizeH="0" baseline="0">
+                <a:ln>
+                  <a:noFill/>
+                </a:ln>
+                <a:solidFill>
+                  <a:srgbClr val="000000"/>
+                </a:solidFill>
+                <a:effectLst/>
+                <a:uFillTx/>
+              </a:defRPr>
+            </a:defPPr>
+            <a:lvl1pPr marL="0" marR="0" indent="0" algn="l" defTabSz="412750" rtl="0" fontAlgn="auto" latinLnBrk="0" hangingPunct="0">
+              <a:lnSpc>
+                <a:spcPct val="100000"/>
+              </a:lnSpc>
+              <a:spcBef>
+                <a:spcPts val="2950"/>
+              </a:spcBef>
+              <a:spcAft>
+                <a:spcPts val="0"/>
+              </a:spcAft>
+              <a:buClrTx/>
+              <a:buSzTx/>
+              <a:buFontTx/>
+              <a:buNone/>
+              <a:tabLst/>
+              <a:defRPr kumimoji="0" sz="1200" b="0" i="0" u="none" strike="noStrike" cap="none" spc="0" normalizeH="0" baseline="0">
+                <a:ln>
+                  <a:noFill/>
+                </a:ln>
+                <a:solidFill>
+                  <a:schemeClr val="tx1">
+                    <a:tint val="82000"/>
+                  </a:schemeClr>
+                </a:solidFill>
+                <a:effectLst/>
+                <a:uFillTx/>
+                <a:latin typeface="Helvetica Neue"/>
+                <a:ea typeface="Helvetica Neue"/>
+                <a:cs typeface="Helvetica Neue"/>
+                <a:sym typeface="Helvetica Neue"/>
+              </a:defRPr>
+            </a:lvl1pPr>
+            <a:lvl2pPr marL="0" marR="0" indent="0" algn="l" defTabSz="412750" rtl="0" fontAlgn="auto" latinLnBrk="0" hangingPunct="0">
+              <a:lnSpc>
+                <a:spcPct val="100000"/>
+              </a:lnSpc>
+              <a:spcBef>
+                <a:spcPts val="2950"/>
+              </a:spcBef>
+              <a:spcAft>
+                <a:spcPts val="0"/>
+              </a:spcAft>
+              <a:buClrTx/>
+              <a:buSzTx/>
+              <a:buFontTx/>
+              <a:buNone/>
+              <a:tabLst/>
+              <a:defRPr kumimoji="0" sz="2400" b="0" i="0" u="none" strike="noStrike" cap="none" spc="0" normalizeH="0" baseline="0">
+                <a:ln>
+                  <a:noFill/>
+                </a:ln>
+                <a:solidFill>
+                  <a:srgbClr val="FFFFFF"/>
+                </a:solidFill>
+                <a:effectLst/>
+                <a:uFillTx/>
+                <a:latin typeface="Helvetica Neue"/>
+                <a:ea typeface="Helvetica Neue"/>
+                <a:cs typeface="Helvetica Neue"/>
+                <a:sym typeface="Helvetica Neue"/>
+              </a:defRPr>
+            </a:lvl2pPr>
+            <a:lvl3pPr marL="0" marR="0" indent="0" algn="l" defTabSz="412750" rtl="0" fontAlgn="auto" latinLnBrk="0" hangingPunct="0">
+              <a:lnSpc>
+                <a:spcPct val="100000"/>
+              </a:lnSpc>
+              <a:spcBef>
+                <a:spcPts val="2950"/>
+              </a:spcBef>
+              <a:spcAft>
+                <a:spcPts val="0"/>
+              </a:spcAft>
+              <a:buClrTx/>
+              <a:buSzTx/>
+              <a:buFontTx/>
+              <a:buNone/>
+              <a:tabLst/>
+              <a:defRPr kumimoji="0" sz="2400" b="0" i="0" u="none" strike="noStrike" cap="none" spc="0" normalizeH="0" baseline="0">
+                <a:ln>
+                  <a:noFill/>
+                </a:ln>
+                <a:solidFill>
+                  <a:srgbClr val="FFFFFF"/>
+                </a:solidFill>
+                <a:effectLst/>
+                <a:uFillTx/>
+                <a:latin typeface="Helvetica Neue"/>
+                <a:ea typeface="Helvetica Neue"/>
+                <a:cs typeface="Helvetica Neue"/>
+                <a:sym typeface="Helvetica Neue"/>
+              </a:defRPr>
+            </a:lvl3pPr>
+            <a:lvl4pPr marL="0" marR="0" indent="0" algn="l" defTabSz="412750" rtl="0" fontAlgn="auto" latinLnBrk="0" hangingPunct="0">
+              <a:lnSpc>
+                <a:spcPct val="100000"/>
+              </a:lnSpc>
+              <a:spcBef>
+                <a:spcPts val="2950"/>
+              </a:spcBef>
+              <a:spcAft>
+                <a:spcPts val="0"/>
+              </a:spcAft>
+              <a:buClrTx/>
+              <a:buSzTx/>
+              <a:buFontTx/>
+              <a:buNone/>
+              <a:tabLst/>
+              <a:defRPr kumimoji="0" sz="2400" b="0" i="0" u="none" strike="noStrike" cap="none" spc="0" normalizeH="0" baseline="0">
+                <a:ln>
+                  <a:noFill/>
+                </a:ln>
+                <a:solidFill>
+                  <a:srgbClr val="FFFFFF"/>
+                </a:solidFill>
+                <a:effectLst/>
+                <a:uFillTx/>
+                <a:latin typeface="Helvetica Neue"/>
+                <a:ea typeface="Helvetica Neue"/>
+                <a:cs typeface="Helvetica Neue"/>
+                <a:sym typeface="Helvetica Neue"/>
+              </a:defRPr>
+            </a:lvl4pPr>
+            <a:lvl5pPr marL="0" marR="0" indent="0" algn="l" defTabSz="412750" rtl="0" fontAlgn="auto" latinLnBrk="0" hangingPunct="0">
+              <a:lnSpc>
+                <a:spcPct val="100000"/>
+              </a:lnSpc>
+              <a:spcBef>
+                <a:spcPts val="2950"/>
+              </a:spcBef>
+              <a:spcAft>
+                <a:spcPts val="0"/>
+              </a:spcAft>
+              <a:buClrTx/>
+              <a:buSzTx/>
+              <a:buFontTx/>
+              <a:buNone/>
+              <a:tabLst/>
+              <a:defRPr kumimoji="0" sz="2400" b="0" i="0" u="none" strike="noStrike" cap="none" spc="0" normalizeH="0" baseline="0">
+                <a:ln>
+                  <a:noFill/>
+                </a:ln>
+                <a:solidFill>
+                  <a:srgbClr val="FFFFFF"/>
+                </a:solidFill>
+                <a:effectLst/>
+                <a:uFillTx/>
+                <a:latin typeface="Helvetica Neue"/>
+                <a:ea typeface="Helvetica Neue"/>
+                <a:cs typeface="Helvetica Neue"/>
+                <a:sym typeface="Helvetica Neue"/>
+              </a:defRPr>
+            </a:lvl5pPr>
+            <a:lvl6pPr marL="0" marR="0" indent="0" algn="l" defTabSz="412750" rtl="0" fontAlgn="auto" latinLnBrk="0" hangingPunct="0">
+              <a:lnSpc>
+                <a:spcPct val="100000"/>
+              </a:lnSpc>
+              <a:spcBef>
+                <a:spcPts val="2950"/>
+              </a:spcBef>
+              <a:spcAft>
+                <a:spcPts val="0"/>
+              </a:spcAft>
+              <a:buClrTx/>
+              <a:buSzTx/>
+              <a:buFontTx/>
+              <a:buNone/>
+              <a:tabLst/>
+              <a:defRPr kumimoji="0" sz="2400" b="0" i="0" u="none" strike="noStrike" cap="none" spc="0" normalizeH="0" baseline="0">
+                <a:ln>
+                  <a:noFill/>
+                </a:ln>
+                <a:solidFill>
+                  <a:srgbClr val="FFFFFF"/>
+                </a:solidFill>
+                <a:effectLst/>
+                <a:uFillTx/>
+                <a:latin typeface="Helvetica Neue"/>
+                <a:ea typeface="Helvetica Neue"/>
+                <a:cs typeface="Helvetica Neue"/>
+                <a:sym typeface="Helvetica Neue"/>
+              </a:defRPr>
+            </a:lvl6pPr>
+            <a:lvl7pPr marL="0" marR="0" indent="0" algn="l" defTabSz="412750" rtl="0" fontAlgn="auto" latinLnBrk="0" hangingPunct="0">
+              <a:lnSpc>
+                <a:spcPct val="100000"/>
+              </a:lnSpc>
+              <a:spcBef>
+                <a:spcPts val="2950"/>
+              </a:spcBef>
+              <a:spcAft>
+                <a:spcPts val="0"/>
+              </a:spcAft>
+              <a:buClrTx/>
+              <a:buSzTx/>
+              <a:buFontTx/>
+              <a:buNone/>
+              <a:tabLst/>
+              <a:defRPr kumimoji="0" sz="2400" b="0" i="0" u="none" strike="noStrike" cap="none" spc="0" normalizeH="0" baseline="0">
+                <a:ln>
+                  <a:noFill/>
+                </a:ln>
+                <a:solidFill>
+                  <a:srgbClr val="FFFFFF"/>
+                </a:solidFill>
+                <a:effectLst/>
+                <a:uFillTx/>
+                <a:latin typeface="Helvetica Neue"/>
+                <a:ea typeface="Helvetica Neue"/>
+                <a:cs typeface="Helvetica Neue"/>
+                <a:sym typeface="Helvetica Neue"/>
+              </a:defRPr>
+            </a:lvl7pPr>
+            <a:lvl8pPr marL="0" marR="0" indent="0" algn="l" defTabSz="412750" rtl="0" fontAlgn="auto" latinLnBrk="0" hangingPunct="0">
+              <a:lnSpc>
+                <a:spcPct val="100000"/>
+              </a:lnSpc>
+              <a:spcBef>
+                <a:spcPts val="2950"/>
+              </a:spcBef>
+              <a:spcAft>
+                <a:spcPts val="0"/>
+              </a:spcAft>
+              <a:buClrTx/>
+              <a:buSzTx/>
+              <a:buFontTx/>
+              <a:buNone/>
+              <a:tabLst/>
+              <a:defRPr kumimoji="0" sz="2400" b="0" i="0" u="none" strike="noStrike" cap="none" spc="0" normalizeH="0" baseline="0">
+                <a:ln>
+                  <a:noFill/>
+                </a:ln>
+                <a:solidFill>
+                  <a:srgbClr val="FFFFFF"/>
+                </a:solidFill>
+                <a:effectLst/>
+                <a:uFillTx/>
+                <a:latin typeface="Helvetica Neue"/>
+                <a:ea typeface="Helvetica Neue"/>
+                <a:cs typeface="Helvetica Neue"/>
+                <a:sym typeface="Helvetica Neue"/>
+              </a:defRPr>
+            </a:lvl8pPr>
+            <a:lvl9pPr marL="0" marR="0" indent="0" algn="l" defTabSz="412750" rtl="0" fontAlgn="auto" latinLnBrk="0" hangingPunct="0">
+              <a:lnSpc>
+                <a:spcPct val="100000"/>
+              </a:lnSpc>
+              <a:spcBef>
+                <a:spcPts val="2950"/>
+              </a:spcBef>
+              <a:spcAft>
+                <a:spcPts val="0"/>
+              </a:spcAft>
+              <a:buClrTx/>
+              <a:buSzTx/>
+              <a:buFontTx/>
+              <a:buNone/>
+              <a:tabLst/>
+              <a:defRPr kumimoji="0" sz="2400" b="0" i="0" u="none" strike="noStrike" cap="none" spc="0" normalizeH="0" baseline="0">
+                <a:ln>
+                  <a:noFill/>
+                </a:ln>
+                <a:solidFill>
+                  <a:srgbClr val="FFFFFF"/>
+                </a:solidFill>
+                <a:effectLst/>
+                <a:uFillTx/>
+                <a:latin typeface="Helvetica Neue"/>
+                <a:ea typeface="Helvetica Neue"/>
+                <a:cs typeface="Helvetica Neue"/>
+                <a:sym typeface="Helvetica Neue"/>
+              </a:defRPr>
+            </a:lvl9pPr>
+          </a:lstStyle>
+          <a:p>
+            <a:fld id="{FB2935F8-297A-F844-8555-D6E4631F7E59}" type="datetimeFigureOut">
+              <a:rPr lang="en-US" smtClean="0"/>
+              <a:pPr/>
+              <a:t>1/29/26</a:t>
+            </a:fld>
+            <a:endParaRPr lang="en-US"/>
+          </a:p>
+        </p:txBody>
+      </p:sp>
+      <p:sp>
+        <p:nvSpPr>
+          <p:cNvPr id="6" name="Footer Placeholder 5">
+            <a:extLst>
+              <a:ext uri="{FF2B5EF4-FFF2-40B4-BE49-F238E27FC236}">
+                <a16:creationId xmlns:a16="http://schemas.microsoft.com/office/drawing/2014/main" id="{17F6F134-AA6E-8596-3247-DDDBBB1FE512}"/>
+              </a:ext>
+            </a:extLst>
+          </p:cNvPr>
+          <p:cNvSpPr>
+            <a:spLocks noGrp="1"/>
+          </p:cNvSpPr>
+          <p:nvPr>
+            <p:ph type="ftr" sz="quarter" idx="11"/>
+          </p:nvPr>
+        </p:nvSpPr>
+        <p:spPr>
+          <a:xfrm>
+            <a:off x="4038600" y="6356350"/>
+            <a:ext cx="4114800" cy="365125"/>
+          </a:xfrm>
+          <a:prstGeom prst="rect">
+            <a:avLst/>
+          </a:prstGeom>
+        </p:spPr>
+        <p:txBody>
+          <a:bodyPr vert="horz" lIns="91440" tIns="45720" rIns="91440" bIns="45720" rtlCol="0" anchor="ctr"/>
+          <a:lstStyle>
+            <a:defPPr marL="0" marR="0" indent="0" algn="l" defTabSz="457200" rtl="0" fontAlgn="auto" latinLnBrk="1" hangingPunct="0">
+              <a:lnSpc>
+                <a:spcPct val="100000"/>
+              </a:lnSpc>
+              <a:spcBef>
+                <a:spcPts val="0"/>
+              </a:spcBef>
+              <a:spcAft>
+                <a:spcPts val="0"/>
+              </a:spcAft>
+              <a:buClrTx/>
+              <a:buSzTx/>
+              <a:buFontTx/>
+              <a:buNone/>
+              <a:tabLst/>
+              <a:defRPr kumimoji="0" sz="900" b="0" i="0" u="none" strike="noStrike" cap="none" spc="0" normalizeH="0" baseline="0">
+                <a:ln>
+                  <a:noFill/>
+                </a:ln>
+                <a:solidFill>
+                  <a:srgbClr val="000000"/>
+                </a:solidFill>
+                <a:effectLst/>
+                <a:uFillTx/>
+              </a:defRPr>
+            </a:defPPr>
+            <a:lvl1pPr marL="0" marR="0" indent="0" algn="ctr" defTabSz="412750" rtl="0" fontAlgn="auto" latinLnBrk="0" hangingPunct="0">
+              <a:lnSpc>
+                <a:spcPct val="100000"/>
+              </a:lnSpc>
+              <a:spcBef>
+                <a:spcPts val="2950"/>
+              </a:spcBef>
+              <a:spcAft>
+                <a:spcPts val="0"/>
+              </a:spcAft>
+              <a:buClrTx/>
+              <a:buSzTx/>
+              <a:buFontTx/>
+              <a:buNone/>
+              <a:tabLst/>
+              <a:defRPr kumimoji="0" sz="1200" b="0" i="0" u="none" strike="noStrike" cap="none" spc="0" normalizeH="0" baseline="0">
+                <a:ln>
+                  <a:noFill/>
+                </a:ln>
+                <a:solidFill>
+                  <a:schemeClr val="tx1">
+                    <a:tint val="82000"/>
+                  </a:schemeClr>
+                </a:solidFill>
+                <a:effectLst/>
+                <a:uFillTx/>
+                <a:latin typeface="Helvetica Neue"/>
+                <a:ea typeface="Helvetica Neue"/>
+                <a:cs typeface="Helvetica Neue"/>
+                <a:sym typeface="Helvetica Neue"/>
+              </a:defRPr>
+            </a:lvl1pPr>
+            <a:lvl2pPr marL="0" marR="0" indent="0" algn="l" defTabSz="412750" rtl="0" fontAlgn="auto" latinLnBrk="0" hangingPunct="0">
+              <a:lnSpc>
+                <a:spcPct val="100000"/>
+              </a:lnSpc>
+              <a:spcBef>
+                <a:spcPts val="2950"/>
+              </a:spcBef>
+              <a:spcAft>
+                <a:spcPts val="0"/>
+              </a:spcAft>
+              <a:buClrTx/>
+              <a:buSzTx/>
+              <a:buFontTx/>
+              <a:buNone/>
+              <a:tabLst/>
+              <a:defRPr kumimoji="0" sz="2400" b="0" i="0" u="none" strike="noStrike" cap="none" spc="0" normalizeH="0" baseline="0">
+                <a:ln>
+                  <a:noFill/>
+                </a:ln>
+                <a:solidFill>
+                  <a:srgbClr val="FFFFFF"/>
+                </a:solidFill>
+                <a:effectLst/>
+                <a:uFillTx/>
+                <a:latin typeface="Helvetica Neue"/>
+                <a:ea typeface="Helvetica Neue"/>
+                <a:cs typeface="Helvetica Neue"/>
+                <a:sym typeface="Helvetica Neue"/>
+              </a:defRPr>
+            </a:lvl2pPr>
+            <a:lvl3pPr marL="0" marR="0" indent="0" algn="l" defTabSz="412750" rtl="0" fontAlgn="auto" latinLnBrk="0" hangingPunct="0">
+              <a:lnSpc>
+                <a:spcPct val="100000"/>
+              </a:lnSpc>
+              <a:spcBef>
+                <a:spcPts val="2950"/>
+              </a:spcBef>
+              <a:spcAft>
+                <a:spcPts val="0"/>
+              </a:spcAft>
+              <a:buClrTx/>
+              <a:buSzTx/>
+              <a:buFontTx/>
+              <a:buNone/>
+              <a:tabLst/>
+              <a:defRPr kumimoji="0" sz="2400" b="0" i="0" u="none" strike="noStrike" cap="none" spc="0" normalizeH="0" baseline="0">
+                <a:ln>
+                  <a:noFill/>
+                </a:ln>
+                <a:solidFill>
+                  <a:srgbClr val="FFFFFF"/>
+                </a:solidFill>
+                <a:effectLst/>
+                <a:uFillTx/>
+                <a:latin typeface="Helvetica Neue"/>
+                <a:ea typeface="Helvetica Neue"/>
+                <a:cs typeface="Helvetica Neue"/>
+                <a:sym typeface="Helvetica Neue"/>
+              </a:defRPr>
+            </a:lvl3pPr>
+            <a:lvl4pPr marL="0" marR="0" indent="0" algn="l" defTabSz="412750" rtl="0" fontAlgn="auto" latinLnBrk="0" hangingPunct="0">
+              <a:lnSpc>
+                <a:spcPct val="100000"/>
+              </a:lnSpc>
+              <a:spcBef>
+                <a:spcPts val="2950"/>
+              </a:spcBef>
+              <a:spcAft>
+                <a:spcPts val="0"/>
+              </a:spcAft>
+              <a:buClrTx/>
+              <a:buSzTx/>
+              <a:buFontTx/>
+              <a:buNone/>
+              <a:tabLst/>
+              <a:defRPr kumimoji="0" sz="2400" b="0" i="0" u="none" strike="noStrike" cap="none" spc="0" normalizeH="0" baseline="0">
+                <a:ln>
+                  <a:noFill/>
+                </a:ln>
+                <a:solidFill>
+                  <a:srgbClr val="FFFFFF"/>
+                </a:solidFill>
+                <a:effectLst/>
+                <a:uFillTx/>
+                <a:latin typeface="Helvetica Neue"/>
+                <a:ea typeface="Helvetica Neue"/>
+                <a:cs typeface="Helvetica Neue"/>
+                <a:sym typeface="Helvetica Neue"/>
+              </a:defRPr>
+            </a:lvl4pPr>
+            <a:lvl5pPr marL="0" marR="0" indent="0" algn="l" defTabSz="412750" rtl="0" fontAlgn="auto" latinLnBrk="0" hangingPunct="0">
+              <a:lnSpc>
+                <a:spcPct val="100000"/>
+              </a:lnSpc>
+              <a:spcBef>
+                <a:spcPts val="2950"/>
+              </a:spcBef>
+              <a:spcAft>
+                <a:spcPts val="0"/>
+              </a:spcAft>
+              <a:buClrTx/>
+              <a:buSzTx/>
+              <a:buFontTx/>
+              <a:buNone/>
+              <a:tabLst/>
+              <a:defRPr kumimoji="0" sz="2400" b="0" i="0" u="none" strike="noStrike" cap="none" spc="0" normalizeH="0" baseline="0">
+                <a:ln>
+                  <a:noFill/>
+                </a:ln>
+                <a:solidFill>
+                  <a:srgbClr val="FFFFFF"/>
+                </a:solidFill>
+                <a:effectLst/>
+                <a:uFillTx/>
+                <a:latin typeface="Helvetica Neue"/>
+                <a:ea typeface="Helvetica Neue"/>
+                <a:cs typeface="Helvetica Neue"/>
+                <a:sym typeface="Helvetica Neue"/>
+              </a:defRPr>
+            </a:lvl5pPr>
+            <a:lvl6pPr marL="0" marR="0" indent="0" algn="l" defTabSz="412750" rtl="0" fontAlgn="auto" latinLnBrk="0" hangingPunct="0">
+              <a:lnSpc>
+                <a:spcPct val="100000"/>
+              </a:lnSpc>
+              <a:spcBef>
+                <a:spcPts val="2950"/>
+              </a:spcBef>
+              <a:spcAft>
+                <a:spcPts val="0"/>
+              </a:spcAft>
+              <a:buClrTx/>
+              <a:buSzTx/>
+              <a:buFontTx/>
+              <a:buNone/>
+              <a:tabLst/>
+              <a:defRPr kumimoji="0" sz="2400" b="0" i="0" u="none" strike="noStrike" cap="none" spc="0" normalizeH="0" baseline="0">
+                <a:ln>
+                  <a:noFill/>
+                </a:ln>
+                <a:solidFill>
+                  <a:srgbClr val="FFFFFF"/>
+                </a:solidFill>
+                <a:effectLst/>
+                <a:uFillTx/>
+                <a:latin typeface="Helvetica Neue"/>
+                <a:ea typeface="Helvetica Neue"/>
+                <a:cs typeface="Helvetica Neue"/>
+                <a:sym typeface="Helvetica Neue"/>
+              </a:defRPr>
+            </a:lvl6pPr>
+            <a:lvl7pPr marL="0" marR="0" indent="0" algn="l" defTabSz="412750" rtl="0" fontAlgn="auto" latinLnBrk="0" hangingPunct="0">
+              <a:lnSpc>
+                <a:spcPct val="100000"/>
+              </a:lnSpc>
+              <a:spcBef>
+                <a:spcPts val="2950"/>
+              </a:spcBef>
+              <a:spcAft>
+                <a:spcPts val="0"/>
+              </a:spcAft>
+              <a:buClrTx/>
+              <a:buSzTx/>
+              <a:buFontTx/>
+              <a:buNone/>
+              <a:tabLst/>
+              <a:defRPr kumimoji="0" sz="2400" b="0" i="0" u="none" strike="noStrike" cap="none" spc="0" normalizeH="0" baseline="0">
+                <a:ln>
+                  <a:noFill/>
+                </a:ln>
+                <a:solidFill>
+                  <a:srgbClr val="FFFFFF"/>
+                </a:solidFill>
+                <a:effectLst/>
+                <a:uFillTx/>
+                <a:latin typeface="Helvetica Neue"/>
+                <a:ea typeface="Helvetica Neue"/>
+                <a:cs typeface="Helvetica Neue"/>
+                <a:sym typeface="Helvetica Neue"/>
+              </a:defRPr>
+            </a:lvl7pPr>
+            <a:lvl8pPr marL="0" marR="0" indent="0" algn="l" defTabSz="412750" rtl="0" fontAlgn="auto" latinLnBrk="0" hangingPunct="0">
+              <a:lnSpc>
+                <a:spcPct val="100000"/>
+              </a:lnSpc>
+              <a:spcBef>
+                <a:spcPts val="2950"/>
+              </a:spcBef>
+              <a:spcAft>
+                <a:spcPts val="0"/>
+              </a:spcAft>
+              <a:buClrTx/>
+              <a:buSzTx/>
+              <a:buFontTx/>
+              <a:buNone/>
+              <a:tabLst/>
+              <a:defRPr kumimoji="0" sz="2400" b="0" i="0" u="none" strike="noStrike" cap="none" spc="0" normalizeH="0" baseline="0">
+                <a:ln>
+                  <a:noFill/>
+                </a:ln>
+                <a:solidFill>
+                  <a:srgbClr val="FFFFFF"/>
+                </a:solidFill>
+                <a:effectLst/>
+                <a:uFillTx/>
+                <a:latin typeface="Helvetica Neue"/>
+                <a:ea typeface="Helvetica Neue"/>
+                <a:cs typeface="Helvetica Neue"/>
+                <a:sym typeface="Helvetica Neue"/>
+              </a:defRPr>
+            </a:lvl8pPr>
+            <a:lvl9pPr marL="0" marR="0" indent="0" algn="l" defTabSz="412750" rtl="0" fontAlgn="auto" latinLnBrk="0" hangingPunct="0">
+              <a:lnSpc>
+                <a:spcPct val="100000"/>
+              </a:lnSpc>
+              <a:spcBef>
+                <a:spcPts val="2950"/>
+              </a:spcBef>
+              <a:spcAft>
+                <a:spcPts val="0"/>
+              </a:spcAft>
+              <a:buClrTx/>
+              <a:buSzTx/>
+              <a:buFontTx/>
+              <a:buNone/>
+              <a:tabLst/>
+              <a:defRPr kumimoji="0" sz="2400" b="0" i="0" u="none" strike="noStrike" cap="none" spc="0" normalizeH="0" baseline="0">
+                <a:ln>
+                  <a:noFill/>
+                </a:ln>
+                <a:solidFill>
+                  <a:srgbClr val="FFFFFF"/>
+                </a:solidFill>
+                <a:effectLst/>
+                <a:uFillTx/>
+                <a:latin typeface="Helvetica Neue"/>
+                <a:ea typeface="Helvetica Neue"/>
+                <a:cs typeface="Helvetica Neue"/>
+                <a:sym typeface="Helvetica Neue"/>
+              </a:defRPr>
+            </a:lvl9pPr>
+          </a:lstStyle>
+          <a:p>
+            <a:endParaRPr lang="en-US"/>
+          </a:p>
+        </p:txBody>
+      </p:sp>
+      <p:sp>
+        <p:nvSpPr>
+          <p:cNvPr id="7" name="Slide Number Placeholder 6">
+            <a:extLst>
+              <a:ext uri="{FF2B5EF4-FFF2-40B4-BE49-F238E27FC236}">
+                <a16:creationId xmlns:a16="http://schemas.microsoft.com/office/drawing/2014/main" id="{5AEB01C0-E681-E320-C36D-777A2BC4D6D1}"/>
+              </a:ext>
+            </a:extLst>
+          </p:cNvPr>
+          <p:cNvSpPr>
+            <a:spLocks noGrp="1"/>
+          </p:cNvSpPr>
+          <p:nvPr>
+            <p:ph type="sldNum" sz="quarter" idx="12"/>
+          </p:nvPr>
+        </p:nvSpPr>
+        <p:spPr/>
+        <p:txBody>
+          <a:bodyPr/>
+          <a:lstStyle/>
+          <a:p>
+            <a:fld id="{81D3CA6A-5F61-7D45-9E78-D3AD76A392F9}" type="slidenum">
+              <a:rPr lang="en-US" smtClean="0"/>
+              <a:t>‹#›</a:t>
+            </a:fld>
+            <a:endParaRPr lang="en-US"/>
+          </a:p>
+        </p:txBody>
+      </p:sp>
+      <p:sp>
+        <p:nvSpPr>
+          <p:cNvPr id="9" name="Title 1">
+            <a:extLst>
+              <a:ext uri="{FF2B5EF4-FFF2-40B4-BE49-F238E27FC236}">
+                <a16:creationId xmlns:a16="http://schemas.microsoft.com/office/drawing/2014/main" id="{01ECDBB8-7786-A968-428A-A6CF13DF0497}"/>
+              </a:ext>
+            </a:extLst>
+          </p:cNvPr>
+          <p:cNvSpPr>
+            <a:spLocks noGrp="1"/>
+          </p:cNvSpPr>
+          <p:nvPr>
+            <p:ph type="title"/>
+          </p:nvPr>
+        </p:nvSpPr>
+        <p:spPr>
+          <a:xfrm>
+            <a:off x="850901" y="386899"/>
+            <a:ext cx="10496550" cy="603701"/>
+          </a:xfrm>
+        </p:spPr>
+        <p:txBody>
+          <a:bodyPr/>
+          <a:lstStyle/>
+          <a:p>
+            <a:r>
+              <a:rPr lang="en-US" dirty="0"/>
+              <a:t>Click to edit Master title style</a:t>
+            </a:r>
+          </a:p>
+        </p:txBody>
+      </p:sp>
+      <p:sp>
+        <p:nvSpPr>
+          <p:cNvPr id="10" name="Text Placeholder 7">
+            <a:extLst>
+              <a:ext uri="{FF2B5EF4-FFF2-40B4-BE49-F238E27FC236}">
+                <a16:creationId xmlns:a16="http://schemas.microsoft.com/office/drawing/2014/main" id="{FF10E8A3-D80D-C29F-CB9D-366775D88500}"/>
+              </a:ext>
+            </a:extLst>
+          </p:cNvPr>
+          <p:cNvSpPr>
+            <a:spLocks noGrp="1"/>
+          </p:cNvSpPr>
+          <p:nvPr>
+            <p:ph type="body" sz="quarter" idx="13"/>
+          </p:nvPr>
+        </p:nvSpPr>
+        <p:spPr>
+          <a:xfrm>
+            <a:off x="838200" y="3836988"/>
+            <a:ext cx="10496550" cy="2368550"/>
+          </a:xfrm>
+        </p:spPr>
+        <p:txBody>
+          <a:bodyPr/>
+          <a:lstStyle>
+            <a:lvl4pPr>
+              <a:buNone/>
+              <a:defRPr/>
+            </a:lvl4pPr>
+          </a:lstStyle>
+          <a:p>
+            <a:pPr lvl="0"/>
+            <a:r>
+              <a:rPr lang="en-US" dirty="0"/>
+              <a:t>Click to edit Master text styles</a:t>
+            </a:r>
+          </a:p>
+          <a:p>
+            <a:pPr lvl="1"/>
+            <a:r>
+              <a:rPr lang="en-US" dirty="0"/>
+              <a:t>Second level</a:t>
+            </a:r>
+          </a:p>
+          <a:p>
+            <a:pPr lvl="2"/>
+            <a:r>
+              <a:rPr lang="en-US" dirty="0"/>
+              <a:t>Third level</a:t>
+            </a:r>
+          </a:p>
+        </p:txBody>
+      </p:sp>
+    </p:spTree>
+    <p:extLst>
+      <p:ext uri="{BB962C8B-B14F-4D97-AF65-F5344CB8AC3E}">
+        <p14:creationId xmlns:p14="http://schemas.microsoft.com/office/powerpoint/2010/main" val="1894351935"/>
+      </p:ext>
+    </p:extLst>
+  </p:cSld>
+  <p:clrMapOvr>
+    <a:masterClrMapping/>
+  </p:clrMapOvr>
+  <p:transition spd="med"/>
+</p:sldLayout>
+</file>
+
 <file path=ppt/slideLayouts/slideLayout2.xml><?xml version="1.0" encoding="utf-8"?>
+<p:sldLayout xmlns:a="http://schemas.openxmlformats.org/drawingml/2006/main" xmlns:r="http://schemas.openxmlformats.org/officeDocument/2006/relationships" xmlns:p="http://schemas.openxmlformats.org/presentationml/2006/main" type="tx">
+  <p:cSld name="Title - Center">
+    <p:spTree>
+      <p:nvGrpSpPr>
+        <p:cNvPr id="1" name=""/>
+        <p:cNvGrpSpPr/>
+        <p:nvPr/>
+      </p:nvGrpSpPr>
+      <p:grpSpPr>
+        <a:xfrm>
+          <a:off x="0" y="0"/>
+          <a:ext cx="0" cy="0"/>
+          <a:chOff x="0" y="0"/>
+          <a:chExt cx="0" cy="0"/>
+        </a:xfrm>
+      </p:grpSpPr>
+      <p:sp>
+        <p:nvSpPr>
+          <p:cNvPr id="30" name="Title Text"/>
+          <p:cNvSpPr txBox="1">
+            <a:spLocks noGrp="1"/>
+          </p:cNvSpPr>
+          <p:nvPr>
+            <p:ph type="title"/>
+          </p:nvPr>
+        </p:nvSpPr>
+        <p:spPr>
+          <a:xfrm>
+            <a:off x="889000" y="2266950"/>
+            <a:ext cx="10414000" cy="2324100"/>
+          </a:xfrm>
+          <a:prstGeom prst="rect">
+            <a:avLst/>
+          </a:prstGeom>
+        </p:spPr>
+        <p:txBody>
+          <a:bodyPr/>
+          <a:lstStyle/>
+          <a:p>
+            <a:r>
+              <a:t>Title Text</a:t>
+            </a:r>
+          </a:p>
+        </p:txBody>
+      </p:sp>
+      <p:sp>
+        <p:nvSpPr>
+          <p:cNvPr id="31" name="01"/>
+          <p:cNvSpPr txBox="1">
+            <a:spLocks noGrp="1"/>
+          </p:cNvSpPr>
+          <p:nvPr>
+            <p:ph type="sldNum" sz="quarter" idx="2"/>
+          </p:nvPr>
+        </p:nvSpPr>
+        <p:spPr>
+          <a:prstGeom prst="rect">
+            <a:avLst/>
+          </a:prstGeom>
+        </p:spPr>
+        <p:txBody>
+          <a:bodyPr/>
+          <a:lstStyle/>
+          <a:p>
+            <a:fld id="{86CB4B4D-7CA3-9044-876B-883B54F8677D}" type="slidenum">
+              <a:t>‹#›</a:t>
+            </a:fld>
+            <a:endParaRPr/>
+          </a:p>
+        </p:txBody>
+      </p:sp>
+    </p:spTree>
+  </p:cSld>
+  <p:clrMapOvr>
+    <a:masterClrMapping/>
+  </p:clrMapOvr>
+  <p:transition spd="med"/>
+</p:sldLayout>
+</file>
+
+<file path=ppt/slideLayouts/slideLayout3.xml><?xml version="1.0" encoding="utf-8"?>
 <p:sldLayout xmlns:a="http://schemas.openxmlformats.org/drawingml/2006/main" xmlns:r="http://schemas.openxmlformats.org/officeDocument/2006/relationships" xmlns:p="http://schemas.openxmlformats.org/presentationml/2006/main" type="tx">
   <p:cSld name="Title &amp; Bullets">
     <p:spTree>
@@ -1008,22 +2597,31 @@
           </a:lstStyle>
           <a:p>
             <a:r>
-              <a:rPr dirty="0"/>
               <a:t>Body Level One</a:t>
             </a:r>
           </a:p>
           <a:p>
             <a:pPr lvl="1"/>
             <a:r>
-              <a:rPr dirty="0"/>
               <a:t>Body Level Two</a:t>
             </a:r>
           </a:p>
           <a:p>
             <a:pPr lvl="2"/>
             <a:r>
-              <a:rPr dirty="0"/>
               <a:t>Body Level Three</a:t>
+            </a:r>
+          </a:p>
+          <a:p>
+            <a:pPr lvl="3"/>
+            <a:r>
+              <a:t>Body Level Four</a:t>
+            </a:r>
+          </a:p>
+          <a:p>
+            <a:pPr lvl="4"/>
+            <a:r>
+              <a:t>Body Level Five</a:t>
             </a:r>
           </a:p>
         </p:txBody>
@@ -1063,7 +2661,515 @@
 </p:sldLayout>
 </file>
 
-<file path=ppt/slideLayouts/slideLayout3.xml><?xml version="1.0" encoding="utf-8"?>
+<file path=ppt/slideLayouts/slideLayout4.xml><?xml version="1.0" encoding="utf-8"?>
+<p:sldLayout xmlns:a="http://schemas.openxmlformats.org/drawingml/2006/main" xmlns:r="http://schemas.openxmlformats.org/officeDocument/2006/relationships" xmlns:p="http://schemas.openxmlformats.org/presentationml/2006/main" type="tx" preserve="1">
+  <p:cSld name="1_Title &amp; Bullets">
+    <p:spTree>
+      <p:nvGrpSpPr>
+        <p:cNvPr id="1" name=""/>
+        <p:cNvGrpSpPr/>
+        <p:nvPr/>
+      </p:nvGrpSpPr>
+      <p:grpSpPr>
+        <a:xfrm>
+          <a:off x="0" y="0"/>
+          <a:ext cx="0" cy="0"/>
+          <a:chOff x="0" y="0"/>
+          <a:chExt cx="0" cy="0"/>
+        </a:xfrm>
+      </p:grpSpPr>
+      <p:sp>
+        <p:nvSpPr>
+          <p:cNvPr id="2" name="Rectangle 1">
+            <a:extLst>
+              <a:ext uri="{FF2B5EF4-FFF2-40B4-BE49-F238E27FC236}">
+                <a16:creationId xmlns:a16="http://schemas.microsoft.com/office/drawing/2014/main" id="{B30FA663-7383-DBEA-0822-E60A81C633F0}"/>
+              </a:ext>
+            </a:extLst>
+          </p:cNvPr>
+          <p:cNvSpPr/>
+          <p:nvPr userDrawn="1"/>
+        </p:nvSpPr>
+        <p:spPr>
+          <a:xfrm>
+            <a:off x="0" y="1394810"/>
+            <a:ext cx="12192001" cy="4879047"/>
+          </a:xfrm>
+          <a:prstGeom prst="rect">
+            <a:avLst/>
+          </a:prstGeom>
+          <a:solidFill>
+            <a:schemeClr val="tx1"/>
+          </a:solidFill>
+          <a:ln w="12700" cap="flat">
+            <a:solidFill>
+              <a:schemeClr val="tx1"/>
+            </a:solidFill>
+            <a:miter lim="400000"/>
+          </a:ln>
+          <a:effectLst/>
+          <a:sp3d/>
+        </p:spPr>
+        <p:style>
+          <a:lnRef idx="0">
+            <a:scrgbClr r="0" g="0" b="0"/>
+          </a:lnRef>
+          <a:fillRef idx="0">
+            <a:scrgbClr r="0" g="0" b="0"/>
+          </a:fillRef>
+          <a:effectRef idx="0">
+            <a:scrgbClr r="0" g="0" b="0"/>
+          </a:effectRef>
+          <a:fontRef idx="none"/>
+        </p:style>
+        <p:txBody>
+          <a:bodyPr rot="0" spcFirstLastPara="1" vertOverflow="overflow" horzOverflow="overflow" vert="horz" wrap="square" lIns="50800" tIns="50800" rIns="50800" bIns="50800" numCol="1" spcCol="38100" rtlCol="0" anchor="ctr">
+            <a:spAutoFit/>
+          </a:bodyPr>
+          <a:lstStyle/>
+          <a:p>
+            <a:pPr marL="0" marR="0" indent="0" algn="ctr" defTabSz="825500" rtl="0" fontAlgn="auto" latinLnBrk="0" hangingPunct="0">
+              <a:lnSpc>
+                <a:spcPct val="100000"/>
+              </a:lnSpc>
+              <a:spcBef>
+                <a:spcPts val="0"/>
+              </a:spcBef>
+              <a:spcAft>
+                <a:spcPts val="0"/>
+              </a:spcAft>
+              <a:buClrTx/>
+              <a:buSzTx/>
+              <a:buFontTx/>
+              <a:buNone/>
+              <a:tabLst/>
+            </a:pPr>
+            <a:endParaRPr kumimoji="0" lang="en-US" sz="3200" b="0" i="0" u="none" strike="noStrike" cap="none" spc="0" normalizeH="0" baseline="0">
+              <a:ln>
+                <a:noFill/>
+              </a:ln>
+              <a:solidFill>
+                <a:srgbClr val="FFFFFF"/>
+              </a:solidFill>
+              <a:effectLst/>
+              <a:uFillTx/>
+              <a:latin typeface="+mn-lt"/>
+              <a:ea typeface="+mn-ea"/>
+              <a:cs typeface="+mn-cs"/>
+              <a:sym typeface="Helvetica Neue Medium"/>
+            </a:endParaRPr>
+          </a:p>
+        </p:txBody>
+      </p:sp>
+      <p:sp>
+        <p:nvSpPr>
+          <p:cNvPr id="56" name="Title Text"/>
+          <p:cNvSpPr txBox="1">
+            <a:spLocks noGrp="1"/>
+          </p:cNvSpPr>
+          <p:nvPr>
+            <p:ph type="title" hasCustomPrompt="1"/>
+          </p:nvPr>
+        </p:nvSpPr>
+        <p:spPr>
+          <a:prstGeom prst="rect">
+            <a:avLst/>
+          </a:prstGeom>
+        </p:spPr>
+        <p:txBody>
+          <a:bodyPr/>
+          <a:lstStyle>
+            <a:lvl1pPr>
+              <a:defRPr>
+                <a:latin typeface="Helvetica" pitchFamily="2" charset="0"/>
+              </a:defRPr>
+            </a:lvl1pPr>
+          </a:lstStyle>
+          <a:p>
+            <a:r>
+              <a:t>Title Text</a:t>
+            </a:r>
+          </a:p>
+        </p:txBody>
+      </p:sp>
+      <p:sp>
+        <p:nvSpPr>
+          <p:cNvPr id="57" name="Body Level One…"/>
+          <p:cNvSpPr txBox="1">
+            <a:spLocks noGrp="1"/>
+          </p:cNvSpPr>
+          <p:nvPr>
+            <p:ph type="body" idx="1" hasCustomPrompt="1"/>
+          </p:nvPr>
+        </p:nvSpPr>
+        <p:spPr>
+          <a:prstGeom prst="rect">
+            <a:avLst/>
+          </a:prstGeom>
+        </p:spPr>
+        <p:txBody>
+          <a:bodyPr anchor="t"/>
+          <a:lstStyle>
+            <a:lvl1pPr>
+              <a:buClrTx/>
+              <a:defRPr>
+                <a:solidFill>
+                  <a:sysClr val="windowText" lastClr="000000"/>
+                </a:solidFill>
+              </a:defRPr>
+            </a:lvl1pPr>
+            <a:lvl2pPr>
+              <a:buClrTx/>
+              <a:defRPr>
+                <a:solidFill>
+                  <a:sysClr val="windowText" lastClr="000000"/>
+                </a:solidFill>
+              </a:defRPr>
+            </a:lvl2pPr>
+            <a:lvl3pPr>
+              <a:buClrTx/>
+              <a:defRPr>
+                <a:solidFill>
+                  <a:sysClr val="windowText" lastClr="000000"/>
+                </a:solidFill>
+              </a:defRPr>
+            </a:lvl3pPr>
+            <a:lvl4pPr>
+              <a:buClrTx/>
+              <a:defRPr>
+                <a:solidFill>
+                  <a:sysClr val="windowText" lastClr="000000"/>
+                </a:solidFill>
+              </a:defRPr>
+            </a:lvl4pPr>
+            <a:lvl5pPr>
+              <a:buClrTx/>
+              <a:defRPr>
+                <a:solidFill>
+                  <a:sysClr val="windowText" lastClr="000000"/>
+                </a:solidFill>
+              </a:defRPr>
+            </a:lvl5pPr>
+          </a:lstStyle>
+          <a:p>
+            <a:r>
+              <a:t>Body Level One</a:t>
+            </a:r>
+          </a:p>
+          <a:p>
+            <a:pPr lvl="1"/>
+            <a:r>
+              <a:t>Body Level Two</a:t>
+            </a:r>
+          </a:p>
+          <a:p>
+            <a:pPr lvl="2"/>
+            <a:r>
+              <a:t>Body Level Three</a:t>
+            </a:r>
+          </a:p>
+          <a:p>
+            <a:pPr lvl="3"/>
+            <a:r>
+              <a:t>Body Level Four</a:t>
+            </a:r>
+          </a:p>
+          <a:p>
+            <a:pPr lvl="4"/>
+            <a:r>
+              <a:t>Body Level Five</a:t>
+            </a:r>
+          </a:p>
+        </p:txBody>
+      </p:sp>
+      <p:sp>
+        <p:nvSpPr>
+          <p:cNvPr id="58" name="01"/>
+          <p:cNvSpPr txBox="1">
+            <a:spLocks noGrp="1"/>
+          </p:cNvSpPr>
+          <p:nvPr>
+            <p:ph type="sldNum" sz="quarter" idx="2"/>
+          </p:nvPr>
+        </p:nvSpPr>
+        <p:spPr>
+          <a:prstGeom prst="rect">
+            <a:avLst/>
+          </a:prstGeom>
+        </p:spPr>
+        <p:txBody>
+          <a:bodyPr/>
+          <a:lstStyle/>
+          <a:p>
+            <a:fld id="{86CB4B4D-7CA3-9044-876B-883B54F8677D}" type="slidenum">
+              <a:t>‹#›</a:t>
+            </a:fld>
+            <a:endParaRPr/>
+          </a:p>
+        </p:txBody>
+      </p:sp>
+    </p:spTree>
+    <p:extLst>
+      <p:ext uri="{BB962C8B-B14F-4D97-AF65-F5344CB8AC3E}">
+        <p14:creationId xmlns:p14="http://schemas.microsoft.com/office/powerpoint/2010/main" val="2677480909"/>
+      </p:ext>
+    </p:extLst>
+  </p:cSld>
+  <p:clrMapOvr>
+    <a:masterClrMapping/>
+  </p:clrMapOvr>
+  <p:transition spd="med"/>
+</p:sldLayout>
+</file>
+
+<file path=ppt/slideLayouts/slideLayout5.xml><?xml version="1.0" encoding="utf-8"?>
+<p:sldLayout xmlns:a="http://schemas.openxmlformats.org/drawingml/2006/main" xmlns:r="http://schemas.openxmlformats.org/officeDocument/2006/relationships" xmlns:p="http://schemas.openxmlformats.org/presentationml/2006/main" type="tx">
+  <p:cSld name="Title, Bullets &amp; Photo">
+    <p:spTree>
+      <p:nvGrpSpPr>
+        <p:cNvPr id="1" name=""/>
+        <p:cNvGrpSpPr/>
+        <p:nvPr/>
+      </p:nvGrpSpPr>
+      <p:grpSpPr>
+        <a:xfrm>
+          <a:off x="0" y="0"/>
+          <a:ext cx="0" cy="0"/>
+          <a:chOff x="0" y="0"/>
+          <a:chExt cx="0" cy="0"/>
+        </a:xfrm>
+      </p:grpSpPr>
+      <p:sp>
+        <p:nvSpPr>
+          <p:cNvPr id="65" name="Close-up of a red-eyed tree frog perched on a leaf"/>
+          <p:cNvSpPr>
+            <a:spLocks noGrp="1"/>
+          </p:cNvSpPr>
+          <p:nvPr>
+            <p:ph type="pic" sz="half" idx="21"/>
+          </p:nvPr>
+        </p:nvSpPr>
+        <p:spPr>
+          <a:xfrm>
+            <a:off x="4375150" y="1574800"/>
+            <a:ext cx="6972300" cy="4648200"/>
+          </a:xfrm>
+          <a:prstGeom prst="rect">
+            <a:avLst/>
+          </a:prstGeom>
+        </p:spPr>
+        <p:txBody>
+          <a:bodyPr lIns="91439" tIns="45719" rIns="91439" bIns="45719" anchor="t">
+            <a:noAutofit/>
+          </a:bodyPr>
+          <a:lstStyle/>
+          <a:p>
+            <a:endParaRPr/>
+          </a:p>
+        </p:txBody>
+      </p:sp>
+      <p:sp>
+        <p:nvSpPr>
+          <p:cNvPr id="66" name="Title Text"/>
+          <p:cNvSpPr txBox="1">
+            <a:spLocks noGrp="1"/>
+          </p:cNvSpPr>
+          <p:nvPr>
+            <p:ph type="title"/>
+          </p:nvPr>
+        </p:nvSpPr>
+        <p:spPr>
+          <a:prstGeom prst="rect">
+            <a:avLst/>
+          </a:prstGeom>
+        </p:spPr>
+        <p:txBody>
+          <a:bodyPr/>
+          <a:lstStyle/>
+          <a:p>
+            <a:r>
+              <a:t>Title Text</a:t>
+            </a:r>
+          </a:p>
+        </p:txBody>
+      </p:sp>
+      <p:sp>
+        <p:nvSpPr>
+          <p:cNvPr id="67" name="Body Level One…"/>
+          <p:cNvSpPr txBox="1">
+            <a:spLocks noGrp="1"/>
+          </p:cNvSpPr>
+          <p:nvPr>
+            <p:ph type="body" sz="half" idx="1"/>
+          </p:nvPr>
+        </p:nvSpPr>
+        <p:spPr>
+          <a:xfrm>
+            <a:off x="844550" y="1574800"/>
+            <a:ext cx="5111750" cy="4648200"/>
+          </a:xfrm>
+          <a:prstGeom prst="rect">
+            <a:avLst/>
+          </a:prstGeom>
+        </p:spPr>
+        <p:txBody>
+          <a:bodyPr/>
+          <a:lstStyle>
+            <a:lvl1pPr marL="279400" indent="-279400">
+              <a:spcBef>
+                <a:spcPts val="2250"/>
+              </a:spcBef>
+              <a:buClrTx/>
+              <a:defRPr sz="1900"/>
+            </a:lvl1pPr>
+            <a:lvl2pPr marL="558800" indent="-279400">
+              <a:spcBef>
+                <a:spcPts val="2250"/>
+              </a:spcBef>
+              <a:buClrTx/>
+              <a:defRPr sz="1900"/>
+            </a:lvl2pPr>
+            <a:lvl3pPr marL="838200" indent="-279400">
+              <a:spcBef>
+                <a:spcPts val="2250"/>
+              </a:spcBef>
+              <a:buClrTx/>
+              <a:defRPr sz="1900"/>
+            </a:lvl3pPr>
+            <a:lvl4pPr marL="1117600" indent="-279400">
+              <a:spcBef>
+                <a:spcPts val="2250"/>
+              </a:spcBef>
+              <a:buClrTx/>
+              <a:defRPr sz="1900"/>
+            </a:lvl4pPr>
+            <a:lvl5pPr marL="1397000" indent="-279400">
+              <a:spcBef>
+                <a:spcPts val="2250"/>
+              </a:spcBef>
+              <a:buClrTx/>
+              <a:defRPr sz="1900"/>
+            </a:lvl5pPr>
+          </a:lstStyle>
+          <a:p>
+            <a:r>
+              <a:t>Body Level One</a:t>
+            </a:r>
+          </a:p>
+          <a:p>
+            <a:pPr lvl="1"/>
+            <a:r>
+              <a:t>Body Level Two</a:t>
+            </a:r>
+          </a:p>
+          <a:p>
+            <a:pPr lvl="2"/>
+            <a:r>
+              <a:t>Body Level Three</a:t>
+            </a:r>
+          </a:p>
+          <a:p>
+            <a:pPr lvl="3"/>
+            <a:r>
+              <a:t>Body Level Four</a:t>
+            </a:r>
+          </a:p>
+          <a:p>
+            <a:pPr lvl="4"/>
+            <a:r>
+              <a:t>Body Level Five</a:t>
+            </a:r>
+          </a:p>
+        </p:txBody>
+      </p:sp>
+      <p:sp>
+        <p:nvSpPr>
+          <p:cNvPr id="68" name="01"/>
+          <p:cNvSpPr txBox="1">
+            <a:spLocks noGrp="1"/>
+          </p:cNvSpPr>
+          <p:nvPr>
+            <p:ph type="sldNum" sz="quarter" idx="2"/>
+          </p:nvPr>
+        </p:nvSpPr>
+        <p:spPr>
+          <a:prstGeom prst="rect">
+            <a:avLst/>
+          </a:prstGeom>
+        </p:spPr>
+        <p:txBody>
+          <a:bodyPr/>
+          <a:lstStyle/>
+          <a:p>
+            <a:fld id="{86CB4B4D-7CA3-9044-876B-883B54F8677D}" type="slidenum">
+              <a:t>‹#›</a:t>
+            </a:fld>
+            <a:endParaRPr/>
+          </a:p>
+        </p:txBody>
+      </p:sp>
+    </p:spTree>
+  </p:cSld>
+  <p:clrMapOvr>
+    <a:masterClrMapping/>
+  </p:clrMapOvr>
+  <p:transition spd="med"/>
+</p:sldLayout>
+</file>
+
+<file path=ppt/slideLayouts/slideLayout6.xml><?xml version="1.0" encoding="utf-8"?>
+<p:sldLayout xmlns:a="http://schemas.openxmlformats.org/drawingml/2006/main" xmlns:r="http://schemas.openxmlformats.org/officeDocument/2006/relationships" xmlns:p="http://schemas.openxmlformats.org/presentationml/2006/main" type="tx">
+  <p:cSld name="Blank">
+    <p:spTree>
+      <p:nvGrpSpPr>
+        <p:cNvPr id="1" name=""/>
+        <p:cNvGrpSpPr/>
+        <p:nvPr/>
+      </p:nvGrpSpPr>
+      <p:grpSpPr>
+        <a:xfrm>
+          <a:off x="0" y="0"/>
+          <a:ext cx="0" cy="0"/>
+          <a:chOff x="0" y="0"/>
+          <a:chExt cx="0" cy="0"/>
+        </a:xfrm>
+      </p:grpSpPr>
+      <p:sp>
+        <p:nvSpPr>
+          <p:cNvPr id="128" name="01"/>
+          <p:cNvSpPr txBox="1">
+            <a:spLocks noGrp="1"/>
+          </p:cNvSpPr>
+          <p:nvPr>
+            <p:ph type="sldNum" sz="quarter" idx="2"/>
+          </p:nvPr>
+        </p:nvSpPr>
+        <p:spPr>
+          <a:prstGeom prst="rect">
+            <a:avLst/>
+          </a:prstGeom>
+        </p:spPr>
+        <p:txBody>
+          <a:bodyPr/>
+          <a:lstStyle/>
+          <a:p>
+            <a:fld id="{86CB4B4D-7CA3-9044-876B-883B54F8677D}" type="slidenum">
+              <a:t>‹#›</a:t>
+            </a:fld>
+            <a:endParaRPr/>
+          </a:p>
+        </p:txBody>
+      </p:sp>
+    </p:spTree>
+  </p:cSld>
+  <p:clrMapOvr>
+    <a:masterClrMapping/>
+  </p:clrMapOvr>
+  <p:transition spd="med"/>
+</p:sldLayout>
+</file>
+
+<file path=ppt/slideLayouts/slideLayout7.xml><?xml version="1.0" encoding="utf-8"?>
 <p:sldLayout xmlns:a="http://schemas.openxmlformats.org/drawingml/2006/main" xmlns:r="http://schemas.openxmlformats.org/officeDocument/2006/relationships" xmlns:p="http://schemas.openxmlformats.org/presentationml/2006/main" preserve="1" userDrawn="1">
   <p:cSld name="Title &amp; Content">
     <p:spTree>
@@ -1199,7 +3305,7 @@
 </p:sldLayout>
 </file>
 
-<file path=ppt/slideLayouts/slideLayout4.xml><?xml version="1.0" encoding="utf-8"?>
+<file path=ppt/slideLayouts/slideLayout8.xml><?xml version="1.0" encoding="utf-8"?>
 <p:sldLayout xmlns:a="http://schemas.openxmlformats.org/drawingml/2006/main" xmlns:r="http://schemas.openxmlformats.org/officeDocument/2006/relationships" xmlns:p="http://schemas.openxmlformats.org/presentationml/2006/main" type="twoObj" preserve="1">
   <p:cSld name="Two Content (horizontal)">
     <p:spTree>
@@ -2057,7 +4163,7 @@
 </p:sldLayout>
 </file>
 
-<file path=ppt/slideLayouts/slideLayout5.xml><?xml version="1.0" encoding="utf-8"?>
+<file path=ppt/slideLayouts/slideLayout9.xml><?xml version="1.0" encoding="utf-8"?>
 <p:sldLayout xmlns:a="http://schemas.openxmlformats.org/drawingml/2006/main" xmlns:r="http://schemas.openxmlformats.org/officeDocument/2006/relationships" xmlns:p="http://schemas.openxmlformats.org/presentationml/2006/main" preserve="1" userDrawn="1">
   <p:cSld name="Text and Content (horizontal)">
     <p:spTree>
@@ -2905,1706 +5011,6 @@
     <p:extLst>
       <p:ext uri="{BB962C8B-B14F-4D97-AF65-F5344CB8AC3E}">
         <p14:creationId xmlns:p14="http://schemas.microsoft.com/office/powerpoint/2010/main" val="2706442259"/>
-      </p:ext>
-    </p:extLst>
-  </p:cSld>
-  <p:clrMapOvr>
-    <a:masterClrMapping/>
-  </p:clrMapOvr>
-  <p:transition spd="med"/>
-</p:sldLayout>
-</file>
-
-<file path=ppt/slideLayouts/slideLayout6.xml><?xml version="1.0" encoding="utf-8"?>
-<p:sldLayout xmlns:a="http://schemas.openxmlformats.org/drawingml/2006/main" xmlns:r="http://schemas.openxmlformats.org/officeDocument/2006/relationships" xmlns:p="http://schemas.openxmlformats.org/presentationml/2006/main" preserve="1" userDrawn="1">
-  <p:cSld name="Two Content (vertical)">
-    <p:spTree>
-      <p:nvGrpSpPr>
-        <p:cNvPr id="1" name=""/>
-        <p:cNvGrpSpPr/>
-        <p:nvPr/>
-      </p:nvGrpSpPr>
-      <p:grpSpPr>
-        <a:xfrm>
-          <a:off x="0" y="0"/>
-          <a:ext cx="0" cy="0"/>
-          <a:chOff x="0" y="0"/>
-          <a:chExt cx="0" cy="0"/>
-        </a:xfrm>
-      </p:grpSpPr>
-      <p:sp>
-        <p:nvSpPr>
-          <p:cNvPr id="3" name="Content Placeholder 2">
-            <a:extLst>
-              <a:ext uri="{FF2B5EF4-FFF2-40B4-BE49-F238E27FC236}">
-                <a16:creationId xmlns:a16="http://schemas.microsoft.com/office/drawing/2014/main" id="{EB85AEC4-1825-0A29-E8E9-2EBD1391FDC6}"/>
-              </a:ext>
-            </a:extLst>
-          </p:cNvPr>
-          <p:cNvSpPr>
-            <a:spLocks noGrp="1"/>
-          </p:cNvSpPr>
-          <p:nvPr>
-            <p:ph sz="half" idx="1"/>
-          </p:nvPr>
-        </p:nvSpPr>
-        <p:spPr>
-          <a:xfrm>
-            <a:off x="838199" y="1267959"/>
-            <a:ext cx="10509251" cy="2389642"/>
-          </a:xfrm>
-        </p:spPr>
-        <p:txBody>
-          <a:bodyPr/>
-          <a:lstStyle/>
-          <a:p>
-            <a:pPr lvl="0"/>
-            <a:r>
-              <a:rPr lang="en-US" dirty="0"/>
-              <a:t>Click to edit Master text styles</a:t>
-            </a:r>
-          </a:p>
-          <a:p>
-            <a:pPr lvl="1"/>
-            <a:r>
-              <a:rPr lang="en-US" dirty="0"/>
-              <a:t>Second level</a:t>
-            </a:r>
-          </a:p>
-        </p:txBody>
-      </p:sp>
-      <p:sp>
-        <p:nvSpPr>
-          <p:cNvPr id="4" name="Content Placeholder 3">
-            <a:extLst>
-              <a:ext uri="{FF2B5EF4-FFF2-40B4-BE49-F238E27FC236}">
-                <a16:creationId xmlns:a16="http://schemas.microsoft.com/office/drawing/2014/main" id="{0AB39CB5-2C12-3F62-C6D7-6E06D5B52E2B}"/>
-              </a:ext>
-            </a:extLst>
-          </p:cNvPr>
-          <p:cNvSpPr>
-            <a:spLocks noGrp="1"/>
-          </p:cNvSpPr>
-          <p:nvPr>
-            <p:ph sz="half" idx="2"/>
-          </p:nvPr>
-        </p:nvSpPr>
-        <p:spPr>
-          <a:xfrm>
-            <a:off x="850900" y="3836989"/>
-            <a:ext cx="10496550" cy="2339974"/>
-          </a:xfrm>
-        </p:spPr>
-        <p:txBody>
-          <a:bodyPr/>
-          <a:lstStyle/>
-          <a:p>
-            <a:pPr lvl="0"/>
-            <a:r>
-              <a:rPr lang="en-US" dirty="0"/>
-              <a:t>Click to edit Master text styles</a:t>
-            </a:r>
-          </a:p>
-          <a:p>
-            <a:pPr lvl="1"/>
-            <a:r>
-              <a:rPr lang="en-US" dirty="0"/>
-              <a:t>Second level</a:t>
-            </a:r>
-          </a:p>
-        </p:txBody>
-      </p:sp>
-      <p:sp>
-        <p:nvSpPr>
-          <p:cNvPr id="5" name="Date Placeholder 4">
-            <a:extLst>
-              <a:ext uri="{FF2B5EF4-FFF2-40B4-BE49-F238E27FC236}">
-                <a16:creationId xmlns:a16="http://schemas.microsoft.com/office/drawing/2014/main" id="{71515902-1B4F-1080-8519-F743FA0C5D3C}"/>
-              </a:ext>
-            </a:extLst>
-          </p:cNvPr>
-          <p:cNvSpPr>
-            <a:spLocks noGrp="1"/>
-          </p:cNvSpPr>
-          <p:nvPr>
-            <p:ph type="dt" sz="half" idx="10"/>
-          </p:nvPr>
-        </p:nvSpPr>
-        <p:spPr>
-          <a:xfrm>
-            <a:off x="838200" y="6356350"/>
-            <a:ext cx="2743200" cy="365125"/>
-          </a:xfrm>
-          <a:prstGeom prst="rect">
-            <a:avLst/>
-          </a:prstGeom>
-        </p:spPr>
-        <p:txBody>
-          <a:bodyPr vert="horz" lIns="91440" tIns="45720" rIns="91440" bIns="45720" rtlCol="0" anchor="ctr"/>
-          <a:lstStyle>
-            <a:defPPr marL="0" marR="0" indent="0" algn="l" defTabSz="457200" rtl="0" fontAlgn="auto" latinLnBrk="1" hangingPunct="0">
-              <a:lnSpc>
-                <a:spcPct val="100000"/>
-              </a:lnSpc>
-              <a:spcBef>
-                <a:spcPts val="0"/>
-              </a:spcBef>
-              <a:spcAft>
-                <a:spcPts val="0"/>
-              </a:spcAft>
-              <a:buClrTx/>
-              <a:buSzTx/>
-              <a:buFontTx/>
-              <a:buNone/>
-              <a:tabLst/>
-              <a:defRPr kumimoji="0" sz="900" b="0" i="0" u="none" strike="noStrike" cap="none" spc="0" normalizeH="0" baseline="0">
-                <a:ln>
-                  <a:noFill/>
-                </a:ln>
-                <a:solidFill>
-                  <a:srgbClr val="000000"/>
-                </a:solidFill>
-                <a:effectLst/>
-                <a:uFillTx/>
-              </a:defRPr>
-            </a:defPPr>
-            <a:lvl1pPr marL="0" marR="0" indent="0" algn="l" defTabSz="412750" rtl="0" fontAlgn="auto" latinLnBrk="0" hangingPunct="0">
-              <a:lnSpc>
-                <a:spcPct val="100000"/>
-              </a:lnSpc>
-              <a:spcBef>
-                <a:spcPts val="2950"/>
-              </a:spcBef>
-              <a:spcAft>
-                <a:spcPts val="0"/>
-              </a:spcAft>
-              <a:buClrTx/>
-              <a:buSzTx/>
-              <a:buFontTx/>
-              <a:buNone/>
-              <a:tabLst/>
-              <a:defRPr kumimoji="0" sz="1200" b="0" i="0" u="none" strike="noStrike" cap="none" spc="0" normalizeH="0" baseline="0">
-                <a:ln>
-                  <a:noFill/>
-                </a:ln>
-                <a:solidFill>
-                  <a:schemeClr val="tx1">
-                    <a:tint val="82000"/>
-                  </a:schemeClr>
-                </a:solidFill>
-                <a:effectLst/>
-                <a:uFillTx/>
-                <a:latin typeface="Helvetica Neue"/>
-                <a:ea typeface="Helvetica Neue"/>
-                <a:cs typeface="Helvetica Neue"/>
-                <a:sym typeface="Helvetica Neue"/>
-              </a:defRPr>
-            </a:lvl1pPr>
-            <a:lvl2pPr marL="0" marR="0" indent="0" algn="l" defTabSz="412750" rtl="0" fontAlgn="auto" latinLnBrk="0" hangingPunct="0">
-              <a:lnSpc>
-                <a:spcPct val="100000"/>
-              </a:lnSpc>
-              <a:spcBef>
-                <a:spcPts val="2950"/>
-              </a:spcBef>
-              <a:spcAft>
-                <a:spcPts val="0"/>
-              </a:spcAft>
-              <a:buClrTx/>
-              <a:buSzTx/>
-              <a:buFontTx/>
-              <a:buNone/>
-              <a:tabLst/>
-              <a:defRPr kumimoji="0" sz="2400" b="0" i="0" u="none" strike="noStrike" cap="none" spc="0" normalizeH="0" baseline="0">
-                <a:ln>
-                  <a:noFill/>
-                </a:ln>
-                <a:solidFill>
-                  <a:srgbClr val="FFFFFF"/>
-                </a:solidFill>
-                <a:effectLst/>
-                <a:uFillTx/>
-                <a:latin typeface="Helvetica Neue"/>
-                <a:ea typeface="Helvetica Neue"/>
-                <a:cs typeface="Helvetica Neue"/>
-                <a:sym typeface="Helvetica Neue"/>
-              </a:defRPr>
-            </a:lvl2pPr>
-            <a:lvl3pPr marL="0" marR="0" indent="0" algn="l" defTabSz="412750" rtl="0" fontAlgn="auto" latinLnBrk="0" hangingPunct="0">
-              <a:lnSpc>
-                <a:spcPct val="100000"/>
-              </a:lnSpc>
-              <a:spcBef>
-                <a:spcPts val="2950"/>
-              </a:spcBef>
-              <a:spcAft>
-                <a:spcPts val="0"/>
-              </a:spcAft>
-              <a:buClrTx/>
-              <a:buSzTx/>
-              <a:buFontTx/>
-              <a:buNone/>
-              <a:tabLst/>
-              <a:defRPr kumimoji="0" sz="2400" b="0" i="0" u="none" strike="noStrike" cap="none" spc="0" normalizeH="0" baseline="0">
-                <a:ln>
-                  <a:noFill/>
-                </a:ln>
-                <a:solidFill>
-                  <a:srgbClr val="FFFFFF"/>
-                </a:solidFill>
-                <a:effectLst/>
-                <a:uFillTx/>
-                <a:latin typeface="Helvetica Neue"/>
-                <a:ea typeface="Helvetica Neue"/>
-                <a:cs typeface="Helvetica Neue"/>
-                <a:sym typeface="Helvetica Neue"/>
-              </a:defRPr>
-            </a:lvl3pPr>
-            <a:lvl4pPr marL="0" marR="0" indent="0" algn="l" defTabSz="412750" rtl="0" fontAlgn="auto" latinLnBrk="0" hangingPunct="0">
-              <a:lnSpc>
-                <a:spcPct val="100000"/>
-              </a:lnSpc>
-              <a:spcBef>
-                <a:spcPts val="2950"/>
-              </a:spcBef>
-              <a:spcAft>
-                <a:spcPts val="0"/>
-              </a:spcAft>
-              <a:buClrTx/>
-              <a:buSzTx/>
-              <a:buFontTx/>
-              <a:buNone/>
-              <a:tabLst/>
-              <a:defRPr kumimoji="0" sz="2400" b="0" i="0" u="none" strike="noStrike" cap="none" spc="0" normalizeH="0" baseline="0">
-                <a:ln>
-                  <a:noFill/>
-                </a:ln>
-                <a:solidFill>
-                  <a:srgbClr val="FFFFFF"/>
-                </a:solidFill>
-                <a:effectLst/>
-                <a:uFillTx/>
-                <a:latin typeface="Helvetica Neue"/>
-                <a:ea typeface="Helvetica Neue"/>
-                <a:cs typeface="Helvetica Neue"/>
-                <a:sym typeface="Helvetica Neue"/>
-              </a:defRPr>
-            </a:lvl4pPr>
-            <a:lvl5pPr marL="0" marR="0" indent="0" algn="l" defTabSz="412750" rtl="0" fontAlgn="auto" latinLnBrk="0" hangingPunct="0">
-              <a:lnSpc>
-                <a:spcPct val="100000"/>
-              </a:lnSpc>
-              <a:spcBef>
-                <a:spcPts val="2950"/>
-              </a:spcBef>
-              <a:spcAft>
-                <a:spcPts val="0"/>
-              </a:spcAft>
-              <a:buClrTx/>
-              <a:buSzTx/>
-              <a:buFontTx/>
-              <a:buNone/>
-              <a:tabLst/>
-              <a:defRPr kumimoji="0" sz="2400" b="0" i="0" u="none" strike="noStrike" cap="none" spc="0" normalizeH="0" baseline="0">
-                <a:ln>
-                  <a:noFill/>
-                </a:ln>
-                <a:solidFill>
-                  <a:srgbClr val="FFFFFF"/>
-                </a:solidFill>
-                <a:effectLst/>
-                <a:uFillTx/>
-                <a:latin typeface="Helvetica Neue"/>
-                <a:ea typeface="Helvetica Neue"/>
-                <a:cs typeface="Helvetica Neue"/>
-                <a:sym typeface="Helvetica Neue"/>
-              </a:defRPr>
-            </a:lvl5pPr>
-            <a:lvl6pPr marL="0" marR="0" indent="0" algn="l" defTabSz="412750" rtl="0" fontAlgn="auto" latinLnBrk="0" hangingPunct="0">
-              <a:lnSpc>
-                <a:spcPct val="100000"/>
-              </a:lnSpc>
-              <a:spcBef>
-                <a:spcPts val="2950"/>
-              </a:spcBef>
-              <a:spcAft>
-                <a:spcPts val="0"/>
-              </a:spcAft>
-              <a:buClrTx/>
-              <a:buSzTx/>
-              <a:buFontTx/>
-              <a:buNone/>
-              <a:tabLst/>
-              <a:defRPr kumimoji="0" sz="2400" b="0" i="0" u="none" strike="noStrike" cap="none" spc="0" normalizeH="0" baseline="0">
-                <a:ln>
-                  <a:noFill/>
-                </a:ln>
-                <a:solidFill>
-                  <a:srgbClr val="FFFFFF"/>
-                </a:solidFill>
-                <a:effectLst/>
-                <a:uFillTx/>
-                <a:latin typeface="Helvetica Neue"/>
-                <a:ea typeface="Helvetica Neue"/>
-                <a:cs typeface="Helvetica Neue"/>
-                <a:sym typeface="Helvetica Neue"/>
-              </a:defRPr>
-            </a:lvl6pPr>
-            <a:lvl7pPr marL="0" marR="0" indent="0" algn="l" defTabSz="412750" rtl="0" fontAlgn="auto" latinLnBrk="0" hangingPunct="0">
-              <a:lnSpc>
-                <a:spcPct val="100000"/>
-              </a:lnSpc>
-              <a:spcBef>
-                <a:spcPts val="2950"/>
-              </a:spcBef>
-              <a:spcAft>
-                <a:spcPts val="0"/>
-              </a:spcAft>
-              <a:buClrTx/>
-              <a:buSzTx/>
-              <a:buFontTx/>
-              <a:buNone/>
-              <a:tabLst/>
-              <a:defRPr kumimoji="0" sz="2400" b="0" i="0" u="none" strike="noStrike" cap="none" spc="0" normalizeH="0" baseline="0">
-                <a:ln>
-                  <a:noFill/>
-                </a:ln>
-                <a:solidFill>
-                  <a:srgbClr val="FFFFFF"/>
-                </a:solidFill>
-                <a:effectLst/>
-                <a:uFillTx/>
-                <a:latin typeface="Helvetica Neue"/>
-                <a:ea typeface="Helvetica Neue"/>
-                <a:cs typeface="Helvetica Neue"/>
-                <a:sym typeface="Helvetica Neue"/>
-              </a:defRPr>
-            </a:lvl7pPr>
-            <a:lvl8pPr marL="0" marR="0" indent="0" algn="l" defTabSz="412750" rtl="0" fontAlgn="auto" latinLnBrk="0" hangingPunct="0">
-              <a:lnSpc>
-                <a:spcPct val="100000"/>
-              </a:lnSpc>
-              <a:spcBef>
-                <a:spcPts val="2950"/>
-              </a:spcBef>
-              <a:spcAft>
-                <a:spcPts val="0"/>
-              </a:spcAft>
-              <a:buClrTx/>
-              <a:buSzTx/>
-              <a:buFontTx/>
-              <a:buNone/>
-              <a:tabLst/>
-              <a:defRPr kumimoji="0" sz="2400" b="0" i="0" u="none" strike="noStrike" cap="none" spc="0" normalizeH="0" baseline="0">
-                <a:ln>
-                  <a:noFill/>
-                </a:ln>
-                <a:solidFill>
-                  <a:srgbClr val="FFFFFF"/>
-                </a:solidFill>
-                <a:effectLst/>
-                <a:uFillTx/>
-                <a:latin typeface="Helvetica Neue"/>
-                <a:ea typeface="Helvetica Neue"/>
-                <a:cs typeface="Helvetica Neue"/>
-                <a:sym typeface="Helvetica Neue"/>
-              </a:defRPr>
-            </a:lvl8pPr>
-            <a:lvl9pPr marL="0" marR="0" indent="0" algn="l" defTabSz="412750" rtl="0" fontAlgn="auto" latinLnBrk="0" hangingPunct="0">
-              <a:lnSpc>
-                <a:spcPct val="100000"/>
-              </a:lnSpc>
-              <a:spcBef>
-                <a:spcPts val="2950"/>
-              </a:spcBef>
-              <a:spcAft>
-                <a:spcPts val="0"/>
-              </a:spcAft>
-              <a:buClrTx/>
-              <a:buSzTx/>
-              <a:buFontTx/>
-              <a:buNone/>
-              <a:tabLst/>
-              <a:defRPr kumimoji="0" sz="2400" b="0" i="0" u="none" strike="noStrike" cap="none" spc="0" normalizeH="0" baseline="0">
-                <a:ln>
-                  <a:noFill/>
-                </a:ln>
-                <a:solidFill>
-                  <a:srgbClr val="FFFFFF"/>
-                </a:solidFill>
-                <a:effectLst/>
-                <a:uFillTx/>
-                <a:latin typeface="Helvetica Neue"/>
-                <a:ea typeface="Helvetica Neue"/>
-                <a:cs typeface="Helvetica Neue"/>
-                <a:sym typeface="Helvetica Neue"/>
-              </a:defRPr>
-            </a:lvl9pPr>
-          </a:lstStyle>
-          <a:p>
-            <a:fld id="{FB2935F8-297A-F844-8555-D6E4631F7E59}" type="datetimeFigureOut">
-              <a:rPr lang="en-US" smtClean="0"/>
-              <a:pPr/>
-              <a:t>1/29/26</a:t>
-            </a:fld>
-            <a:endParaRPr lang="en-US"/>
-          </a:p>
-        </p:txBody>
-      </p:sp>
-      <p:sp>
-        <p:nvSpPr>
-          <p:cNvPr id="6" name="Footer Placeholder 5">
-            <a:extLst>
-              <a:ext uri="{FF2B5EF4-FFF2-40B4-BE49-F238E27FC236}">
-                <a16:creationId xmlns:a16="http://schemas.microsoft.com/office/drawing/2014/main" id="{17F6F134-AA6E-8596-3247-DDDBBB1FE512}"/>
-              </a:ext>
-            </a:extLst>
-          </p:cNvPr>
-          <p:cNvSpPr>
-            <a:spLocks noGrp="1"/>
-          </p:cNvSpPr>
-          <p:nvPr>
-            <p:ph type="ftr" sz="quarter" idx="11"/>
-          </p:nvPr>
-        </p:nvSpPr>
-        <p:spPr>
-          <a:xfrm>
-            <a:off x="4038600" y="6356350"/>
-            <a:ext cx="4114800" cy="365125"/>
-          </a:xfrm>
-          <a:prstGeom prst="rect">
-            <a:avLst/>
-          </a:prstGeom>
-        </p:spPr>
-        <p:txBody>
-          <a:bodyPr vert="horz" lIns="91440" tIns="45720" rIns="91440" bIns="45720" rtlCol="0" anchor="ctr"/>
-          <a:lstStyle>
-            <a:defPPr marL="0" marR="0" indent="0" algn="l" defTabSz="457200" rtl="0" fontAlgn="auto" latinLnBrk="1" hangingPunct="0">
-              <a:lnSpc>
-                <a:spcPct val="100000"/>
-              </a:lnSpc>
-              <a:spcBef>
-                <a:spcPts val="0"/>
-              </a:spcBef>
-              <a:spcAft>
-                <a:spcPts val="0"/>
-              </a:spcAft>
-              <a:buClrTx/>
-              <a:buSzTx/>
-              <a:buFontTx/>
-              <a:buNone/>
-              <a:tabLst/>
-              <a:defRPr kumimoji="0" sz="900" b="0" i="0" u="none" strike="noStrike" cap="none" spc="0" normalizeH="0" baseline="0">
-                <a:ln>
-                  <a:noFill/>
-                </a:ln>
-                <a:solidFill>
-                  <a:srgbClr val="000000"/>
-                </a:solidFill>
-                <a:effectLst/>
-                <a:uFillTx/>
-              </a:defRPr>
-            </a:defPPr>
-            <a:lvl1pPr marL="0" marR="0" indent="0" algn="ctr" defTabSz="412750" rtl="0" fontAlgn="auto" latinLnBrk="0" hangingPunct="0">
-              <a:lnSpc>
-                <a:spcPct val="100000"/>
-              </a:lnSpc>
-              <a:spcBef>
-                <a:spcPts val="2950"/>
-              </a:spcBef>
-              <a:spcAft>
-                <a:spcPts val="0"/>
-              </a:spcAft>
-              <a:buClrTx/>
-              <a:buSzTx/>
-              <a:buFontTx/>
-              <a:buNone/>
-              <a:tabLst/>
-              <a:defRPr kumimoji="0" sz="1200" b="0" i="0" u="none" strike="noStrike" cap="none" spc="0" normalizeH="0" baseline="0">
-                <a:ln>
-                  <a:noFill/>
-                </a:ln>
-                <a:solidFill>
-                  <a:schemeClr val="tx1">
-                    <a:tint val="82000"/>
-                  </a:schemeClr>
-                </a:solidFill>
-                <a:effectLst/>
-                <a:uFillTx/>
-                <a:latin typeface="Helvetica Neue"/>
-                <a:ea typeface="Helvetica Neue"/>
-                <a:cs typeface="Helvetica Neue"/>
-                <a:sym typeface="Helvetica Neue"/>
-              </a:defRPr>
-            </a:lvl1pPr>
-            <a:lvl2pPr marL="0" marR="0" indent="0" algn="l" defTabSz="412750" rtl="0" fontAlgn="auto" latinLnBrk="0" hangingPunct="0">
-              <a:lnSpc>
-                <a:spcPct val="100000"/>
-              </a:lnSpc>
-              <a:spcBef>
-                <a:spcPts val="2950"/>
-              </a:spcBef>
-              <a:spcAft>
-                <a:spcPts val="0"/>
-              </a:spcAft>
-              <a:buClrTx/>
-              <a:buSzTx/>
-              <a:buFontTx/>
-              <a:buNone/>
-              <a:tabLst/>
-              <a:defRPr kumimoji="0" sz="2400" b="0" i="0" u="none" strike="noStrike" cap="none" spc="0" normalizeH="0" baseline="0">
-                <a:ln>
-                  <a:noFill/>
-                </a:ln>
-                <a:solidFill>
-                  <a:srgbClr val="FFFFFF"/>
-                </a:solidFill>
-                <a:effectLst/>
-                <a:uFillTx/>
-                <a:latin typeface="Helvetica Neue"/>
-                <a:ea typeface="Helvetica Neue"/>
-                <a:cs typeface="Helvetica Neue"/>
-                <a:sym typeface="Helvetica Neue"/>
-              </a:defRPr>
-            </a:lvl2pPr>
-            <a:lvl3pPr marL="0" marR="0" indent="0" algn="l" defTabSz="412750" rtl="0" fontAlgn="auto" latinLnBrk="0" hangingPunct="0">
-              <a:lnSpc>
-                <a:spcPct val="100000"/>
-              </a:lnSpc>
-              <a:spcBef>
-                <a:spcPts val="2950"/>
-              </a:spcBef>
-              <a:spcAft>
-                <a:spcPts val="0"/>
-              </a:spcAft>
-              <a:buClrTx/>
-              <a:buSzTx/>
-              <a:buFontTx/>
-              <a:buNone/>
-              <a:tabLst/>
-              <a:defRPr kumimoji="0" sz="2400" b="0" i="0" u="none" strike="noStrike" cap="none" spc="0" normalizeH="0" baseline="0">
-                <a:ln>
-                  <a:noFill/>
-                </a:ln>
-                <a:solidFill>
-                  <a:srgbClr val="FFFFFF"/>
-                </a:solidFill>
-                <a:effectLst/>
-                <a:uFillTx/>
-                <a:latin typeface="Helvetica Neue"/>
-                <a:ea typeface="Helvetica Neue"/>
-                <a:cs typeface="Helvetica Neue"/>
-                <a:sym typeface="Helvetica Neue"/>
-              </a:defRPr>
-            </a:lvl3pPr>
-            <a:lvl4pPr marL="0" marR="0" indent="0" algn="l" defTabSz="412750" rtl="0" fontAlgn="auto" latinLnBrk="0" hangingPunct="0">
-              <a:lnSpc>
-                <a:spcPct val="100000"/>
-              </a:lnSpc>
-              <a:spcBef>
-                <a:spcPts val="2950"/>
-              </a:spcBef>
-              <a:spcAft>
-                <a:spcPts val="0"/>
-              </a:spcAft>
-              <a:buClrTx/>
-              <a:buSzTx/>
-              <a:buFontTx/>
-              <a:buNone/>
-              <a:tabLst/>
-              <a:defRPr kumimoji="0" sz="2400" b="0" i="0" u="none" strike="noStrike" cap="none" spc="0" normalizeH="0" baseline="0">
-                <a:ln>
-                  <a:noFill/>
-                </a:ln>
-                <a:solidFill>
-                  <a:srgbClr val="FFFFFF"/>
-                </a:solidFill>
-                <a:effectLst/>
-                <a:uFillTx/>
-                <a:latin typeface="Helvetica Neue"/>
-                <a:ea typeface="Helvetica Neue"/>
-                <a:cs typeface="Helvetica Neue"/>
-                <a:sym typeface="Helvetica Neue"/>
-              </a:defRPr>
-            </a:lvl4pPr>
-            <a:lvl5pPr marL="0" marR="0" indent="0" algn="l" defTabSz="412750" rtl="0" fontAlgn="auto" latinLnBrk="0" hangingPunct="0">
-              <a:lnSpc>
-                <a:spcPct val="100000"/>
-              </a:lnSpc>
-              <a:spcBef>
-                <a:spcPts val="2950"/>
-              </a:spcBef>
-              <a:spcAft>
-                <a:spcPts val="0"/>
-              </a:spcAft>
-              <a:buClrTx/>
-              <a:buSzTx/>
-              <a:buFontTx/>
-              <a:buNone/>
-              <a:tabLst/>
-              <a:defRPr kumimoji="0" sz="2400" b="0" i="0" u="none" strike="noStrike" cap="none" spc="0" normalizeH="0" baseline="0">
-                <a:ln>
-                  <a:noFill/>
-                </a:ln>
-                <a:solidFill>
-                  <a:srgbClr val="FFFFFF"/>
-                </a:solidFill>
-                <a:effectLst/>
-                <a:uFillTx/>
-                <a:latin typeface="Helvetica Neue"/>
-                <a:ea typeface="Helvetica Neue"/>
-                <a:cs typeface="Helvetica Neue"/>
-                <a:sym typeface="Helvetica Neue"/>
-              </a:defRPr>
-            </a:lvl5pPr>
-            <a:lvl6pPr marL="0" marR="0" indent="0" algn="l" defTabSz="412750" rtl="0" fontAlgn="auto" latinLnBrk="0" hangingPunct="0">
-              <a:lnSpc>
-                <a:spcPct val="100000"/>
-              </a:lnSpc>
-              <a:spcBef>
-                <a:spcPts val="2950"/>
-              </a:spcBef>
-              <a:spcAft>
-                <a:spcPts val="0"/>
-              </a:spcAft>
-              <a:buClrTx/>
-              <a:buSzTx/>
-              <a:buFontTx/>
-              <a:buNone/>
-              <a:tabLst/>
-              <a:defRPr kumimoji="0" sz="2400" b="0" i="0" u="none" strike="noStrike" cap="none" spc="0" normalizeH="0" baseline="0">
-                <a:ln>
-                  <a:noFill/>
-                </a:ln>
-                <a:solidFill>
-                  <a:srgbClr val="FFFFFF"/>
-                </a:solidFill>
-                <a:effectLst/>
-                <a:uFillTx/>
-                <a:latin typeface="Helvetica Neue"/>
-                <a:ea typeface="Helvetica Neue"/>
-                <a:cs typeface="Helvetica Neue"/>
-                <a:sym typeface="Helvetica Neue"/>
-              </a:defRPr>
-            </a:lvl6pPr>
-            <a:lvl7pPr marL="0" marR="0" indent="0" algn="l" defTabSz="412750" rtl="0" fontAlgn="auto" latinLnBrk="0" hangingPunct="0">
-              <a:lnSpc>
-                <a:spcPct val="100000"/>
-              </a:lnSpc>
-              <a:spcBef>
-                <a:spcPts val="2950"/>
-              </a:spcBef>
-              <a:spcAft>
-                <a:spcPts val="0"/>
-              </a:spcAft>
-              <a:buClrTx/>
-              <a:buSzTx/>
-              <a:buFontTx/>
-              <a:buNone/>
-              <a:tabLst/>
-              <a:defRPr kumimoji="0" sz="2400" b="0" i="0" u="none" strike="noStrike" cap="none" spc="0" normalizeH="0" baseline="0">
-                <a:ln>
-                  <a:noFill/>
-                </a:ln>
-                <a:solidFill>
-                  <a:srgbClr val="FFFFFF"/>
-                </a:solidFill>
-                <a:effectLst/>
-                <a:uFillTx/>
-                <a:latin typeface="Helvetica Neue"/>
-                <a:ea typeface="Helvetica Neue"/>
-                <a:cs typeface="Helvetica Neue"/>
-                <a:sym typeface="Helvetica Neue"/>
-              </a:defRPr>
-            </a:lvl7pPr>
-            <a:lvl8pPr marL="0" marR="0" indent="0" algn="l" defTabSz="412750" rtl="0" fontAlgn="auto" latinLnBrk="0" hangingPunct="0">
-              <a:lnSpc>
-                <a:spcPct val="100000"/>
-              </a:lnSpc>
-              <a:spcBef>
-                <a:spcPts val="2950"/>
-              </a:spcBef>
-              <a:spcAft>
-                <a:spcPts val="0"/>
-              </a:spcAft>
-              <a:buClrTx/>
-              <a:buSzTx/>
-              <a:buFontTx/>
-              <a:buNone/>
-              <a:tabLst/>
-              <a:defRPr kumimoji="0" sz="2400" b="0" i="0" u="none" strike="noStrike" cap="none" spc="0" normalizeH="0" baseline="0">
-                <a:ln>
-                  <a:noFill/>
-                </a:ln>
-                <a:solidFill>
-                  <a:srgbClr val="FFFFFF"/>
-                </a:solidFill>
-                <a:effectLst/>
-                <a:uFillTx/>
-                <a:latin typeface="Helvetica Neue"/>
-                <a:ea typeface="Helvetica Neue"/>
-                <a:cs typeface="Helvetica Neue"/>
-                <a:sym typeface="Helvetica Neue"/>
-              </a:defRPr>
-            </a:lvl8pPr>
-            <a:lvl9pPr marL="0" marR="0" indent="0" algn="l" defTabSz="412750" rtl="0" fontAlgn="auto" latinLnBrk="0" hangingPunct="0">
-              <a:lnSpc>
-                <a:spcPct val="100000"/>
-              </a:lnSpc>
-              <a:spcBef>
-                <a:spcPts val="2950"/>
-              </a:spcBef>
-              <a:spcAft>
-                <a:spcPts val="0"/>
-              </a:spcAft>
-              <a:buClrTx/>
-              <a:buSzTx/>
-              <a:buFontTx/>
-              <a:buNone/>
-              <a:tabLst/>
-              <a:defRPr kumimoji="0" sz="2400" b="0" i="0" u="none" strike="noStrike" cap="none" spc="0" normalizeH="0" baseline="0">
-                <a:ln>
-                  <a:noFill/>
-                </a:ln>
-                <a:solidFill>
-                  <a:srgbClr val="FFFFFF"/>
-                </a:solidFill>
-                <a:effectLst/>
-                <a:uFillTx/>
-                <a:latin typeface="Helvetica Neue"/>
-                <a:ea typeface="Helvetica Neue"/>
-                <a:cs typeface="Helvetica Neue"/>
-                <a:sym typeface="Helvetica Neue"/>
-              </a:defRPr>
-            </a:lvl9pPr>
-          </a:lstStyle>
-          <a:p>
-            <a:endParaRPr lang="en-US"/>
-          </a:p>
-        </p:txBody>
-      </p:sp>
-      <p:sp>
-        <p:nvSpPr>
-          <p:cNvPr id="7" name="Slide Number Placeholder 6">
-            <a:extLst>
-              <a:ext uri="{FF2B5EF4-FFF2-40B4-BE49-F238E27FC236}">
-                <a16:creationId xmlns:a16="http://schemas.microsoft.com/office/drawing/2014/main" id="{5AEB01C0-E681-E320-C36D-777A2BC4D6D1}"/>
-              </a:ext>
-            </a:extLst>
-          </p:cNvPr>
-          <p:cNvSpPr>
-            <a:spLocks noGrp="1"/>
-          </p:cNvSpPr>
-          <p:nvPr>
-            <p:ph type="sldNum" sz="quarter" idx="12"/>
-          </p:nvPr>
-        </p:nvSpPr>
-        <p:spPr/>
-        <p:txBody>
-          <a:bodyPr/>
-          <a:lstStyle/>
-          <a:p>
-            <a:fld id="{81D3CA6A-5F61-7D45-9E78-D3AD76A392F9}" type="slidenum">
-              <a:rPr lang="en-US" smtClean="0"/>
-              <a:t>‹#›</a:t>
-            </a:fld>
-            <a:endParaRPr lang="en-US"/>
-          </a:p>
-        </p:txBody>
-      </p:sp>
-      <p:sp>
-        <p:nvSpPr>
-          <p:cNvPr id="9" name="Title 1">
-            <a:extLst>
-              <a:ext uri="{FF2B5EF4-FFF2-40B4-BE49-F238E27FC236}">
-                <a16:creationId xmlns:a16="http://schemas.microsoft.com/office/drawing/2014/main" id="{01ECDBB8-7786-A968-428A-A6CF13DF0497}"/>
-              </a:ext>
-            </a:extLst>
-          </p:cNvPr>
-          <p:cNvSpPr>
-            <a:spLocks noGrp="1"/>
-          </p:cNvSpPr>
-          <p:nvPr>
-            <p:ph type="title"/>
-          </p:nvPr>
-        </p:nvSpPr>
-        <p:spPr>
-          <a:xfrm>
-            <a:off x="850901" y="386899"/>
-            <a:ext cx="10496550" cy="603701"/>
-          </a:xfrm>
-        </p:spPr>
-        <p:txBody>
-          <a:bodyPr/>
-          <a:lstStyle/>
-          <a:p>
-            <a:r>
-              <a:rPr lang="en-US" dirty="0"/>
-              <a:t>Click to edit Master title style</a:t>
-            </a:r>
-          </a:p>
-        </p:txBody>
-      </p:sp>
-    </p:spTree>
-    <p:extLst>
-      <p:ext uri="{BB962C8B-B14F-4D97-AF65-F5344CB8AC3E}">
-        <p14:creationId xmlns:p14="http://schemas.microsoft.com/office/powerpoint/2010/main" val="328191448"/>
-      </p:ext>
-    </p:extLst>
-  </p:cSld>
-  <p:clrMapOvr>
-    <a:masterClrMapping/>
-  </p:clrMapOvr>
-  <p:transition spd="med"/>
-</p:sldLayout>
-</file>
-
-<file path=ppt/slideLayouts/slideLayout7.xml><?xml version="1.0" encoding="utf-8"?>
-<p:sldLayout xmlns:a="http://schemas.openxmlformats.org/drawingml/2006/main" xmlns:r="http://schemas.openxmlformats.org/officeDocument/2006/relationships" xmlns:p="http://schemas.openxmlformats.org/presentationml/2006/main" preserve="1" userDrawn="1">
-  <p:cSld name="Content and Text (vertical)">
-    <p:spTree>
-      <p:nvGrpSpPr>
-        <p:cNvPr id="1" name=""/>
-        <p:cNvGrpSpPr/>
-        <p:nvPr/>
-      </p:nvGrpSpPr>
-      <p:grpSpPr>
-        <a:xfrm>
-          <a:off x="0" y="0"/>
-          <a:ext cx="0" cy="0"/>
-          <a:chOff x="0" y="0"/>
-          <a:chExt cx="0" cy="0"/>
-        </a:xfrm>
-      </p:grpSpPr>
-      <p:sp>
-        <p:nvSpPr>
-          <p:cNvPr id="3" name="Content Placeholder 2">
-            <a:extLst>
-              <a:ext uri="{FF2B5EF4-FFF2-40B4-BE49-F238E27FC236}">
-                <a16:creationId xmlns:a16="http://schemas.microsoft.com/office/drawing/2014/main" id="{EB85AEC4-1825-0A29-E8E9-2EBD1391FDC6}"/>
-              </a:ext>
-            </a:extLst>
-          </p:cNvPr>
-          <p:cNvSpPr>
-            <a:spLocks noGrp="1"/>
-          </p:cNvSpPr>
-          <p:nvPr>
-            <p:ph sz="half" idx="1"/>
-          </p:nvPr>
-        </p:nvSpPr>
-        <p:spPr>
-          <a:xfrm>
-            <a:off x="838199" y="1267959"/>
-            <a:ext cx="10509251" cy="2389642"/>
-          </a:xfrm>
-        </p:spPr>
-        <p:txBody>
-          <a:bodyPr/>
-          <a:lstStyle/>
-          <a:p>
-            <a:pPr lvl="0"/>
-            <a:r>
-              <a:rPr lang="en-US" dirty="0"/>
-              <a:t>Click to edit Master text styles</a:t>
-            </a:r>
-          </a:p>
-          <a:p>
-            <a:pPr lvl="1"/>
-            <a:r>
-              <a:rPr lang="en-US" dirty="0"/>
-              <a:t>Second level</a:t>
-            </a:r>
-          </a:p>
-        </p:txBody>
-      </p:sp>
-      <p:sp>
-        <p:nvSpPr>
-          <p:cNvPr id="5" name="Date Placeholder 4">
-            <a:extLst>
-              <a:ext uri="{FF2B5EF4-FFF2-40B4-BE49-F238E27FC236}">
-                <a16:creationId xmlns:a16="http://schemas.microsoft.com/office/drawing/2014/main" id="{71515902-1B4F-1080-8519-F743FA0C5D3C}"/>
-              </a:ext>
-            </a:extLst>
-          </p:cNvPr>
-          <p:cNvSpPr>
-            <a:spLocks noGrp="1"/>
-          </p:cNvSpPr>
-          <p:nvPr>
-            <p:ph type="dt" sz="half" idx="10"/>
-          </p:nvPr>
-        </p:nvSpPr>
-        <p:spPr>
-          <a:xfrm>
-            <a:off x="838200" y="6356350"/>
-            <a:ext cx="2743200" cy="365125"/>
-          </a:xfrm>
-          <a:prstGeom prst="rect">
-            <a:avLst/>
-          </a:prstGeom>
-        </p:spPr>
-        <p:txBody>
-          <a:bodyPr vert="horz" lIns="91440" tIns="45720" rIns="91440" bIns="45720" rtlCol="0" anchor="ctr"/>
-          <a:lstStyle>
-            <a:defPPr marL="0" marR="0" indent="0" algn="l" defTabSz="457200" rtl="0" fontAlgn="auto" latinLnBrk="1" hangingPunct="0">
-              <a:lnSpc>
-                <a:spcPct val="100000"/>
-              </a:lnSpc>
-              <a:spcBef>
-                <a:spcPts val="0"/>
-              </a:spcBef>
-              <a:spcAft>
-                <a:spcPts val="0"/>
-              </a:spcAft>
-              <a:buClrTx/>
-              <a:buSzTx/>
-              <a:buFontTx/>
-              <a:buNone/>
-              <a:tabLst/>
-              <a:defRPr kumimoji="0" sz="900" b="0" i="0" u="none" strike="noStrike" cap="none" spc="0" normalizeH="0" baseline="0">
-                <a:ln>
-                  <a:noFill/>
-                </a:ln>
-                <a:solidFill>
-                  <a:srgbClr val="000000"/>
-                </a:solidFill>
-                <a:effectLst/>
-                <a:uFillTx/>
-              </a:defRPr>
-            </a:defPPr>
-            <a:lvl1pPr marL="0" marR="0" indent="0" algn="l" defTabSz="412750" rtl="0" fontAlgn="auto" latinLnBrk="0" hangingPunct="0">
-              <a:lnSpc>
-                <a:spcPct val="100000"/>
-              </a:lnSpc>
-              <a:spcBef>
-                <a:spcPts val="2950"/>
-              </a:spcBef>
-              <a:spcAft>
-                <a:spcPts val="0"/>
-              </a:spcAft>
-              <a:buClrTx/>
-              <a:buSzTx/>
-              <a:buFontTx/>
-              <a:buNone/>
-              <a:tabLst/>
-              <a:defRPr kumimoji="0" sz="1200" b="0" i="0" u="none" strike="noStrike" cap="none" spc="0" normalizeH="0" baseline="0">
-                <a:ln>
-                  <a:noFill/>
-                </a:ln>
-                <a:solidFill>
-                  <a:schemeClr val="tx1">
-                    <a:tint val="82000"/>
-                  </a:schemeClr>
-                </a:solidFill>
-                <a:effectLst/>
-                <a:uFillTx/>
-                <a:latin typeface="Helvetica Neue"/>
-                <a:ea typeface="Helvetica Neue"/>
-                <a:cs typeface="Helvetica Neue"/>
-                <a:sym typeface="Helvetica Neue"/>
-              </a:defRPr>
-            </a:lvl1pPr>
-            <a:lvl2pPr marL="0" marR="0" indent="0" algn="l" defTabSz="412750" rtl="0" fontAlgn="auto" latinLnBrk="0" hangingPunct="0">
-              <a:lnSpc>
-                <a:spcPct val="100000"/>
-              </a:lnSpc>
-              <a:spcBef>
-                <a:spcPts val="2950"/>
-              </a:spcBef>
-              <a:spcAft>
-                <a:spcPts val="0"/>
-              </a:spcAft>
-              <a:buClrTx/>
-              <a:buSzTx/>
-              <a:buFontTx/>
-              <a:buNone/>
-              <a:tabLst/>
-              <a:defRPr kumimoji="0" sz="2400" b="0" i="0" u="none" strike="noStrike" cap="none" spc="0" normalizeH="0" baseline="0">
-                <a:ln>
-                  <a:noFill/>
-                </a:ln>
-                <a:solidFill>
-                  <a:srgbClr val="FFFFFF"/>
-                </a:solidFill>
-                <a:effectLst/>
-                <a:uFillTx/>
-                <a:latin typeface="Helvetica Neue"/>
-                <a:ea typeface="Helvetica Neue"/>
-                <a:cs typeface="Helvetica Neue"/>
-                <a:sym typeface="Helvetica Neue"/>
-              </a:defRPr>
-            </a:lvl2pPr>
-            <a:lvl3pPr marL="0" marR="0" indent="0" algn="l" defTabSz="412750" rtl="0" fontAlgn="auto" latinLnBrk="0" hangingPunct="0">
-              <a:lnSpc>
-                <a:spcPct val="100000"/>
-              </a:lnSpc>
-              <a:spcBef>
-                <a:spcPts val="2950"/>
-              </a:spcBef>
-              <a:spcAft>
-                <a:spcPts val="0"/>
-              </a:spcAft>
-              <a:buClrTx/>
-              <a:buSzTx/>
-              <a:buFontTx/>
-              <a:buNone/>
-              <a:tabLst/>
-              <a:defRPr kumimoji="0" sz="2400" b="0" i="0" u="none" strike="noStrike" cap="none" spc="0" normalizeH="0" baseline="0">
-                <a:ln>
-                  <a:noFill/>
-                </a:ln>
-                <a:solidFill>
-                  <a:srgbClr val="FFFFFF"/>
-                </a:solidFill>
-                <a:effectLst/>
-                <a:uFillTx/>
-                <a:latin typeface="Helvetica Neue"/>
-                <a:ea typeface="Helvetica Neue"/>
-                <a:cs typeface="Helvetica Neue"/>
-                <a:sym typeface="Helvetica Neue"/>
-              </a:defRPr>
-            </a:lvl3pPr>
-            <a:lvl4pPr marL="0" marR="0" indent="0" algn="l" defTabSz="412750" rtl="0" fontAlgn="auto" latinLnBrk="0" hangingPunct="0">
-              <a:lnSpc>
-                <a:spcPct val="100000"/>
-              </a:lnSpc>
-              <a:spcBef>
-                <a:spcPts val="2950"/>
-              </a:spcBef>
-              <a:spcAft>
-                <a:spcPts val="0"/>
-              </a:spcAft>
-              <a:buClrTx/>
-              <a:buSzTx/>
-              <a:buFontTx/>
-              <a:buNone/>
-              <a:tabLst/>
-              <a:defRPr kumimoji="0" sz="2400" b="0" i="0" u="none" strike="noStrike" cap="none" spc="0" normalizeH="0" baseline="0">
-                <a:ln>
-                  <a:noFill/>
-                </a:ln>
-                <a:solidFill>
-                  <a:srgbClr val="FFFFFF"/>
-                </a:solidFill>
-                <a:effectLst/>
-                <a:uFillTx/>
-                <a:latin typeface="Helvetica Neue"/>
-                <a:ea typeface="Helvetica Neue"/>
-                <a:cs typeface="Helvetica Neue"/>
-                <a:sym typeface="Helvetica Neue"/>
-              </a:defRPr>
-            </a:lvl4pPr>
-            <a:lvl5pPr marL="0" marR="0" indent="0" algn="l" defTabSz="412750" rtl="0" fontAlgn="auto" latinLnBrk="0" hangingPunct="0">
-              <a:lnSpc>
-                <a:spcPct val="100000"/>
-              </a:lnSpc>
-              <a:spcBef>
-                <a:spcPts val="2950"/>
-              </a:spcBef>
-              <a:spcAft>
-                <a:spcPts val="0"/>
-              </a:spcAft>
-              <a:buClrTx/>
-              <a:buSzTx/>
-              <a:buFontTx/>
-              <a:buNone/>
-              <a:tabLst/>
-              <a:defRPr kumimoji="0" sz="2400" b="0" i="0" u="none" strike="noStrike" cap="none" spc="0" normalizeH="0" baseline="0">
-                <a:ln>
-                  <a:noFill/>
-                </a:ln>
-                <a:solidFill>
-                  <a:srgbClr val="FFFFFF"/>
-                </a:solidFill>
-                <a:effectLst/>
-                <a:uFillTx/>
-                <a:latin typeface="Helvetica Neue"/>
-                <a:ea typeface="Helvetica Neue"/>
-                <a:cs typeface="Helvetica Neue"/>
-                <a:sym typeface="Helvetica Neue"/>
-              </a:defRPr>
-            </a:lvl5pPr>
-            <a:lvl6pPr marL="0" marR="0" indent="0" algn="l" defTabSz="412750" rtl="0" fontAlgn="auto" latinLnBrk="0" hangingPunct="0">
-              <a:lnSpc>
-                <a:spcPct val="100000"/>
-              </a:lnSpc>
-              <a:spcBef>
-                <a:spcPts val="2950"/>
-              </a:spcBef>
-              <a:spcAft>
-                <a:spcPts val="0"/>
-              </a:spcAft>
-              <a:buClrTx/>
-              <a:buSzTx/>
-              <a:buFontTx/>
-              <a:buNone/>
-              <a:tabLst/>
-              <a:defRPr kumimoji="0" sz="2400" b="0" i="0" u="none" strike="noStrike" cap="none" spc="0" normalizeH="0" baseline="0">
-                <a:ln>
-                  <a:noFill/>
-                </a:ln>
-                <a:solidFill>
-                  <a:srgbClr val="FFFFFF"/>
-                </a:solidFill>
-                <a:effectLst/>
-                <a:uFillTx/>
-                <a:latin typeface="Helvetica Neue"/>
-                <a:ea typeface="Helvetica Neue"/>
-                <a:cs typeface="Helvetica Neue"/>
-                <a:sym typeface="Helvetica Neue"/>
-              </a:defRPr>
-            </a:lvl6pPr>
-            <a:lvl7pPr marL="0" marR="0" indent="0" algn="l" defTabSz="412750" rtl="0" fontAlgn="auto" latinLnBrk="0" hangingPunct="0">
-              <a:lnSpc>
-                <a:spcPct val="100000"/>
-              </a:lnSpc>
-              <a:spcBef>
-                <a:spcPts val="2950"/>
-              </a:spcBef>
-              <a:spcAft>
-                <a:spcPts val="0"/>
-              </a:spcAft>
-              <a:buClrTx/>
-              <a:buSzTx/>
-              <a:buFontTx/>
-              <a:buNone/>
-              <a:tabLst/>
-              <a:defRPr kumimoji="0" sz="2400" b="0" i="0" u="none" strike="noStrike" cap="none" spc="0" normalizeH="0" baseline="0">
-                <a:ln>
-                  <a:noFill/>
-                </a:ln>
-                <a:solidFill>
-                  <a:srgbClr val="FFFFFF"/>
-                </a:solidFill>
-                <a:effectLst/>
-                <a:uFillTx/>
-                <a:latin typeface="Helvetica Neue"/>
-                <a:ea typeface="Helvetica Neue"/>
-                <a:cs typeface="Helvetica Neue"/>
-                <a:sym typeface="Helvetica Neue"/>
-              </a:defRPr>
-            </a:lvl7pPr>
-            <a:lvl8pPr marL="0" marR="0" indent="0" algn="l" defTabSz="412750" rtl="0" fontAlgn="auto" latinLnBrk="0" hangingPunct="0">
-              <a:lnSpc>
-                <a:spcPct val="100000"/>
-              </a:lnSpc>
-              <a:spcBef>
-                <a:spcPts val="2950"/>
-              </a:spcBef>
-              <a:spcAft>
-                <a:spcPts val="0"/>
-              </a:spcAft>
-              <a:buClrTx/>
-              <a:buSzTx/>
-              <a:buFontTx/>
-              <a:buNone/>
-              <a:tabLst/>
-              <a:defRPr kumimoji="0" sz="2400" b="0" i="0" u="none" strike="noStrike" cap="none" spc="0" normalizeH="0" baseline="0">
-                <a:ln>
-                  <a:noFill/>
-                </a:ln>
-                <a:solidFill>
-                  <a:srgbClr val="FFFFFF"/>
-                </a:solidFill>
-                <a:effectLst/>
-                <a:uFillTx/>
-                <a:latin typeface="Helvetica Neue"/>
-                <a:ea typeface="Helvetica Neue"/>
-                <a:cs typeface="Helvetica Neue"/>
-                <a:sym typeface="Helvetica Neue"/>
-              </a:defRPr>
-            </a:lvl8pPr>
-            <a:lvl9pPr marL="0" marR="0" indent="0" algn="l" defTabSz="412750" rtl="0" fontAlgn="auto" latinLnBrk="0" hangingPunct="0">
-              <a:lnSpc>
-                <a:spcPct val="100000"/>
-              </a:lnSpc>
-              <a:spcBef>
-                <a:spcPts val="2950"/>
-              </a:spcBef>
-              <a:spcAft>
-                <a:spcPts val="0"/>
-              </a:spcAft>
-              <a:buClrTx/>
-              <a:buSzTx/>
-              <a:buFontTx/>
-              <a:buNone/>
-              <a:tabLst/>
-              <a:defRPr kumimoji="0" sz="2400" b="0" i="0" u="none" strike="noStrike" cap="none" spc="0" normalizeH="0" baseline="0">
-                <a:ln>
-                  <a:noFill/>
-                </a:ln>
-                <a:solidFill>
-                  <a:srgbClr val="FFFFFF"/>
-                </a:solidFill>
-                <a:effectLst/>
-                <a:uFillTx/>
-                <a:latin typeface="Helvetica Neue"/>
-                <a:ea typeface="Helvetica Neue"/>
-                <a:cs typeface="Helvetica Neue"/>
-                <a:sym typeface="Helvetica Neue"/>
-              </a:defRPr>
-            </a:lvl9pPr>
-          </a:lstStyle>
-          <a:p>
-            <a:fld id="{FB2935F8-297A-F844-8555-D6E4631F7E59}" type="datetimeFigureOut">
-              <a:rPr lang="en-US" smtClean="0"/>
-              <a:pPr/>
-              <a:t>1/29/26</a:t>
-            </a:fld>
-            <a:endParaRPr lang="en-US"/>
-          </a:p>
-        </p:txBody>
-      </p:sp>
-      <p:sp>
-        <p:nvSpPr>
-          <p:cNvPr id="6" name="Footer Placeholder 5">
-            <a:extLst>
-              <a:ext uri="{FF2B5EF4-FFF2-40B4-BE49-F238E27FC236}">
-                <a16:creationId xmlns:a16="http://schemas.microsoft.com/office/drawing/2014/main" id="{17F6F134-AA6E-8596-3247-DDDBBB1FE512}"/>
-              </a:ext>
-            </a:extLst>
-          </p:cNvPr>
-          <p:cNvSpPr>
-            <a:spLocks noGrp="1"/>
-          </p:cNvSpPr>
-          <p:nvPr>
-            <p:ph type="ftr" sz="quarter" idx="11"/>
-          </p:nvPr>
-        </p:nvSpPr>
-        <p:spPr>
-          <a:xfrm>
-            <a:off x="4038600" y="6356350"/>
-            <a:ext cx="4114800" cy="365125"/>
-          </a:xfrm>
-          <a:prstGeom prst="rect">
-            <a:avLst/>
-          </a:prstGeom>
-        </p:spPr>
-        <p:txBody>
-          <a:bodyPr vert="horz" lIns="91440" tIns="45720" rIns="91440" bIns="45720" rtlCol="0" anchor="ctr"/>
-          <a:lstStyle>
-            <a:defPPr marL="0" marR="0" indent="0" algn="l" defTabSz="457200" rtl="0" fontAlgn="auto" latinLnBrk="1" hangingPunct="0">
-              <a:lnSpc>
-                <a:spcPct val="100000"/>
-              </a:lnSpc>
-              <a:spcBef>
-                <a:spcPts val="0"/>
-              </a:spcBef>
-              <a:spcAft>
-                <a:spcPts val="0"/>
-              </a:spcAft>
-              <a:buClrTx/>
-              <a:buSzTx/>
-              <a:buFontTx/>
-              <a:buNone/>
-              <a:tabLst/>
-              <a:defRPr kumimoji="0" sz="900" b="0" i="0" u="none" strike="noStrike" cap="none" spc="0" normalizeH="0" baseline="0">
-                <a:ln>
-                  <a:noFill/>
-                </a:ln>
-                <a:solidFill>
-                  <a:srgbClr val="000000"/>
-                </a:solidFill>
-                <a:effectLst/>
-                <a:uFillTx/>
-              </a:defRPr>
-            </a:defPPr>
-            <a:lvl1pPr marL="0" marR="0" indent="0" algn="ctr" defTabSz="412750" rtl="0" fontAlgn="auto" latinLnBrk="0" hangingPunct="0">
-              <a:lnSpc>
-                <a:spcPct val="100000"/>
-              </a:lnSpc>
-              <a:spcBef>
-                <a:spcPts val="2950"/>
-              </a:spcBef>
-              <a:spcAft>
-                <a:spcPts val="0"/>
-              </a:spcAft>
-              <a:buClrTx/>
-              <a:buSzTx/>
-              <a:buFontTx/>
-              <a:buNone/>
-              <a:tabLst/>
-              <a:defRPr kumimoji="0" sz="1200" b="0" i="0" u="none" strike="noStrike" cap="none" spc="0" normalizeH="0" baseline="0">
-                <a:ln>
-                  <a:noFill/>
-                </a:ln>
-                <a:solidFill>
-                  <a:schemeClr val="tx1">
-                    <a:tint val="82000"/>
-                  </a:schemeClr>
-                </a:solidFill>
-                <a:effectLst/>
-                <a:uFillTx/>
-                <a:latin typeface="Helvetica Neue"/>
-                <a:ea typeface="Helvetica Neue"/>
-                <a:cs typeface="Helvetica Neue"/>
-                <a:sym typeface="Helvetica Neue"/>
-              </a:defRPr>
-            </a:lvl1pPr>
-            <a:lvl2pPr marL="0" marR="0" indent="0" algn="l" defTabSz="412750" rtl="0" fontAlgn="auto" latinLnBrk="0" hangingPunct="0">
-              <a:lnSpc>
-                <a:spcPct val="100000"/>
-              </a:lnSpc>
-              <a:spcBef>
-                <a:spcPts val="2950"/>
-              </a:spcBef>
-              <a:spcAft>
-                <a:spcPts val="0"/>
-              </a:spcAft>
-              <a:buClrTx/>
-              <a:buSzTx/>
-              <a:buFontTx/>
-              <a:buNone/>
-              <a:tabLst/>
-              <a:defRPr kumimoji="0" sz="2400" b="0" i="0" u="none" strike="noStrike" cap="none" spc="0" normalizeH="0" baseline="0">
-                <a:ln>
-                  <a:noFill/>
-                </a:ln>
-                <a:solidFill>
-                  <a:srgbClr val="FFFFFF"/>
-                </a:solidFill>
-                <a:effectLst/>
-                <a:uFillTx/>
-                <a:latin typeface="Helvetica Neue"/>
-                <a:ea typeface="Helvetica Neue"/>
-                <a:cs typeface="Helvetica Neue"/>
-                <a:sym typeface="Helvetica Neue"/>
-              </a:defRPr>
-            </a:lvl2pPr>
-            <a:lvl3pPr marL="0" marR="0" indent="0" algn="l" defTabSz="412750" rtl="0" fontAlgn="auto" latinLnBrk="0" hangingPunct="0">
-              <a:lnSpc>
-                <a:spcPct val="100000"/>
-              </a:lnSpc>
-              <a:spcBef>
-                <a:spcPts val="2950"/>
-              </a:spcBef>
-              <a:spcAft>
-                <a:spcPts val="0"/>
-              </a:spcAft>
-              <a:buClrTx/>
-              <a:buSzTx/>
-              <a:buFontTx/>
-              <a:buNone/>
-              <a:tabLst/>
-              <a:defRPr kumimoji="0" sz="2400" b="0" i="0" u="none" strike="noStrike" cap="none" spc="0" normalizeH="0" baseline="0">
-                <a:ln>
-                  <a:noFill/>
-                </a:ln>
-                <a:solidFill>
-                  <a:srgbClr val="FFFFFF"/>
-                </a:solidFill>
-                <a:effectLst/>
-                <a:uFillTx/>
-                <a:latin typeface="Helvetica Neue"/>
-                <a:ea typeface="Helvetica Neue"/>
-                <a:cs typeface="Helvetica Neue"/>
-                <a:sym typeface="Helvetica Neue"/>
-              </a:defRPr>
-            </a:lvl3pPr>
-            <a:lvl4pPr marL="0" marR="0" indent="0" algn="l" defTabSz="412750" rtl="0" fontAlgn="auto" latinLnBrk="0" hangingPunct="0">
-              <a:lnSpc>
-                <a:spcPct val="100000"/>
-              </a:lnSpc>
-              <a:spcBef>
-                <a:spcPts val="2950"/>
-              </a:spcBef>
-              <a:spcAft>
-                <a:spcPts val="0"/>
-              </a:spcAft>
-              <a:buClrTx/>
-              <a:buSzTx/>
-              <a:buFontTx/>
-              <a:buNone/>
-              <a:tabLst/>
-              <a:defRPr kumimoji="0" sz="2400" b="0" i="0" u="none" strike="noStrike" cap="none" spc="0" normalizeH="0" baseline="0">
-                <a:ln>
-                  <a:noFill/>
-                </a:ln>
-                <a:solidFill>
-                  <a:srgbClr val="FFFFFF"/>
-                </a:solidFill>
-                <a:effectLst/>
-                <a:uFillTx/>
-                <a:latin typeface="Helvetica Neue"/>
-                <a:ea typeface="Helvetica Neue"/>
-                <a:cs typeface="Helvetica Neue"/>
-                <a:sym typeface="Helvetica Neue"/>
-              </a:defRPr>
-            </a:lvl4pPr>
-            <a:lvl5pPr marL="0" marR="0" indent="0" algn="l" defTabSz="412750" rtl="0" fontAlgn="auto" latinLnBrk="0" hangingPunct="0">
-              <a:lnSpc>
-                <a:spcPct val="100000"/>
-              </a:lnSpc>
-              <a:spcBef>
-                <a:spcPts val="2950"/>
-              </a:spcBef>
-              <a:spcAft>
-                <a:spcPts val="0"/>
-              </a:spcAft>
-              <a:buClrTx/>
-              <a:buSzTx/>
-              <a:buFontTx/>
-              <a:buNone/>
-              <a:tabLst/>
-              <a:defRPr kumimoji="0" sz="2400" b="0" i="0" u="none" strike="noStrike" cap="none" spc="0" normalizeH="0" baseline="0">
-                <a:ln>
-                  <a:noFill/>
-                </a:ln>
-                <a:solidFill>
-                  <a:srgbClr val="FFFFFF"/>
-                </a:solidFill>
-                <a:effectLst/>
-                <a:uFillTx/>
-                <a:latin typeface="Helvetica Neue"/>
-                <a:ea typeface="Helvetica Neue"/>
-                <a:cs typeface="Helvetica Neue"/>
-                <a:sym typeface="Helvetica Neue"/>
-              </a:defRPr>
-            </a:lvl5pPr>
-            <a:lvl6pPr marL="0" marR="0" indent="0" algn="l" defTabSz="412750" rtl="0" fontAlgn="auto" latinLnBrk="0" hangingPunct="0">
-              <a:lnSpc>
-                <a:spcPct val="100000"/>
-              </a:lnSpc>
-              <a:spcBef>
-                <a:spcPts val="2950"/>
-              </a:spcBef>
-              <a:spcAft>
-                <a:spcPts val="0"/>
-              </a:spcAft>
-              <a:buClrTx/>
-              <a:buSzTx/>
-              <a:buFontTx/>
-              <a:buNone/>
-              <a:tabLst/>
-              <a:defRPr kumimoji="0" sz="2400" b="0" i="0" u="none" strike="noStrike" cap="none" spc="0" normalizeH="0" baseline="0">
-                <a:ln>
-                  <a:noFill/>
-                </a:ln>
-                <a:solidFill>
-                  <a:srgbClr val="FFFFFF"/>
-                </a:solidFill>
-                <a:effectLst/>
-                <a:uFillTx/>
-                <a:latin typeface="Helvetica Neue"/>
-                <a:ea typeface="Helvetica Neue"/>
-                <a:cs typeface="Helvetica Neue"/>
-                <a:sym typeface="Helvetica Neue"/>
-              </a:defRPr>
-            </a:lvl6pPr>
-            <a:lvl7pPr marL="0" marR="0" indent="0" algn="l" defTabSz="412750" rtl="0" fontAlgn="auto" latinLnBrk="0" hangingPunct="0">
-              <a:lnSpc>
-                <a:spcPct val="100000"/>
-              </a:lnSpc>
-              <a:spcBef>
-                <a:spcPts val="2950"/>
-              </a:spcBef>
-              <a:spcAft>
-                <a:spcPts val="0"/>
-              </a:spcAft>
-              <a:buClrTx/>
-              <a:buSzTx/>
-              <a:buFontTx/>
-              <a:buNone/>
-              <a:tabLst/>
-              <a:defRPr kumimoji="0" sz="2400" b="0" i="0" u="none" strike="noStrike" cap="none" spc="0" normalizeH="0" baseline="0">
-                <a:ln>
-                  <a:noFill/>
-                </a:ln>
-                <a:solidFill>
-                  <a:srgbClr val="FFFFFF"/>
-                </a:solidFill>
-                <a:effectLst/>
-                <a:uFillTx/>
-                <a:latin typeface="Helvetica Neue"/>
-                <a:ea typeface="Helvetica Neue"/>
-                <a:cs typeface="Helvetica Neue"/>
-                <a:sym typeface="Helvetica Neue"/>
-              </a:defRPr>
-            </a:lvl7pPr>
-            <a:lvl8pPr marL="0" marR="0" indent="0" algn="l" defTabSz="412750" rtl="0" fontAlgn="auto" latinLnBrk="0" hangingPunct="0">
-              <a:lnSpc>
-                <a:spcPct val="100000"/>
-              </a:lnSpc>
-              <a:spcBef>
-                <a:spcPts val="2950"/>
-              </a:spcBef>
-              <a:spcAft>
-                <a:spcPts val="0"/>
-              </a:spcAft>
-              <a:buClrTx/>
-              <a:buSzTx/>
-              <a:buFontTx/>
-              <a:buNone/>
-              <a:tabLst/>
-              <a:defRPr kumimoji="0" sz="2400" b="0" i="0" u="none" strike="noStrike" cap="none" spc="0" normalizeH="0" baseline="0">
-                <a:ln>
-                  <a:noFill/>
-                </a:ln>
-                <a:solidFill>
-                  <a:srgbClr val="FFFFFF"/>
-                </a:solidFill>
-                <a:effectLst/>
-                <a:uFillTx/>
-                <a:latin typeface="Helvetica Neue"/>
-                <a:ea typeface="Helvetica Neue"/>
-                <a:cs typeface="Helvetica Neue"/>
-                <a:sym typeface="Helvetica Neue"/>
-              </a:defRPr>
-            </a:lvl8pPr>
-            <a:lvl9pPr marL="0" marR="0" indent="0" algn="l" defTabSz="412750" rtl="0" fontAlgn="auto" latinLnBrk="0" hangingPunct="0">
-              <a:lnSpc>
-                <a:spcPct val="100000"/>
-              </a:lnSpc>
-              <a:spcBef>
-                <a:spcPts val="2950"/>
-              </a:spcBef>
-              <a:spcAft>
-                <a:spcPts val="0"/>
-              </a:spcAft>
-              <a:buClrTx/>
-              <a:buSzTx/>
-              <a:buFontTx/>
-              <a:buNone/>
-              <a:tabLst/>
-              <a:defRPr kumimoji="0" sz="2400" b="0" i="0" u="none" strike="noStrike" cap="none" spc="0" normalizeH="0" baseline="0">
-                <a:ln>
-                  <a:noFill/>
-                </a:ln>
-                <a:solidFill>
-                  <a:srgbClr val="FFFFFF"/>
-                </a:solidFill>
-                <a:effectLst/>
-                <a:uFillTx/>
-                <a:latin typeface="Helvetica Neue"/>
-                <a:ea typeface="Helvetica Neue"/>
-                <a:cs typeface="Helvetica Neue"/>
-                <a:sym typeface="Helvetica Neue"/>
-              </a:defRPr>
-            </a:lvl9pPr>
-          </a:lstStyle>
-          <a:p>
-            <a:endParaRPr lang="en-US"/>
-          </a:p>
-        </p:txBody>
-      </p:sp>
-      <p:sp>
-        <p:nvSpPr>
-          <p:cNvPr id="7" name="Slide Number Placeholder 6">
-            <a:extLst>
-              <a:ext uri="{FF2B5EF4-FFF2-40B4-BE49-F238E27FC236}">
-                <a16:creationId xmlns:a16="http://schemas.microsoft.com/office/drawing/2014/main" id="{5AEB01C0-E681-E320-C36D-777A2BC4D6D1}"/>
-              </a:ext>
-            </a:extLst>
-          </p:cNvPr>
-          <p:cNvSpPr>
-            <a:spLocks noGrp="1"/>
-          </p:cNvSpPr>
-          <p:nvPr>
-            <p:ph type="sldNum" sz="quarter" idx="12"/>
-          </p:nvPr>
-        </p:nvSpPr>
-        <p:spPr/>
-        <p:txBody>
-          <a:bodyPr/>
-          <a:lstStyle/>
-          <a:p>
-            <a:fld id="{81D3CA6A-5F61-7D45-9E78-D3AD76A392F9}" type="slidenum">
-              <a:rPr lang="en-US" smtClean="0"/>
-              <a:t>‹#›</a:t>
-            </a:fld>
-            <a:endParaRPr lang="en-US"/>
-          </a:p>
-        </p:txBody>
-      </p:sp>
-      <p:sp>
-        <p:nvSpPr>
-          <p:cNvPr id="9" name="Title 1">
-            <a:extLst>
-              <a:ext uri="{FF2B5EF4-FFF2-40B4-BE49-F238E27FC236}">
-                <a16:creationId xmlns:a16="http://schemas.microsoft.com/office/drawing/2014/main" id="{01ECDBB8-7786-A968-428A-A6CF13DF0497}"/>
-              </a:ext>
-            </a:extLst>
-          </p:cNvPr>
-          <p:cNvSpPr>
-            <a:spLocks noGrp="1"/>
-          </p:cNvSpPr>
-          <p:nvPr>
-            <p:ph type="title"/>
-          </p:nvPr>
-        </p:nvSpPr>
-        <p:spPr>
-          <a:xfrm>
-            <a:off x="850901" y="386899"/>
-            <a:ext cx="10496550" cy="603701"/>
-          </a:xfrm>
-        </p:spPr>
-        <p:txBody>
-          <a:bodyPr/>
-          <a:lstStyle/>
-          <a:p>
-            <a:r>
-              <a:rPr lang="en-US" dirty="0"/>
-              <a:t>Click to edit Master title style</a:t>
-            </a:r>
-          </a:p>
-        </p:txBody>
-      </p:sp>
-      <p:sp>
-        <p:nvSpPr>
-          <p:cNvPr id="10" name="Text Placeholder 7">
-            <a:extLst>
-              <a:ext uri="{FF2B5EF4-FFF2-40B4-BE49-F238E27FC236}">
-                <a16:creationId xmlns:a16="http://schemas.microsoft.com/office/drawing/2014/main" id="{FF10E8A3-D80D-C29F-CB9D-366775D88500}"/>
-              </a:ext>
-            </a:extLst>
-          </p:cNvPr>
-          <p:cNvSpPr>
-            <a:spLocks noGrp="1"/>
-          </p:cNvSpPr>
-          <p:nvPr>
-            <p:ph type="body" sz="quarter" idx="13"/>
-          </p:nvPr>
-        </p:nvSpPr>
-        <p:spPr>
-          <a:xfrm>
-            <a:off x="838200" y="3836988"/>
-            <a:ext cx="10496550" cy="2368550"/>
-          </a:xfrm>
-        </p:spPr>
-        <p:txBody>
-          <a:bodyPr/>
-          <a:lstStyle>
-            <a:lvl4pPr>
-              <a:buNone/>
-              <a:defRPr/>
-            </a:lvl4pPr>
-          </a:lstStyle>
-          <a:p>
-            <a:pPr lvl="0"/>
-            <a:r>
-              <a:rPr lang="en-US" dirty="0"/>
-              <a:t>Click to edit Master text styles</a:t>
-            </a:r>
-          </a:p>
-          <a:p>
-            <a:pPr lvl="1"/>
-            <a:r>
-              <a:rPr lang="en-US" dirty="0"/>
-              <a:t>Second level</a:t>
-            </a:r>
-          </a:p>
-          <a:p>
-            <a:pPr lvl="2"/>
-            <a:r>
-              <a:rPr lang="en-US" dirty="0"/>
-              <a:t>Third level</a:t>
-            </a:r>
-          </a:p>
-        </p:txBody>
-      </p:sp>
-    </p:spTree>
-    <p:extLst>
-      <p:ext uri="{BB962C8B-B14F-4D97-AF65-F5344CB8AC3E}">
-        <p14:creationId xmlns:p14="http://schemas.microsoft.com/office/powerpoint/2010/main" val="1894351935"/>
       </p:ext>
     </p:extLst>
   </p:cSld>
@@ -4661,8 +5067,8 @@
         </p:nvSpPr>
         <p:spPr>
           <a:xfrm>
-            <a:off x="387144" y="386899"/>
-            <a:ext cx="11508299" cy="603701"/>
+            <a:off x="386899" y="386899"/>
+            <a:ext cx="10502900" cy="603701"/>
           </a:xfrm>
           <a:prstGeom prst="rect">
             <a:avLst/>
@@ -4672,7 +5078,7 @@
           </a:ln>
           <a:extLst>
             <a:ext uri="{C572A759-6A51-4108-AA02-DFA0A04FC94B}">
-              <ma14:wrappingTextBoxFlag xmlns:m="http://schemas.openxmlformats.org/officeDocument/2006/math" xmlns:a14="http://schemas.microsoft.com/office/drawing/2010/main" xmlns:ma14="http://schemas.microsoft.com/office/mac/drawingml/2011/main" xmlns="" val="1"/>
+              <ma14:wrappingTextBoxFlag xmlns="" xmlns:ma14="http://schemas.microsoft.com/office/mac/drawingml/2011/main" xmlns:a14="http://schemas.microsoft.com/office/drawing/2010/main" xmlns:m="http://schemas.openxmlformats.org/officeDocument/2006/math" val="1"/>
             </a:ext>
           </a:extLst>
         </p:spPr>
@@ -4700,8 +5106,8 @@
         </p:nvSpPr>
         <p:spPr>
           <a:xfrm>
-            <a:off x="387145" y="1510234"/>
-            <a:ext cx="11508298" cy="4648200"/>
+            <a:off x="387391" y="1510234"/>
+            <a:ext cx="10502900" cy="4648200"/>
           </a:xfrm>
           <a:prstGeom prst="rect">
             <a:avLst/>
@@ -4711,7 +5117,7 @@
           </a:ln>
           <a:extLst>
             <a:ext uri="{C572A759-6A51-4108-AA02-DFA0A04FC94B}">
-              <ma14:wrappingTextBoxFlag xmlns:m="http://schemas.openxmlformats.org/officeDocument/2006/math" xmlns:a14="http://schemas.microsoft.com/office/drawing/2010/main" xmlns:ma14="http://schemas.microsoft.com/office/mac/drawingml/2011/main" xmlns="" val="1"/>
+              <ma14:wrappingTextBoxFlag xmlns="" xmlns:ma14="http://schemas.microsoft.com/office/mac/drawingml/2011/main" xmlns:a14="http://schemas.microsoft.com/office/drawing/2010/main" xmlns:m="http://schemas.openxmlformats.org/officeDocument/2006/math" val="1"/>
             </a:ext>
           </a:extLst>
         </p:spPr>
@@ -4722,22 +5128,31 @@
           <a:lstStyle/>
           <a:p>
             <a:r>
-              <a:rPr dirty="0"/>
               <a:t>Body Level One</a:t>
             </a:r>
           </a:p>
           <a:p>
             <a:pPr lvl="1"/>
             <a:r>
-              <a:rPr dirty="0"/>
               <a:t>Body Level Two</a:t>
             </a:r>
           </a:p>
           <a:p>
             <a:pPr lvl="2"/>
             <a:r>
-              <a:rPr dirty="0"/>
               <a:t>Body Level Three</a:t>
+            </a:r>
+          </a:p>
+          <a:p>
+            <a:pPr lvl="3"/>
+            <a:r>
+              <a:t>Body Level Four</a:t>
+            </a:r>
+          </a:p>
+          <a:p>
+            <a:pPr lvl="4"/>
+            <a:r>
+              <a:t>Body Level Five</a:t>
             </a:r>
           </a:p>
         </p:txBody>
@@ -4754,7 +5169,7 @@
         </p:nvSpPr>
         <p:spPr>
           <a:xfrm>
-            <a:off x="11895444" y="6542617"/>
+            <a:off x="5944548" y="6540500"/>
             <a:ext cx="296556" cy="287258"/>
           </a:xfrm>
           <a:prstGeom prst="rect">
@@ -4782,142 +5197,30 @@
             </a:lvl1pPr>
           </a:lstStyle>
           <a:p>
-            <a:fld id="{C0A49765-7C13-4464-8753-5BEDD4AF8F17}" type="slidenum">
-              <a:rPr lang="en-US" smtClean="0"/>
-              <a:pPr/>
+            <a:fld id="{86CB4B4D-7CA3-9044-876B-883B54F8677D}" type="slidenum">
               <a:t>‹#›</a:t>
             </a:fld>
-            <a:endParaRPr lang="en-US"/>
+            <a:endParaRPr/>
           </a:p>
         </p:txBody>
       </p:sp>
-      <p:sp>
-        <p:nvSpPr>
-          <p:cNvPr id="5" name="TextBox 4">
-            <a:extLst>
-              <a:ext uri="{FF2B5EF4-FFF2-40B4-BE49-F238E27FC236}">
-                <a16:creationId xmlns:a16="http://schemas.microsoft.com/office/drawing/2014/main" id="{71DA81DF-5627-809F-F7C0-20F4F8BD82D8}"/>
-              </a:ext>
-            </a:extLst>
-          </p:cNvPr>
-          <p:cNvSpPr txBox="1"/>
-          <p:nvPr userDrawn="1"/>
-        </p:nvSpPr>
-        <p:spPr>
-          <a:xfrm>
-            <a:off x="11150048" y="0"/>
-            <a:ext cx="1041952" cy="256480"/>
-          </a:xfrm>
-          <a:prstGeom prst="rect">
-            <a:avLst/>
-          </a:prstGeom>
-          <a:noFill/>
-          <a:ln w="12700" cap="flat">
-            <a:noFill/>
-            <a:miter lim="400000"/>
-          </a:ln>
-          <a:effectLst/>
-          <a:sp3d/>
-        </p:spPr>
-        <p:style>
-          <a:lnRef idx="0">
-            <a:scrgbClr r="0" g="0" b="0"/>
-          </a:lnRef>
-          <a:fillRef idx="0">
-            <a:scrgbClr r="0" g="0" b="0"/>
-          </a:fillRef>
-          <a:effectRef idx="0">
-            <a:scrgbClr r="0" g="0" b="0"/>
-          </a:effectRef>
-          <a:fontRef idx="none"/>
-        </p:style>
-        <p:txBody>
-          <a:bodyPr rot="0" spcFirstLastPara="1" vertOverflow="overflow" horzOverflow="overflow" vert="horz" wrap="none" lIns="50800" tIns="50800" rIns="50800" bIns="50800" numCol="1" spcCol="38100" rtlCol="0" anchor="ctr">
-            <a:spAutoFit/>
-          </a:bodyPr>
-          <a:lstStyle/>
-          <a:p>
-            <a:pPr marL="0" marR="0" indent="0" algn="l" defTabSz="825500" rtl="0" fontAlgn="auto" latinLnBrk="0" hangingPunct="0">
-              <a:lnSpc>
-                <a:spcPct val="100000"/>
-              </a:lnSpc>
-              <a:spcBef>
-                <a:spcPts val="0"/>
-              </a:spcBef>
-              <a:spcAft>
-                <a:spcPts val="0"/>
-              </a:spcAft>
-              <a:buClrTx/>
-              <a:buSzTx/>
-              <a:buFontTx/>
-              <a:buNone/>
-              <a:tabLst/>
-            </a:pPr>
-            <a:r>
-              <a:rPr kumimoji="0" lang="en-US" sz="1000" b="0" i="1" u="none" strike="noStrike" cap="none" spc="0" normalizeH="0" baseline="0">
-                <a:ln>
-                  <a:noFill/>
-                </a:ln>
-                <a:solidFill>
-                  <a:srgbClr val="FFFFFF"/>
-                </a:solidFill>
-                <a:effectLst/>
-                <a:uFillTx/>
-                <a:latin typeface="Helvetica Neue"/>
-                <a:ea typeface="Helvetica Neue"/>
-                <a:cs typeface="Helvetica Neue"/>
-                <a:sym typeface="Helvetica Neue"/>
-              </a:rPr>
-              <a:t>CONFIDENTIAL</a:t>
-            </a:r>
-          </a:p>
-        </p:txBody>
-      </p:sp>
-      <p:pic>
-        <p:nvPicPr>
-          <p:cNvPr id="6" name="Picture 5">
-            <a:extLst>
-              <a:ext uri="{FF2B5EF4-FFF2-40B4-BE49-F238E27FC236}">
-                <a16:creationId xmlns:a16="http://schemas.microsoft.com/office/drawing/2014/main" id="{B4CA1D80-2B1F-14C2-193E-5A3CEC80E93B}"/>
-              </a:ext>
-            </a:extLst>
-          </p:cNvPr>
-          <p:cNvPicPr>
-            <a:picLocks noChangeAspect="1"/>
-          </p:cNvPicPr>
-          <p:nvPr userDrawn="1"/>
-        </p:nvPicPr>
-        <p:blipFill>
-          <a:blip r:embed="rId9"/>
-          <a:srcRect l="4356" t="11145" r="84944" b="51846"/>
-          <a:stretch>
-            <a:fillRect/>
-          </a:stretch>
-        </p:blipFill>
-        <p:spPr>
-          <a:xfrm>
-            <a:off x="0" y="6540500"/>
-            <a:ext cx="422275" cy="289375"/>
-          </a:xfrm>
-          <a:prstGeom prst="rect">
-            <a:avLst/>
-          </a:prstGeom>
-        </p:spPr>
-      </p:pic>
     </p:spTree>
   </p:cSld>
   <p:clrMap bg1="dk1" tx1="lt1" bg2="dk2" tx2="lt2" accent1="accent1" accent2="accent2" accent3="accent3" accent4="accent4" accent5="accent5" accent6="accent6" hlink="hlink" folHlink="folHlink"/>
   <p:sldLayoutIdLst>
     <p:sldLayoutId id="2147483649" r:id="rId1"/>
-    <p:sldLayoutId id="2147483654" r:id="rId2"/>
-    <p:sldLayoutId id="2147483671" r:id="rId3"/>
-    <p:sldLayoutId id="2147483667" r:id="rId4"/>
-    <p:sldLayoutId id="2147483669" r:id="rId5"/>
-    <p:sldLayoutId id="2147483668" r:id="rId6"/>
-    <p:sldLayoutId id="2147483670" r:id="rId7"/>
+    <p:sldLayoutId id="2147483651" r:id="rId2"/>
+    <p:sldLayoutId id="2147483654" r:id="rId3"/>
+    <p:sldLayoutId id="2147483664" r:id="rId4"/>
+    <p:sldLayoutId id="2147483655" r:id="rId5"/>
+    <p:sldLayoutId id="2147483662" r:id="rId6"/>
+    <p:sldLayoutId id="2147483665" r:id="rId8"/>
+    <p:sldLayoutId id="2147483666" r:id="rId9"/>
+    <p:sldLayoutId id="2147483667" r:id="rId10"/>
+    <p:sldLayoutId id="2147483668" r:id="rId11"/>
+    <p:sldLayoutId id="2147483669" r:id="rId12"/>
   </p:sldLayoutIdLst>
   <p:transition spd="med"/>
-  <p:hf hdr="0" ftr="0" dt="0"/>
   <p:txStyles>
     <p:titleStyle>
       <a:lvl1pPr marL="0" marR="0" indent="0" algn="l" defTabSz="412750" rtl="0" latinLnBrk="0">
@@ -5161,7 +5464,7 @@
           <a:spcPct val="100000"/>
         </a:lnSpc>
         <a:spcBef>
-          <a:spcPts val="1200"/>
+          <a:spcPts val="2950"/>
         </a:spcBef>
         <a:spcAft>
           <a:spcPts val="0"/>
@@ -5189,7 +5492,7 @@
           <a:spcPct val="100000"/>
         </a:lnSpc>
         <a:spcBef>
-          <a:spcPts val="1200"/>
+          <a:spcPts val="2950"/>
         </a:spcBef>
         <a:spcAft>
           <a:spcPts val="0"/>
@@ -5217,7 +5520,7 @@
           <a:spcPct val="100000"/>
         </a:lnSpc>
         <a:spcBef>
-          <a:spcPts val="1200"/>
+          <a:spcPts val="2950"/>
         </a:spcBef>
         <a:spcAft>
           <a:spcPts val="0"/>
@@ -5676,7 +5979,7 @@
 </file>
 
 <file path=ppt/slides/slide1.xml><?xml version="1.0" encoding="utf-8"?>
-<p:sld xmlns:a="http://schemas.openxmlformats.org/drawingml/2006/main" xmlns:r="http://schemas.openxmlformats.org/officeDocument/2006/relationships" xmlns:p="http://schemas.openxmlformats.org/presentationml/2006/main">
+<p:sld xmlns:a="http://schemas.openxmlformats.org/drawingml/2006/main" xmlns:p="http://schemas.openxmlformats.org/presentationml/2006/main" xmlns:r="http://schemas.openxmlformats.org/officeDocument/2006/relationships">
   <p:cSld>
     <p:spTree>
       <p:nvGrpSpPr>
@@ -5684,23 +5987,10 @@
         <p:cNvGrpSpPr/>
         <p:nvPr/>
       </p:nvGrpSpPr>
-      <p:grpSpPr>
-        <a:xfrm>
-          <a:off x="0" y="0"/>
-          <a:ext cx="0" cy="0"/>
-          <a:chOff x="0" y="0"/>
-          <a:chExt cx="0" cy="0"/>
-        </a:xfrm>
-      </p:grpSpPr>
+      <p:grpSpPr/>
       <p:sp>
         <p:nvSpPr>
-          <p:cNvPr id="7" name="Title 6">
-            <a:extLst>
-              <a:ext uri="{FF2B5EF4-FFF2-40B4-BE49-F238E27FC236}">
-                <a16:creationId xmlns:a16="http://schemas.microsoft.com/office/drawing/2014/main" id="{3FB57271-B41E-EE58-DF2F-ADC2569698C4}"/>
-              </a:ext>
-            </a:extLst>
-          </p:cNvPr>
+          <p:cNvPr id="2" name="Title 1"/>
           <p:cNvSpPr>
             <a:spLocks noGrp="1"/>
           </p:cNvSpPr>
@@ -5713,24 +6003,20 @@
           <a:bodyPr/>
           <a:lstStyle/>
           <a:p>
-            <a:endParaRPr lang="en-US"/>
+            <a:r>
+              <a:t>Title</a:t>
+            </a:r>
           </a:p>
         </p:txBody>
       </p:sp>
       <p:sp>
         <p:nvSpPr>
-          <p:cNvPr id="8" name="Text Placeholder 7">
-            <a:extLst>
-              <a:ext uri="{FF2B5EF4-FFF2-40B4-BE49-F238E27FC236}">
-                <a16:creationId xmlns:a16="http://schemas.microsoft.com/office/drawing/2014/main" id="{56840AFF-C6E2-7313-8462-0857C4F7DACD}"/>
-              </a:ext>
-            </a:extLst>
-          </p:cNvPr>
+          <p:cNvPr id="3" name="Text Placeholder 2"/>
           <p:cNvSpPr>
             <a:spLocks noGrp="1"/>
           </p:cNvSpPr>
           <p:nvPr>
-            <p:ph type="body" sz="quarter" idx="1"/>
+            <p:ph type="body" idx="1" sz="quarter"/>
           </p:nvPr>
         </p:nvSpPr>
         <p:spPr/>
@@ -5738,50 +6024,17 @@
           <a:bodyPr/>
           <a:lstStyle/>
           <a:p>
-            <a:endParaRPr lang="en-US"/>
-          </a:p>
-        </p:txBody>
-      </p:sp>
-      <p:sp>
-        <p:nvSpPr>
-          <p:cNvPr id="4" name="Slide Number Placeholder 3">
-            <a:extLst>
-              <a:ext uri="{FF2B5EF4-FFF2-40B4-BE49-F238E27FC236}">
-                <a16:creationId xmlns:a16="http://schemas.microsoft.com/office/drawing/2014/main" id="{5852B374-224D-AE4E-C1B1-18245BEE294B}"/>
-              </a:ext>
-            </a:extLst>
-          </p:cNvPr>
-          <p:cNvSpPr>
-            <a:spLocks noGrp="1"/>
-          </p:cNvSpPr>
-          <p:nvPr>
-            <p:ph type="sldNum" sz="quarter" idx="2"/>
-          </p:nvPr>
-        </p:nvSpPr>
-        <p:spPr/>
-        <p:txBody>
-          <a:bodyPr/>
-          <a:lstStyle/>
-          <a:p>
-            <a:fld id="{86CB4B4D-7CA3-9044-876B-883B54F8677D}" type="slidenum">
-              <a:rPr lang="en-US" smtClean="0"/>
-              <a:t>1</a:t>
-            </a:fld>
-            <a:endParaRPr lang="en-US"/>
+            <a:r>
+              <a:t>Subtitle</a:t>
+            </a:r>
           </a:p>
         </p:txBody>
       </p:sp>
     </p:spTree>
-    <p:extLst>
-      <p:ext uri="{BB962C8B-B14F-4D97-AF65-F5344CB8AC3E}">
-        <p14:creationId xmlns:p14="http://schemas.microsoft.com/office/powerpoint/2010/main" val="1048775496"/>
-      </p:ext>
-    </p:extLst>
   </p:cSld>
   <p:clrMapOvr>
     <a:masterClrMapping/>
   </p:clrMapOvr>
-  <p:transition spd="med"/>
 </p:sld>
 </file>
 
@@ -5826,110 +6079,16 @@
         <a:srgbClr val="FF00FF"/>
       </a:folHlink>
     </a:clrScheme>
-    <a:fontScheme name="Office">
+    <a:fontScheme name="Black">
       <a:majorFont>
-        <a:latin typeface="Aptos Display" panose="02110004020202020204"/>
-        <a:ea typeface=""/>
-        <a:cs typeface=""/>
-        <a:font script="Jpan" typeface="游ゴシック Light"/>
-        <a:font script="Hang" typeface="맑은 고딕"/>
-        <a:font script="Hans" typeface="等线 Light"/>
-        <a:font script="Hant" typeface="新細明體"/>
-        <a:font script="Arab" typeface="Times New Roman"/>
-        <a:font script="Hebr" typeface="Times New Roman"/>
-        <a:font script="Thai" typeface="Angsana New"/>
-        <a:font script="Ethi" typeface="Nyala"/>
-        <a:font script="Beng" typeface="Vrinda"/>
-        <a:font script="Gujr" typeface="Shruti"/>
-        <a:font script="Khmr" typeface="MoolBoran"/>
-        <a:font script="Knda" typeface="Tunga"/>
-        <a:font script="Guru" typeface="Raavi"/>
-        <a:font script="Cans" typeface="Euphemia"/>
-        <a:font script="Cher" typeface="Plantagenet Cherokee"/>
-        <a:font script="Yiii" typeface="Microsoft Yi Baiti"/>
-        <a:font script="Tibt" typeface="Microsoft Himalaya"/>
-        <a:font script="Thaa" typeface="MV Boli"/>
-        <a:font script="Deva" typeface="Mangal"/>
-        <a:font script="Telu" typeface="Gautami"/>
-        <a:font script="Taml" typeface="Latha"/>
-        <a:font script="Syrc" typeface="Estrangelo Edessa"/>
-        <a:font script="Orya" typeface="Kalinga"/>
-        <a:font script="Mlym" typeface="Kartika"/>
-        <a:font script="Laoo" typeface="DokChampa"/>
-        <a:font script="Sinh" typeface="Iskoola Pota"/>
-        <a:font script="Mong" typeface="Mongolian Baiti"/>
-        <a:font script="Viet" typeface="Times New Roman"/>
-        <a:font script="Uigh" typeface="Microsoft Uighur"/>
-        <a:font script="Geor" typeface="Sylfaen"/>
-        <a:font script="Armn" typeface="Arial"/>
-        <a:font script="Bugi" typeface="Leelawadee UI"/>
-        <a:font script="Bopo" typeface="Microsoft JhengHei"/>
-        <a:font script="Java" typeface="Javanese Text"/>
-        <a:font script="Lisu" typeface="Segoe UI"/>
-        <a:font script="Mymr" typeface="Myanmar Text"/>
-        <a:font script="Nkoo" typeface="Ebrima"/>
-        <a:font script="Olck" typeface="Nirmala UI"/>
-        <a:font script="Osma" typeface="Ebrima"/>
-        <a:font script="Phag" typeface="Phagspa"/>
-        <a:font script="Syrn" typeface="Estrangelo Edessa"/>
-        <a:font script="Syrj" typeface="Estrangelo Edessa"/>
-        <a:font script="Syre" typeface="Estrangelo Edessa"/>
-        <a:font script="Sora" typeface="Nirmala UI"/>
-        <a:font script="Tale" typeface="Microsoft Tai Le"/>
-        <a:font script="Talu" typeface="Microsoft New Tai Lue"/>
-        <a:font script="Tfng" typeface="Ebrima"/>
+        <a:latin typeface="Helvetica Neue Medium"/>
+        <a:ea typeface="Helvetica Neue Medium"/>
+        <a:cs typeface="Helvetica Neue Medium"/>
       </a:majorFont>
       <a:minorFont>
-        <a:latin typeface="Aptos" panose="02110004020202020204"/>
-        <a:ea typeface=""/>
-        <a:cs typeface=""/>
-        <a:font script="Jpan" typeface="游ゴシック"/>
-        <a:font script="Hang" typeface="맑은 고딕"/>
-        <a:font script="Hans" typeface="等线"/>
-        <a:font script="Hant" typeface="新細明體"/>
-        <a:font script="Arab" typeface="Arial"/>
-        <a:font script="Hebr" typeface="Arial"/>
-        <a:font script="Thai" typeface="Cordia New"/>
-        <a:font script="Ethi" typeface="Nyala"/>
-        <a:font script="Beng" typeface="Vrinda"/>
-        <a:font script="Gujr" typeface="Shruti"/>
-        <a:font script="Khmr" typeface="DaunPenh"/>
-        <a:font script="Knda" typeface="Tunga"/>
-        <a:font script="Guru" typeface="Raavi"/>
-        <a:font script="Cans" typeface="Euphemia"/>
-        <a:font script="Cher" typeface="Plantagenet Cherokee"/>
-        <a:font script="Yiii" typeface="Microsoft Yi Baiti"/>
-        <a:font script="Tibt" typeface="Microsoft Himalaya"/>
-        <a:font script="Thaa" typeface="MV Boli"/>
-        <a:font script="Deva" typeface="Mangal"/>
-        <a:font script="Telu" typeface="Gautami"/>
-        <a:font script="Taml" typeface="Latha"/>
-        <a:font script="Syrc" typeface="Estrangelo Edessa"/>
-        <a:font script="Orya" typeface="Kalinga"/>
-        <a:font script="Mlym" typeface="Kartika"/>
-        <a:font script="Laoo" typeface="DokChampa"/>
-        <a:font script="Sinh" typeface="Iskoola Pota"/>
-        <a:font script="Mong" typeface="Mongolian Baiti"/>
-        <a:font script="Viet" typeface="Arial"/>
-        <a:font script="Uigh" typeface="Microsoft Uighur"/>
-        <a:font script="Geor" typeface="Sylfaen"/>
-        <a:font script="Armn" typeface="Arial"/>
-        <a:font script="Bugi" typeface="Leelawadee UI"/>
-        <a:font script="Bopo" typeface="Microsoft JhengHei"/>
-        <a:font script="Java" typeface="Javanese Text"/>
-        <a:font script="Lisu" typeface="Segoe UI"/>
-        <a:font script="Mymr" typeface="Myanmar Text"/>
-        <a:font script="Nkoo" typeface="Ebrima"/>
-        <a:font script="Olck" typeface="Nirmala UI"/>
-        <a:font script="Osma" typeface="Ebrima"/>
-        <a:font script="Phag" typeface="Phagspa"/>
-        <a:font script="Syrn" typeface="Estrangelo Edessa"/>
-        <a:font script="Syrj" typeface="Estrangelo Edessa"/>
-        <a:font script="Syre" typeface="Estrangelo Edessa"/>
-        <a:font script="Sora" typeface="Nirmala UI"/>
-        <a:font script="Tale" typeface="Microsoft Tai Le"/>
-        <a:font script="Talu" typeface="Microsoft New Tai Lue"/>
-        <a:font script="Tfng" typeface="Ebrima"/>
+        <a:latin typeface="Helvetica Neue Medium"/>
+        <a:ea typeface="Helvetica Neue Medium"/>
+        <a:cs typeface="Helvetica Neue Medium"/>
       </a:minorFont>
     </a:fontScheme>
     <a:fmtScheme name="Black">
@@ -8023,324 +8182,18 @@
 </a:theme>
 </file>
 
-<file path=ppt/theme/theme3.xml><?xml version="1.0" encoding="utf-8"?>
-<a:theme xmlns:a="http://schemas.openxmlformats.org/drawingml/2006/main" name="Office Theme">
-  <a:themeElements>
-    <a:clrScheme name="Office">
-      <a:dk1>
-        <a:sysClr val="windowText" lastClr="000000"/>
-      </a:dk1>
-      <a:lt1>
-        <a:sysClr val="window" lastClr="FFFFFF"/>
-      </a:lt1>
-      <a:dk2>
-        <a:srgbClr val="0E2841"/>
-      </a:dk2>
-      <a:lt2>
-        <a:srgbClr val="E8E8E8"/>
-      </a:lt2>
-      <a:accent1>
-        <a:srgbClr val="156082"/>
-      </a:accent1>
-      <a:accent2>
-        <a:srgbClr val="E97132"/>
-      </a:accent2>
-      <a:accent3>
-        <a:srgbClr val="196B24"/>
-      </a:accent3>
-      <a:accent4>
-        <a:srgbClr val="0F9ED5"/>
-      </a:accent4>
-      <a:accent5>
-        <a:srgbClr val="A02B93"/>
-      </a:accent5>
-      <a:accent6>
-        <a:srgbClr val="4EA72E"/>
-      </a:accent6>
-      <a:hlink>
-        <a:srgbClr val="467886"/>
-      </a:hlink>
-      <a:folHlink>
-        <a:srgbClr val="96607D"/>
-      </a:folHlink>
-    </a:clrScheme>
-    <a:fontScheme name="Office">
-      <a:majorFont>
-        <a:latin typeface="Aptos Display" panose="02110004020202020204"/>
-        <a:ea typeface=""/>
-        <a:cs typeface=""/>
-        <a:font script="Jpan" typeface="游ゴシック Light"/>
-        <a:font script="Hang" typeface="맑은 고딕"/>
-        <a:font script="Hans" typeface="等线 Light"/>
-        <a:font script="Hant" typeface="新細明體"/>
-        <a:font script="Arab" typeface="Times New Roman"/>
-        <a:font script="Hebr" typeface="Times New Roman"/>
-        <a:font script="Thai" typeface="Angsana New"/>
-        <a:font script="Ethi" typeface="Nyala"/>
-        <a:font script="Beng" typeface="Vrinda"/>
-        <a:font script="Gujr" typeface="Shruti"/>
-        <a:font script="Khmr" typeface="MoolBoran"/>
-        <a:font script="Knda" typeface="Tunga"/>
-        <a:font script="Guru" typeface="Raavi"/>
-        <a:font script="Cans" typeface="Euphemia"/>
-        <a:font script="Cher" typeface="Plantagenet Cherokee"/>
-        <a:font script="Yiii" typeface="Microsoft Yi Baiti"/>
-        <a:font script="Tibt" typeface="Microsoft Himalaya"/>
-        <a:font script="Thaa" typeface="MV Boli"/>
-        <a:font script="Deva" typeface="Mangal"/>
-        <a:font script="Telu" typeface="Gautami"/>
-        <a:font script="Taml" typeface="Latha"/>
-        <a:font script="Syrc" typeface="Estrangelo Edessa"/>
-        <a:font script="Orya" typeface="Kalinga"/>
-        <a:font script="Mlym" typeface="Kartika"/>
-        <a:font script="Laoo" typeface="DokChampa"/>
-        <a:font script="Sinh" typeface="Iskoola Pota"/>
-        <a:font script="Mong" typeface="Mongolian Baiti"/>
-        <a:font script="Viet" typeface="Times New Roman"/>
-        <a:font script="Uigh" typeface="Microsoft Uighur"/>
-        <a:font script="Geor" typeface="Sylfaen"/>
-        <a:font script="Armn" typeface="Arial"/>
-        <a:font script="Bugi" typeface="Leelawadee UI"/>
-        <a:font script="Bopo" typeface="Microsoft JhengHei"/>
-        <a:font script="Java" typeface="Javanese Text"/>
-        <a:font script="Lisu" typeface="Segoe UI"/>
-        <a:font script="Mymr" typeface="Myanmar Text"/>
-        <a:font script="Nkoo" typeface="Ebrima"/>
-        <a:font script="Olck" typeface="Nirmala UI"/>
-        <a:font script="Osma" typeface="Ebrima"/>
-        <a:font script="Phag" typeface="Phagspa"/>
-        <a:font script="Syrn" typeface="Estrangelo Edessa"/>
-        <a:font script="Syrj" typeface="Estrangelo Edessa"/>
-        <a:font script="Syre" typeface="Estrangelo Edessa"/>
-        <a:font script="Sora" typeface="Nirmala UI"/>
-        <a:font script="Tale" typeface="Microsoft Tai Le"/>
-        <a:font script="Talu" typeface="Microsoft New Tai Lue"/>
-        <a:font script="Tfng" typeface="Ebrima"/>
-      </a:majorFont>
-      <a:minorFont>
-        <a:latin typeface="Aptos" panose="02110004020202020204"/>
-        <a:ea typeface=""/>
-        <a:cs typeface=""/>
-        <a:font script="Jpan" typeface="游ゴシック"/>
-        <a:font script="Hang" typeface="맑은 고딕"/>
-        <a:font script="Hans" typeface="等线"/>
-        <a:font script="Hant" typeface="新細明體"/>
-        <a:font script="Arab" typeface="Arial"/>
-        <a:font script="Hebr" typeface="Arial"/>
-        <a:font script="Thai" typeface="Cordia New"/>
-        <a:font script="Ethi" typeface="Nyala"/>
-        <a:font script="Beng" typeface="Vrinda"/>
-        <a:font script="Gujr" typeface="Shruti"/>
-        <a:font script="Khmr" typeface="DaunPenh"/>
-        <a:font script="Knda" typeface="Tunga"/>
-        <a:font script="Guru" typeface="Raavi"/>
-        <a:font script="Cans" typeface="Euphemia"/>
-        <a:font script="Cher" typeface="Plantagenet Cherokee"/>
-        <a:font script="Yiii" typeface="Microsoft Yi Baiti"/>
-        <a:font script="Tibt" typeface="Microsoft Himalaya"/>
-        <a:font script="Thaa" typeface="MV Boli"/>
-        <a:font script="Deva" typeface="Mangal"/>
-        <a:font script="Telu" typeface="Gautami"/>
-        <a:font script="Taml" typeface="Latha"/>
-        <a:font script="Syrc" typeface="Estrangelo Edessa"/>
-        <a:font script="Orya" typeface="Kalinga"/>
-        <a:font script="Mlym" typeface="Kartika"/>
-        <a:font script="Laoo" typeface="DokChampa"/>
-        <a:font script="Sinh" typeface="Iskoola Pota"/>
-        <a:font script="Mong" typeface="Mongolian Baiti"/>
-        <a:font script="Viet" typeface="Arial"/>
-        <a:font script="Uigh" typeface="Microsoft Uighur"/>
-        <a:font script="Geor" typeface="Sylfaen"/>
-        <a:font script="Armn" typeface="Arial"/>
-        <a:font script="Bugi" typeface="Leelawadee UI"/>
-        <a:font script="Bopo" typeface="Microsoft JhengHei"/>
-        <a:font script="Java" typeface="Javanese Text"/>
-        <a:font script="Lisu" typeface="Segoe UI"/>
-        <a:font script="Mymr" typeface="Myanmar Text"/>
-        <a:font script="Nkoo" typeface="Ebrima"/>
-        <a:font script="Olck" typeface="Nirmala UI"/>
-        <a:font script="Osma" typeface="Ebrima"/>
-        <a:font script="Phag" typeface="Phagspa"/>
-        <a:font script="Syrn" typeface="Estrangelo Edessa"/>
-        <a:font script="Syrj" typeface="Estrangelo Edessa"/>
-        <a:font script="Syre" typeface="Estrangelo Edessa"/>
-        <a:font script="Sora" typeface="Nirmala UI"/>
-        <a:font script="Tale" typeface="Microsoft Tai Le"/>
-        <a:font script="Talu" typeface="Microsoft New Tai Lue"/>
-        <a:font script="Tfng" typeface="Ebrima"/>
-      </a:minorFont>
-    </a:fontScheme>
-    <a:fmtScheme name="Office">
-      <a:fillStyleLst>
-        <a:solidFill>
-          <a:schemeClr val="phClr"/>
-        </a:solidFill>
-        <a:gradFill rotWithShape="1">
-          <a:gsLst>
-            <a:gs pos="0">
-              <a:schemeClr val="phClr">
-                <a:lumMod val="110000"/>
-                <a:satMod val="105000"/>
-                <a:tint val="67000"/>
-              </a:schemeClr>
-            </a:gs>
-            <a:gs pos="50000">
-              <a:schemeClr val="phClr">
-                <a:lumMod val="105000"/>
-                <a:satMod val="103000"/>
-                <a:tint val="73000"/>
-              </a:schemeClr>
-            </a:gs>
-            <a:gs pos="100000">
-              <a:schemeClr val="phClr">
-                <a:lumMod val="105000"/>
-                <a:satMod val="109000"/>
-                <a:tint val="81000"/>
-              </a:schemeClr>
-            </a:gs>
-          </a:gsLst>
-          <a:lin ang="5400000" scaled="0"/>
-        </a:gradFill>
-        <a:gradFill rotWithShape="1">
-          <a:gsLst>
-            <a:gs pos="0">
-              <a:schemeClr val="phClr">
-                <a:satMod val="103000"/>
-                <a:lumMod val="102000"/>
-                <a:tint val="94000"/>
-              </a:schemeClr>
-            </a:gs>
-            <a:gs pos="50000">
-              <a:schemeClr val="phClr">
-                <a:satMod val="110000"/>
-                <a:lumMod val="100000"/>
-                <a:shade val="100000"/>
-              </a:schemeClr>
-            </a:gs>
-            <a:gs pos="100000">
-              <a:schemeClr val="phClr">
-                <a:lumMod val="99000"/>
-                <a:satMod val="120000"/>
-                <a:shade val="78000"/>
-              </a:schemeClr>
-            </a:gs>
-          </a:gsLst>
-          <a:lin ang="5400000" scaled="0"/>
-        </a:gradFill>
-      </a:fillStyleLst>
-      <a:lnStyleLst>
-        <a:ln w="12700" cap="flat" cmpd="sng" algn="ctr">
-          <a:solidFill>
-            <a:schemeClr val="phClr"/>
-          </a:solidFill>
-          <a:prstDash val="solid"/>
-          <a:miter lim="800000"/>
-        </a:ln>
-        <a:ln w="19050" cap="flat" cmpd="sng" algn="ctr">
-          <a:solidFill>
-            <a:schemeClr val="phClr"/>
-          </a:solidFill>
-          <a:prstDash val="solid"/>
-          <a:miter lim="800000"/>
-        </a:ln>
-        <a:ln w="25400" cap="flat" cmpd="sng" algn="ctr">
-          <a:solidFill>
-            <a:schemeClr val="phClr"/>
-          </a:solidFill>
-          <a:prstDash val="solid"/>
-          <a:miter lim="800000"/>
-        </a:ln>
-      </a:lnStyleLst>
-      <a:effectStyleLst>
-        <a:effectStyle>
-          <a:effectLst/>
-        </a:effectStyle>
-        <a:effectStyle>
-          <a:effectLst/>
-        </a:effectStyle>
-        <a:effectStyle>
-          <a:effectLst>
-            <a:outerShdw blurRad="57150" dist="19050" dir="5400000" algn="ctr" rotWithShape="0">
-              <a:srgbClr val="000000">
-                <a:alpha val="63000"/>
-              </a:srgbClr>
-            </a:outerShdw>
-          </a:effectLst>
-        </a:effectStyle>
-      </a:effectStyleLst>
-      <a:bgFillStyleLst>
-        <a:solidFill>
-          <a:schemeClr val="phClr"/>
-        </a:solidFill>
-        <a:solidFill>
-          <a:schemeClr val="phClr">
-            <a:tint val="95000"/>
-            <a:satMod val="170000"/>
-          </a:schemeClr>
-        </a:solidFill>
-        <a:gradFill rotWithShape="1">
-          <a:gsLst>
-            <a:gs pos="0">
-              <a:schemeClr val="phClr">
-                <a:tint val="93000"/>
-                <a:satMod val="150000"/>
-                <a:shade val="98000"/>
-                <a:lumMod val="102000"/>
-              </a:schemeClr>
-            </a:gs>
-            <a:gs pos="50000">
-              <a:schemeClr val="phClr">
-                <a:tint val="98000"/>
-                <a:satMod val="130000"/>
-                <a:shade val="90000"/>
-                <a:lumMod val="103000"/>
-              </a:schemeClr>
-            </a:gs>
-            <a:gs pos="100000">
-              <a:schemeClr val="phClr">
-                <a:shade val="63000"/>
-                <a:satMod val="120000"/>
-              </a:schemeClr>
-            </a:gs>
-          </a:gsLst>
-          <a:lin ang="5400000" scaled="0"/>
-        </a:gradFill>
-      </a:bgFillStyleLst>
-    </a:fmtScheme>
-  </a:themeElements>
-  <a:objectDefaults>
-    <a:lnDef>
-      <a:spPr/>
-      <a:bodyPr/>
-      <a:lstStyle/>
-      <a:style>
-        <a:lnRef idx="2">
-          <a:schemeClr val="accent1"/>
-        </a:lnRef>
-        <a:fillRef idx="0">
-          <a:schemeClr val="accent1"/>
-        </a:fillRef>
-        <a:effectRef idx="1">
-          <a:schemeClr val="accent1"/>
-        </a:effectRef>
-        <a:fontRef idx="minor">
-          <a:schemeClr val="tx1"/>
-        </a:fontRef>
-      </a:style>
-    </a:lnDef>
-  </a:objectDefaults>
-  <a:extraClrSchemeLst/>
-  <a:extLst>
-    <a:ext uri="{05A4C25C-085E-4340-85A3-A5531E510DB2}">
-      <thm15:themeFamily xmlns:thm15="http://schemas.microsoft.com/office/thememl/2012/main" name="Office Theme" id="{2E142A2C-CD16-42D6-873A-C26D2A0506FA}" vid="{1BDDFF52-6CD6-40A5-AB3C-68EB2F1E4D0A}"/>
-    </a:ext>
-  </a:extLst>
-</a:theme>
+<file path=customXml/item1.xml><?xml version="1.0" encoding="utf-8"?>
+<?mso-contentType ?>
+<FormTemplates xmlns="http://schemas.microsoft.com/sharepoint/v3/contenttype/forms">
+  <Display>DocumentLibraryForm</Display>
+  <Edit>DocumentLibraryForm</Edit>
+  <New>DocumentLibraryForm</New>
+</FormTemplates>
 </file>
 
-<file path=customXml/item1.xml><?xml version="1.0" encoding="utf-8"?>
-<ct:contentTypeSchema xmlns:ct="http://schemas.microsoft.com/office/2006/metadata/contentType" xmlns:ma="http://schemas.microsoft.com/office/2006/metadata/properties/metaAttributes" ct:_="" ma:_="" ma:contentTypeName="Document" ma:contentTypeID="0x010100C8D000A7A8EA4549909635EE44265AE2" ma:contentTypeVersion="12" ma:contentTypeDescription="Create a new document." ma:contentTypeScope="" ma:versionID="7f357fbe57b84af1bdddcd22c912bac7">
-  <xsd:schema xmlns:xsd="http://www.w3.org/2001/XMLSchema" xmlns:xs="http://www.w3.org/2001/XMLSchema" xmlns:p="http://schemas.microsoft.com/office/2006/metadata/properties" xmlns:ns2="baa02956-e5b0-401a-adb6-d3ab856a8db1" xmlns:ns3="758526ea-ff42-49f4-966e-8b92dfb8c37c" targetNamespace="http://schemas.microsoft.com/office/2006/metadata/properties" ma:root="true" ma:fieldsID="f01aca49933565aaf8490f47588de525" ns2:_="" ns3:_="">
+<file path=customXml/item2.xml><?xml version="1.0" encoding="utf-8"?>
+<ct:contentTypeSchema xmlns:ct="http://schemas.microsoft.com/office/2006/metadata/contentType" xmlns:ma="http://schemas.microsoft.com/office/2006/metadata/properties/metaAttributes" ct:_="" ma:_="" ma:contentTypeName="Document" ma:contentTypeID="0x010100C8D000A7A8EA4549909635EE44265AE2" ma:contentTypeVersion="13" ma:contentTypeDescription="Create a new document." ma:contentTypeScope="" ma:versionID="3e99c277a4cff653c7ca801b490509d6">
+  <xsd:schema xmlns:xsd="http://www.w3.org/2001/XMLSchema" xmlns:xs="http://www.w3.org/2001/XMLSchema" xmlns:p="http://schemas.microsoft.com/office/2006/metadata/properties" xmlns:ns2="baa02956-e5b0-401a-adb6-d3ab856a8db1" xmlns:ns3="758526ea-ff42-49f4-966e-8b92dfb8c37c" targetNamespace="http://schemas.microsoft.com/office/2006/metadata/properties" ma:root="true" ma:fieldsID="f8980faefb1a78813b0f4bf74c4510fe" ns2:_="" ns3:_="">
     <xsd:import namespace="baa02956-e5b0-401a-adb6-d3ab856a8db1"/>
     <xsd:import namespace="758526ea-ff42-49f4-966e-8b92dfb8c37c"/>
     <xsd:element name="properties">
@@ -8360,6 +8213,7 @@
                 <xsd:element ref="ns2:lcf76f155ced4ddcb4097134ff3c332f" minOccurs="0"/>
                 <xsd:element ref="ns3:TaxCatchAll" minOccurs="0"/>
                 <xsd:element ref="ns2:MediaServiceOCR" minOccurs="0"/>
+                <xsd:element ref="ns2:MediaServiceLocation" minOccurs="0"/>
               </xsd:all>
             </xsd:complexType>
           </xsd:element>
@@ -8422,6 +8276,11 @@
         <xsd:restriction base="dms:Note">
           <xsd:maxLength value="255"/>
         </xsd:restriction>
+      </xsd:simpleType>
+    </xsd:element>
+    <xsd:element name="MediaServiceLocation" ma:index="20" nillable="true" ma:displayName="Location" ma:description="" ma:indexed="true" ma:internalName="MediaServiceLocation" ma:readOnly="true">
+      <xsd:simpleType>
+        <xsd:restriction base="dms:Text"/>
       </xsd:simpleType>
     </xsd:element>
   </xsd:schema>
@@ -8539,15 +8398,6 @@
 </ct:contentTypeSchema>
 </file>
 
-<file path=customXml/item2.xml><?xml version="1.0" encoding="utf-8"?>
-<?mso-contentType ?>
-<FormTemplates xmlns="http://schemas.microsoft.com/sharepoint/v3/contenttype/forms">
-  <Display>DocumentLibraryForm</Display>
-  <Edit>DocumentLibraryForm</Edit>
-  <New>DocumentLibraryForm</New>
-</FormTemplates>
-</file>
-
 <file path=customXml/item3.xml><?xml version="1.0" encoding="utf-8"?>
 <p:properties xmlns:p="http://schemas.microsoft.com/office/2006/metadata/properties" xmlns:xsi="http://www.w3.org/2001/XMLSchema-instance" xmlns:pc="http://schemas.microsoft.com/office/infopath/2007/PartnerControls">
   <documentManagement>
@@ -8560,25 +8410,6 @@
 </file>
 
 <file path=customXml/itemProps1.xml><?xml version="1.0" encoding="utf-8"?>
-<ds:datastoreItem xmlns:ds="http://schemas.openxmlformats.org/officeDocument/2006/customXml" ds:itemID="{0A62184A-FEE7-42AA-86BE-4760650221E9}">
-  <ds:schemaRefs>
-    <ds:schemaRef ds:uri="758526ea-ff42-49f4-966e-8b92dfb8c37c"/>
-    <ds:schemaRef ds:uri="baa02956-e5b0-401a-adb6-d3ab856a8db1"/>
-    <ds:schemaRef ds:uri="http://purl.org/dc/elements/1.1/"/>
-    <ds:schemaRef ds:uri="http://purl.org/dc/terms/"/>
-    <ds:schemaRef ds:uri="http://schemas.microsoft.com/internal/obd"/>
-    <ds:schemaRef ds:uri="http://schemas.microsoft.com/office/2006/documentManagement/types"/>
-    <ds:schemaRef ds:uri="http://schemas.microsoft.com/office/2006/metadata/contentType"/>
-    <ds:schemaRef ds:uri="http://schemas.microsoft.com/office/2006/metadata/properties"/>
-    <ds:schemaRef ds:uri="http://schemas.microsoft.com/office/2006/metadata/properties/metaAttributes"/>
-    <ds:schemaRef ds:uri="http://schemas.microsoft.com/office/infopath/2007/PartnerControls"/>
-    <ds:schemaRef ds:uri="http://schemas.openxmlformats.org/package/2006/metadata/core-properties"/>
-    <ds:schemaRef ds:uri="http://www.w3.org/2001/XMLSchema"/>
-  </ds:schemaRefs>
-</ds:datastoreItem>
-</file>
-
-<file path=customXml/itemProps2.xml><?xml version="1.0" encoding="utf-8"?>
 <ds:datastoreItem xmlns:ds="http://schemas.openxmlformats.org/officeDocument/2006/customXml" ds:itemID="{F04B941D-E84F-47C8-84C7-8C66135B4CA1}">
   <ds:schemaRefs>
     <ds:schemaRef ds:uri="http://schemas.microsoft.com/sharepoint/v3/contenttype/forms"/>
@@ -8586,19 +8417,38 @@
 </ds:datastoreItem>
 </file>
 
+<file path=customXml/itemProps2.xml><?xml version="1.0" encoding="utf-8"?>
+<ds:datastoreItem xmlns:ds="http://schemas.openxmlformats.org/officeDocument/2006/customXml" ds:itemID="{D16B4051-D07F-4901-8E6D-4A2706167496}">
+  <ds:schemaRefs>
+    <ds:schemaRef ds:uri="http://schemas.microsoft.com/office/2006/metadata/contentType"/>
+    <ds:schemaRef ds:uri="http://schemas.microsoft.com/office/2006/metadata/properties/metaAttributes"/>
+    <ds:schemaRef ds:uri="http://www.w3.org/2001/XMLSchema"/>
+    <ds:schemaRef ds:uri="http://schemas.microsoft.com/office/2006/metadata/properties"/>
+    <ds:schemaRef ds:uri="baa02956-e5b0-401a-adb6-d3ab856a8db1"/>
+    <ds:schemaRef ds:uri="758526ea-ff42-49f4-966e-8b92dfb8c37c"/>
+    <ds:schemaRef ds:uri="http://schemas.microsoft.com/office/2006/documentManagement/types"/>
+    <ds:schemaRef ds:uri="http://schemas.microsoft.com/office/infopath/2007/PartnerControls"/>
+    <ds:schemaRef ds:uri="http://schemas.openxmlformats.org/package/2006/metadata/core-properties"/>
+    <ds:schemaRef ds:uri="http://purl.org/dc/elements/1.1/"/>
+    <ds:schemaRef ds:uri="http://purl.org/dc/terms/"/>
+    <ds:schemaRef ds:uri="http://schemas.microsoft.com/internal/obd"/>
+  </ds:schemaRefs>
+</ds:datastoreItem>
+</file>
+
 <file path=customXml/itemProps3.xml><?xml version="1.0" encoding="utf-8"?>
 <ds:datastoreItem xmlns:ds="http://schemas.openxmlformats.org/officeDocument/2006/customXml" ds:itemID="{B517E194-3F2D-4BC4-9EAF-A0569BAF4335}">
   <ds:schemaRefs>
+    <ds:schemaRef ds:uri="http://purl.org/dc/dcmitype/"/>
+    <ds:schemaRef ds:uri="758526ea-ff42-49f4-966e-8b92dfb8c37c"/>
+    <ds:schemaRef ds:uri="http://www.w3.org/XML/1998/namespace"/>
+    <ds:schemaRef ds:uri="http://schemas.microsoft.com/office/2006/documentManagement/types"/>
+    <ds:schemaRef ds:uri="http://schemas.microsoft.com/office/infopath/2007/PartnerControls"/>
+    <ds:schemaRef ds:uri="http://purl.org/dc/elements/1.1/"/>
     <ds:schemaRef ds:uri="baa02956-e5b0-401a-adb6-d3ab856a8db1"/>
-    <ds:schemaRef ds:uri="http://purl.org/dc/elements/1.1/"/>
     <ds:schemaRef ds:uri="http://schemas.openxmlformats.org/package/2006/metadata/core-properties"/>
-    <ds:schemaRef ds:uri="http://schemas.microsoft.com/office/2006/documentManagement/types"/>
-    <ds:schemaRef ds:uri="758526ea-ff42-49f4-966e-8b92dfb8c37c"/>
+    <ds:schemaRef ds:uri="http://schemas.microsoft.com/office/2006/metadata/properties"/>
     <ds:schemaRef ds:uri="http://purl.org/dc/terms/"/>
-    <ds:schemaRef ds:uri="http://www.w3.org/XML/1998/namespace"/>
-    <ds:schemaRef ds:uri="http://schemas.microsoft.com/office/2006/metadata/properties"/>
-    <ds:schemaRef ds:uri="http://schemas.microsoft.com/office/infopath/2007/PartnerControls"/>
-    <ds:schemaRef ds:uri="http://purl.org/dc/dcmitype/"/>
   </ds:schemaRefs>
 </ds:datastoreItem>
 </file>
--- a/.claude/skills/presentation/templates/cellularintelligence.pptx
+++ b/.claude/skills/presentation/templates/cellularintelligence.pptx
@@ -5,10 +5,10 @@
     <p:sldMasterId id="2147483648" r:id="rId4"/>
   </p:sldMasterIdLst>
   <p:notesMasterIdLst>
-    <p:notesMasterId r:id="rId18"/>
+    <p:notesMasterId r:id="rId6"/>
   </p:notesMasterIdLst>
   <p:sldIdLst>
-    <p:sldId id="256" r:id="rId12"/>
+    <p:sldId id="256" r:id="rId5"/>
   </p:sldIdLst>
   <p:sldSz cx="12192000" cy="6858000"/>
   <p:notesSz cx="6858000" cy="9144000"/>
@@ -589,7 +589,7 @@
             <a:spLocks noGrp="1"/>
           </p:cNvSpPr>
           <p:nvPr>
-            <p:ph type="body" sz="quarter" idx="1"/>
+            <p:ph type="body" sz="quarter" idx="1" hasCustomPrompt="1"/>
           </p:nvPr>
         </p:nvSpPr>
         <p:spPr>
@@ -620,7 +620,7 @@
               <a:buClrTx/>
               <a:buSzTx/>
               <a:buNone/>
-              <a:defRPr sz="2700"/>
+              <a:defRPr sz="2400"/>
             </a:lvl2pPr>
             <a:lvl3pPr marL="0" indent="0" algn="ctr">
               <a:spcBef>
@@ -652,31 +652,15 @@
           </a:lstStyle>
           <a:p>
             <a:r>
+              <a:rPr dirty="0"/>
               <a:t>Body Level One</a:t>
             </a:r>
           </a:p>
           <a:p>
             <a:pPr lvl="1"/>
             <a:r>
+              <a:rPr dirty="0"/>
               <a:t>Body Level Two</a:t>
-            </a:r>
-          </a:p>
-          <a:p>
-            <a:pPr lvl="2"/>
-            <a:r>
-              <a:t>Body Level Three</a:t>
-            </a:r>
-          </a:p>
-          <a:p>
-            <a:pPr lvl="3"/>
-            <a:r>
-              <a:t>Body Level Four</a:t>
-            </a:r>
-          </a:p>
-          <a:p>
-            <a:pPr lvl="4"/>
-            <a:r>
-              <a:t>Body Level Five</a:t>
             </a:r>
           </a:p>
         </p:txBody>
@@ -1162,7 +1146,7 @@
             <a:fld id="{FB2935F8-297A-F844-8555-D6E4631F7E59}" type="datetimeFigureOut">
               <a:rPr lang="en-US" smtClean="0"/>
               <a:pPr/>
-              <a:t>1/29/26</a:t>
+              <a:t>1/30/26</a:t>
             </a:fld>
             <a:endParaRPr lang="en-US"/>
           </a:p>
@@ -1965,7 +1949,7 @@
             <a:fld id="{FB2935F8-297A-F844-8555-D6E4631F7E59}" type="datetimeFigureOut">
               <a:rPr lang="en-US" smtClean="0"/>
               <a:pPr/>
-              <a:t>1/29/26</a:t>
+              <a:t>1/30/26</a:t>
             </a:fld>
             <a:endParaRPr lang="en-US"/>
           </a:p>
@@ -2597,31 +2581,22 @@
           </a:lstStyle>
           <a:p>
             <a:r>
+              <a:rPr dirty="0"/>
               <a:t>Body Level One</a:t>
             </a:r>
           </a:p>
           <a:p>
             <a:pPr lvl="1"/>
             <a:r>
+              <a:rPr dirty="0"/>
               <a:t>Body Level Two</a:t>
             </a:r>
           </a:p>
           <a:p>
             <a:pPr lvl="2"/>
             <a:r>
+              <a:rPr dirty="0"/>
               <a:t>Body Level Three</a:t>
-            </a:r>
-          </a:p>
-          <a:p>
-            <a:pPr lvl="3"/>
-            <a:r>
-              <a:t>Body Level Four</a:t>
-            </a:r>
-          </a:p>
-          <a:p>
-            <a:pPr lvl="4"/>
-            <a:r>
-              <a:t>Body Level Five</a:t>
             </a:r>
           </a:p>
         </p:txBody>
@@ -2853,31 +2828,22 @@
           </a:lstStyle>
           <a:p>
             <a:r>
+              <a:rPr dirty="0"/>
               <a:t>Body Level One</a:t>
             </a:r>
           </a:p>
           <a:p>
             <a:pPr lvl="1"/>
             <a:r>
+              <a:rPr dirty="0"/>
               <a:t>Body Level Two</a:t>
             </a:r>
           </a:p>
           <a:p>
             <a:pPr lvl="2"/>
             <a:r>
+              <a:rPr dirty="0"/>
               <a:t>Body Level Three</a:t>
-            </a:r>
-          </a:p>
-          <a:p>
-            <a:pPr lvl="3"/>
-            <a:r>
-              <a:t>Body Level Four</a:t>
-            </a:r>
-          </a:p>
-          <a:p>
-            <a:pPr lvl="4"/>
-            <a:r>
-              <a:t>Body Level Five</a:t>
             </a:r>
           </a:p>
         </p:txBody>
@@ -3000,7 +2966,7 @@
             <a:spLocks noGrp="1"/>
           </p:cNvSpPr>
           <p:nvPr>
-            <p:ph type="body" sz="half" idx="1"/>
+            <p:ph type="body" sz="half" idx="1" hasCustomPrompt="1"/>
           </p:nvPr>
         </p:nvSpPr>
         <p:spPr>
@@ -3053,31 +3019,22 @@
           </a:lstStyle>
           <a:p>
             <a:r>
+              <a:rPr dirty="0"/>
               <a:t>Body Level One</a:t>
             </a:r>
           </a:p>
           <a:p>
             <a:pPr lvl="1"/>
             <a:r>
+              <a:rPr dirty="0"/>
               <a:t>Body Level Two</a:t>
             </a:r>
           </a:p>
           <a:p>
             <a:pPr lvl="2"/>
             <a:r>
+              <a:rPr dirty="0"/>
               <a:t>Body Level Three</a:t>
-            </a:r>
-          </a:p>
-          <a:p>
-            <a:pPr lvl="3"/>
-            <a:r>
-              <a:t>Body Level Four</a:t>
-            </a:r>
-          </a:p>
-          <a:p>
-            <a:pPr lvl="4"/>
-            <a:r>
-              <a:t>Body Level Five</a:t>
             </a:r>
           </a:p>
         </p:txBody>
@@ -3782,7 +3739,7 @@
             <a:fld id="{FB2935F8-297A-F844-8555-D6E4631F7E59}" type="datetimeFigureOut">
               <a:rPr lang="en-US" smtClean="0"/>
               <a:pPr/>
-              <a:t>1/29/26</a:t>
+              <a:t>1/30/26</a:t>
             </a:fld>
             <a:endParaRPr lang="en-US"/>
           </a:p>
@@ -4592,7 +4549,7 @@
             <a:fld id="{FB2935F8-297A-F844-8555-D6E4631F7E59}" type="datetimeFigureOut">
               <a:rPr lang="en-US" smtClean="0"/>
               <a:pPr/>
-              <a:t>1/29/26</a:t>
+              <a:t>1/30/26</a:t>
             </a:fld>
             <a:endParaRPr lang="en-US"/>
           </a:p>
@@ -5068,7 +5025,7 @@
         <p:spPr>
           <a:xfrm>
             <a:off x="386899" y="386899"/>
-            <a:ext cx="10502900" cy="603701"/>
+            <a:ext cx="11512296" cy="603701"/>
           </a:xfrm>
           <a:prstGeom prst="rect">
             <a:avLst/>
@@ -5078,7 +5035,7 @@
           </a:ln>
           <a:extLst>
             <a:ext uri="{C572A759-6A51-4108-AA02-DFA0A04FC94B}">
-              <ma14:wrappingTextBoxFlag xmlns="" xmlns:ma14="http://schemas.microsoft.com/office/mac/drawingml/2011/main" xmlns:a14="http://schemas.microsoft.com/office/drawing/2010/main" xmlns:m="http://schemas.openxmlformats.org/officeDocument/2006/math" val="1"/>
+              <ma14:wrappingTextBoxFlag xmlns:m="http://schemas.openxmlformats.org/officeDocument/2006/math" xmlns:a14="http://schemas.microsoft.com/office/drawing/2010/main" xmlns:ma14="http://schemas.microsoft.com/office/mac/drawingml/2011/main" xmlns="" val="1"/>
             </a:ext>
           </a:extLst>
         </p:spPr>
@@ -5107,7 +5064,7 @@
         <p:spPr>
           <a:xfrm>
             <a:off x="387391" y="1510234"/>
-            <a:ext cx="10502900" cy="4648200"/>
+            <a:ext cx="11512296" cy="4648200"/>
           </a:xfrm>
           <a:prstGeom prst="rect">
             <a:avLst/>
@@ -5117,7 +5074,7 @@
           </a:ln>
           <a:extLst>
             <a:ext uri="{C572A759-6A51-4108-AA02-DFA0A04FC94B}">
-              <ma14:wrappingTextBoxFlag xmlns="" xmlns:ma14="http://schemas.microsoft.com/office/mac/drawingml/2011/main" xmlns:a14="http://schemas.microsoft.com/office/drawing/2010/main" xmlns:m="http://schemas.openxmlformats.org/officeDocument/2006/math" val="1"/>
+              <ma14:wrappingTextBoxFlag xmlns:m="http://schemas.openxmlformats.org/officeDocument/2006/math" xmlns:a14="http://schemas.microsoft.com/office/drawing/2010/main" xmlns:ma14="http://schemas.microsoft.com/office/mac/drawingml/2011/main" xmlns="" val="1"/>
             </a:ext>
           </a:extLst>
         </p:spPr>
@@ -5128,31 +5085,22 @@
           <a:lstStyle/>
           <a:p>
             <a:r>
+              <a:rPr dirty="0"/>
               <a:t>Body Level One</a:t>
             </a:r>
           </a:p>
           <a:p>
             <a:pPr lvl="1"/>
             <a:r>
+              <a:rPr dirty="0"/>
               <a:t>Body Level Two</a:t>
             </a:r>
           </a:p>
           <a:p>
             <a:pPr lvl="2"/>
             <a:r>
+              <a:rPr dirty="0"/>
               <a:t>Body Level Three</a:t>
-            </a:r>
-          </a:p>
-          <a:p>
-            <a:pPr lvl="3"/>
-            <a:r>
-              <a:t>Body Level Four</a:t>
-            </a:r>
-          </a:p>
-          <a:p>
-            <a:pPr lvl="4"/>
-            <a:r>
-              <a:t>Body Level Five</a:t>
             </a:r>
           </a:p>
         </p:txBody>
@@ -5204,6 +5152,119 @@
           </a:p>
         </p:txBody>
       </p:sp>
+      <p:pic>
+        <p:nvPicPr>
+          <p:cNvPr id="5" name="Picture 4">
+            <a:extLst>
+              <a:ext uri="{FF2B5EF4-FFF2-40B4-BE49-F238E27FC236}">
+                <a16:creationId xmlns:a16="http://schemas.microsoft.com/office/drawing/2014/main" id="{E0DEBFD5-D320-7EDD-0B4A-A06E38C2C749}"/>
+              </a:ext>
+            </a:extLst>
+          </p:cNvPr>
+          <p:cNvPicPr>
+            <a:picLocks noChangeAspect="1"/>
+          </p:cNvPicPr>
+          <p:nvPr userDrawn="1"/>
+        </p:nvPicPr>
+        <p:blipFill>
+          <a:blip r:embed="rId13"/>
+          <a:srcRect l="4356" t="11145" r="84944" b="51846"/>
+          <a:stretch>
+            <a:fillRect/>
+          </a:stretch>
+        </p:blipFill>
+        <p:spPr>
+          <a:xfrm>
+            <a:off x="0" y="6540500"/>
+            <a:ext cx="422275" cy="289375"/>
+          </a:xfrm>
+          <a:prstGeom prst="rect">
+            <a:avLst/>
+          </a:prstGeom>
+        </p:spPr>
+      </p:pic>
+      <p:sp>
+        <p:nvSpPr>
+          <p:cNvPr id="6" name="TextBox 5">
+            <a:extLst>
+              <a:ext uri="{FF2B5EF4-FFF2-40B4-BE49-F238E27FC236}">
+                <a16:creationId xmlns:a16="http://schemas.microsoft.com/office/drawing/2014/main" id="{58D56D1E-9A96-8A76-600E-5585649ABD52}"/>
+              </a:ext>
+            </a:extLst>
+          </p:cNvPr>
+          <p:cNvSpPr txBox="1"/>
+          <p:nvPr userDrawn="1"/>
+        </p:nvSpPr>
+        <p:spPr>
+          <a:xfrm>
+            <a:off x="11150048" y="0"/>
+            <a:ext cx="1041952" cy="256480"/>
+          </a:xfrm>
+          <a:prstGeom prst="rect">
+            <a:avLst/>
+          </a:prstGeom>
+          <a:noFill/>
+          <a:ln w="12700" cap="flat">
+            <a:noFill/>
+            <a:miter lim="400000"/>
+          </a:ln>
+          <a:effectLst/>
+          <a:sp3d/>
+        </p:spPr>
+        <p:style>
+          <a:lnRef idx="0">
+            <a:scrgbClr r="0" g="0" b="0"/>
+          </a:lnRef>
+          <a:fillRef idx="0">
+            <a:scrgbClr r="0" g="0" b="0"/>
+          </a:fillRef>
+          <a:effectRef idx="0">
+            <a:scrgbClr r="0" g="0" b="0"/>
+          </a:effectRef>
+          <a:fontRef idx="none"/>
+        </p:style>
+        <p:txBody>
+          <a:bodyPr rot="0" spcFirstLastPara="1" vertOverflow="overflow" horzOverflow="overflow" vert="horz" wrap="none" lIns="50800" tIns="50800" rIns="50800" bIns="50800" numCol="1" spcCol="38100" rtlCol="0" anchor="ctr">
+            <a:spAutoFit/>
+          </a:bodyPr>
+          <a:lstStyle/>
+          <a:p>
+            <a:pPr marL="0" marR="0" indent="0" algn="l" defTabSz="825500" rtl="0" fontAlgn="auto" latinLnBrk="0" hangingPunct="0">
+              <a:lnSpc>
+                <a:spcPct val="100000"/>
+              </a:lnSpc>
+              <a:spcBef>
+                <a:spcPts val="0"/>
+              </a:spcBef>
+              <a:spcAft>
+                <a:spcPts val="0"/>
+              </a:spcAft>
+              <a:buClrTx/>
+              <a:buSzTx/>
+              <a:buFontTx/>
+              <a:buNone/>
+              <a:tabLst/>
+            </a:pPr>
+            <a:r>
+              <a:rPr kumimoji="0" lang="en-US" sz="1000" b="0" i="1" u="none" strike="noStrike" cap="none" spc="0" normalizeH="0" baseline="0" dirty="0">
+                <a:ln>
+                  <a:noFill/>
+                </a:ln>
+                <a:solidFill>
+                  <a:srgbClr val="FFFFFF"/>
+                </a:solidFill>
+                <a:effectLst/>
+                <a:uFillTx/>
+                <a:latin typeface="Helvetica Neue"/>
+                <a:ea typeface="Helvetica Neue"/>
+                <a:cs typeface="Helvetica Neue"/>
+                <a:sym typeface="Helvetica Neue"/>
+              </a:rPr>
+              <a:t>CONFIDENTIAL</a:t>
+            </a:r>
+          </a:p>
+        </p:txBody>
+      </p:sp>
     </p:spTree>
   </p:cSld>
   <p:clrMap bg1="dk1" tx1="lt1" bg2="dk2" tx2="lt2" accent1="accent1" accent2="accent2" accent3="accent3" accent4="accent4" accent5="accent5" accent6="accent6" hlink="hlink" folHlink="folHlink"/>
@@ -5214,11 +5275,11 @@
     <p:sldLayoutId id="2147483664" r:id="rId4"/>
     <p:sldLayoutId id="2147483655" r:id="rId5"/>
     <p:sldLayoutId id="2147483662" r:id="rId6"/>
-    <p:sldLayoutId id="2147483665" r:id="rId8"/>
-    <p:sldLayoutId id="2147483666" r:id="rId9"/>
-    <p:sldLayoutId id="2147483667" r:id="rId10"/>
-    <p:sldLayoutId id="2147483668" r:id="rId11"/>
-    <p:sldLayoutId id="2147483669" r:id="rId12"/>
+    <p:sldLayoutId id="2147483665" r:id="rId7"/>
+    <p:sldLayoutId id="2147483666" r:id="rId8"/>
+    <p:sldLayoutId id="2147483667" r:id="rId9"/>
+    <p:sldLayoutId id="2147483668" r:id="rId10"/>
+    <p:sldLayoutId id="2147483669" r:id="rId11"/>
   </p:sldLayoutIdLst>
   <p:transition spd="med"/>
   <p:txStyles>
@@ -5464,7 +5525,7 @@
           <a:spcPct val="100000"/>
         </a:lnSpc>
         <a:spcBef>
-          <a:spcPts val="2950"/>
+          <a:spcPts val="1200"/>
         </a:spcBef>
         <a:spcAft>
           <a:spcPts val="0"/>
@@ -5492,7 +5553,7 @@
           <a:spcPct val="100000"/>
         </a:lnSpc>
         <a:spcBef>
-          <a:spcPts val="2950"/>
+          <a:spcPts val="1200"/>
         </a:spcBef>
         <a:spcAft>
           <a:spcPts val="0"/>
@@ -5520,7 +5581,7 @@
           <a:spcPct val="100000"/>
         </a:lnSpc>
         <a:spcBef>
-          <a:spcPts val="2950"/>
+          <a:spcPts val="1200"/>
         </a:spcBef>
         <a:spcAft>
           <a:spcPts val="0"/>
@@ -5548,7 +5609,7 @@
           <a:spcPct val="100000"/>
         </a:lnSpc>
         <a:spcBef>
-          <a:spcPts val="2950"/>
+          <a:spcPts val="1200"/>
         </a:spcBef>
         <a:spcAft>
           <a:spcPts val="0"/>
@@ -5576,7 +5637,7 @@
           <a:spcPct val="100000"/>
         </a:lnSpc>
         <a:spcBef>
-          <a:spcPts val="2950"/>
+          <a:spcPts val="1200"/>
         </a:spcBef>
         <a:spcAft>
           <a:spcPts val="0"/>
@@ -5979,7 +6040,7 @@
 </file>
 
 <file path=ppt/slides/slide1.xml><?xml version="1.0" encoding="utf-8"?>
-<p:sld xmlns:a="http://schemas.openxmlformats.org/drawingml/2006/main" xmlns:p="http://schemas.openxmlformats.org/presentationml/2006/main" xmlns:r="http://schemas.openxmlformats.org/officeDocument/2006/relationships">
+<p:sld xmlns:a="http://schemas.openxmlformats.org/drawingml/2006/main" xmlns:r="http://schemas.openxmlformats.org/officeDocument/2006/relationships" xmlns:p="http://schemas.openxmlformats.org/presentationml/2006/main">
   <p:cSld>
     <p:spTree>
       <p:nvGrpSpPr>
@@ -5987,7 +6048,14 @@
         <p:cNvGrpSpPr/>
         <p:nvPr/>
       </p:nvGrpSpPr>
-      <p:grpSpPr/>
+      <p:grpSpPr>
+        <a:xfrm>
+          <a:off x="0" y="0"/>
+          <a:ext cx="0" cy="0"/>
+          <a:chOff x="0" y="0"/>
+          <a:chExt cx="0" cy="0"/>
+        </a:xfrm>
+      </p:grpSpPr>
       <p:sp>
         <p:nvSpPr>
           <p:cNvPr id="2" name="Title 1"/>
@@ -6016,7 +6084,7 @@
             <a:spLocks noGrp="1"/>
           </p:cNvSpPr>
           <p:nvPr>
-            <p:ph type="body" idx="1" sz="quarter"/>
+            <p:ph type="body" sz="quarter" idx="1"/>
           </p:nvPr>
         </p:nvSpPr>
         <p:spPr/>
@@ -8183,12 +8251,14 @@
 </file>
 
 <file path=customXml/item1.xml><?xml version="1.0" encoding="utf-8"?>
-<?mso-contentType ?>
-<FormTemplates xmlns="http://schemas.microsoft.com/sharepoint/v3/contenttype/forms">
-  <Display>DocumentLibraryForm</Display>
-  <Edit>DocumentLibraryForm</Edit>
-  <New>DocumentLibraryForm</New>
-</FormTemplates>
+<p:properties xmlns:p="http://schemas.microsoft.com/office/2006/metadata/properties" xmlns:xsi="http://www.w3.org/2001/XMLSchema-instance" xmlns:pc="http://schemas.microsoft.com/office/infopath/2007/PartnerControls">
+  <documentManagement>
+    <lcf76f155ced4ddcb4097134ff3c332f xmlns="baa02956-e5b0-401a-adb6-d3ab856a8db1">
+      <Terms xmlns="http://schemas.microsoft.com/office/infopath/2007/PartnerControls"/>
+    </lcf76f155ced4ddcb4097134ff3c332f>
+    <TaxCatchAll xmlns="758526ea-ff42-49f4-966e-8b92dfb8c37c" xsi:nil="true"/>
+  </documentManagement>
+</p:properties>
 </file>
 
 <file path=customXml/item2.xml><?xml version="1.0" encoding="utf-8"?>
@@ -8399,20 +8469,27 @@
 </file>
 
 <file path=customXml/item3.xml><?xml version="1.0" encoding="utf-8"?>
-<p:properties xmlns:p="http://schemas.microsoft.com/office/2006/metadata/properties" xmlns:xsi="http://www.w3.org/2001/XMLSchema-instance" xmlns:pc="http://schemas.microsoft.com/office/infopath/2007/PartnerControls">
-  <documentManagement>
-    <lcf76f155ced4ddcb4097134ff3c332f xmlns="baa02956-e5b0-401a-adb6-d3ab856a8db1">
-      <Terms xmlns="http://schemas.microsoft.com/office/infopath/2007/PartnerControls"/>
-    </lcf76f155ced4ddcb4097134ff3c332f>
-    <TaxCatchAll xmlns="758526ea-ff42-49f4-966e-8b92dfb8c37c" xsi:nil="true"/>
-  </documentManagement>
-</p:properties>
+<?mso-contentType ?>
+<FormTemplates xmlns="http://schemas.microsoft.com/sharepoint/v3/contenttype/forms">
+  <Display>DocumentLibraryForm</Display>
+  <Edit>DocumentLibraryForm</Edit>
+  <New>DocumentLibraryForm</New>
+</FormTemplates>
 </file>
 
 <file path=customXml/itemProps1.xml><?xml version="1.0" encoding="utf-8"?>
-<ds:datastoreItem xmlns:ds="http://schemas.openxmlformats.org/officeDocument/2006/customXml" ds:itemID="{F04B941D-E84F-47C8-84C7-8C66135B4CA1}">
+<ds:datastoreItem xmlns:ds="http://schemas.openxmlformats.org/officeDocument/2006/customXml" ds:itemID="{B517E194-3F2D-4BC4-9EAF-A0569BAF4335}">
   <ds:schemaRefs>
-    <ds:schemaRef ds:uri="http://schemas.microsoft.com/sharepoint/v3/contenttype/forms"/>
+    <ds:schemaRef ds:uri="http://purl.org/dc/dcmitype/"/>
+    <ds:schemaRef ds:uri="758526ea-ff42-49f4-966e-8b92dfb8c37c"/>
+    <ds:schemaRef ds:uri="http://www.w3.org/XML/1998/namespace"/>
+    <ds:schemaRef ds:uri="http://schemas.microsoft.com/office/2006/documentManagement/types"/>
+    <ds:schemaRef ds:uri="http://schemas.microsoft.com/office/infopath/2007/PartnerControls"/>
+    <ds:schemaRef ds:uri="http://purl.org/dc/elements/1.1/"/>
+    <ds:schemaRef ds:uri="baa02956-e5b0-401a-adb6-d3ab856a8db1"/>
+    <ds:schemaRef ds:uri="http://schemas.openxmlformats.org/package/2006/metadata/core-properties"/>
+    <ds:schemaRef ds:uri="http://schemas.microsoft.com/office/2006/metadata/properties"/>
+    <ds:schemaRef ds:uri="http://purl.org/dc/terms/"/>
   </ds:schemaRefs>
 </ds:datastoreItem>
 </file>
@@ -8437,18 +8514,9 @@
 </file>
 
 <file path=customXml/itemProps3.xml><?xml version="1.0" encoding="utf-8"?>
-<ds:datastoreItem xmlns:ds="http://schemas.openxmlformats.org/officeDocument/2006/customXml" ds:itemID="{B517E194-3F2D-4BC4-9EAF-A0569BAF4335}">
+<ds:datastoreItem xmlns:ds="http://schemas.openxmlformats.org/officeDocument/2006/customXml" ds:itemID="{F04B941D-E84F-47C8-84C7-8C66135B4CA1}">
   <ds:schemaRefs>
-    <ds:schemaRef ds:uri="http://purl.org/dc/dcmitype/"/>
-    <ds:schemaRef ds:uri="758526ea-ff42-49f4-966e-8b92dfb8c37c"/>
-    <ds:schemaRef ds:uri="http://www.w3.org/XML/1998/namespace"/>
-    <ds:schemaRef ds:uri="http://schemas.microsoft.com/office/2006/documentManagement/types"/>
-    <ds:schemaRef ds:uri="http://schemas.microsoft.com/office/infopath/2007/PartnerControls"/>
-    <ds:schemaRef ds:uri="http://purl.org/dc/elements/1.1/"/>
-    <ds:schemaRef ds:uri="baa02956-e5b0-401a-adb6-d3ab856a8db1"/>
-    <ds:schemaRef ds:uri="http://schemas.openxmlformats.org/package/2006/metadata/core-properties"/>
-    <ds:schemaRef ds:uri="http://schemas.microsoft.com/office/2006/metadata/properties"/>
-    <ds:schemaRef ds:uri="http://purl.org/dc/terms/"/>
+    <ds:schemaRef ds:uri="http://schemas.microsoft.com/sharepoint/v3/contenttype/forms"/>
   </ds:schemaRefs>
 </ds:datastoreItem>
 </file>
--- a/.claude/skills/presentation/templates/cellularintelligence.pptx
+++ b/.claude/skills/presentation/templates/cellularintelligence.pptx
@@ -9,6 +9,12 @@
   </p:notesMasterIdLst>
   <p:sldIdLst>
     <p:sldId id="256" r:id="rId5"/>
+    <p:sldId id="257" r:id="rId13"/>
+    <p:sldId id="258" r:id="rId14"/>
+    <p:sldId id="259" r:id="rId15"/>
+    <p:sldId id="260" r:id="rId16"/>
+    <p:sldId id="261" r:id="rId17"/>
+    <p:sldId id="262" r:id="rId18"/>
   </p:sldIdLst>
   <p:sldSz cx="12192000" cy="6858000"/>
   <p:notesSz cx="6858000" cy="9144000"/>
@@ -6040,7 +6046,7 @@
 </file>
 
 <file path=ppt/slides/slide1.xml><?xml version="1.0" encoding="utf-8"?>
-<p:sld xmlns:a="http://schemas.openxmlformats.org/drawingml/2006/main" xmlns:r="http://schemas.openxmlformats.org/officeDocument/2006/relationships" xmlns:p="http://schemas.openxmlformats.org/presentationml/2006/main">
+<p:sld xmlns:a="http://schemas.openxmlformats.org/drawingml/2006/main" xmlns:p="http://schemas.openxmlformats.org/presentationml/2006/main" xmlns:r="http://schemas.openxmlformats.org/officeDocument/2006/relationships">
   <p:cSld>
     <p:spTree>
       <p:nvGrpSpPr>
@@ -6048,14 +6054,56 @@
         <p:cNvGrpSpPr/>
         <p:nvPr/>
       </p:nvGrpSpPr>
-      <p:grpSpPr>
-        <a:xfrm>
-          <a:off x="0" y="0"/>
-          <a:ext cx="0" cy="0"/>
-          <a:chOff x="0" y="0"/>
-          <a:chExt cx="0" cy="0"/>
-        </a:xfrm>
-      </p:grpSpPr>
+      <p:grpSpPr/>
+      <p:sp>
+        <p:nvSpPr>
+          <p:cNvPr id="2" name="TextBox 1"/>
+          <p:cNvSpPr txBox="1"/>
+          <p:nvPr/>
+        </p:nvSpPr>
+        <p:spPr>
+          <a:xfrm>
+            <a:off x="1968975" y="3465085"/>
+            <a:ext cx="10111154" cy="1455754"/>
+          </a:xfrm>
+          <a:prstGeom prst="rect">
+            <a:avLst/>
+          </a:prstGeom>
+          <a:noFill/>
+        </p:spPr>
+        <p:txBody>
+          <a:bodyPr wrap="none">
+            <a:spAutoFit/>
+          </a:bodyPr>
+          <a:lstStyle/>
+          <a:p>
+            <a:r>
+              <a:rPr sz="2650">
+                <a:latin typeface="Helvetica"/>
+              </a:rPr>
+              <a:t>We are building a future where biology is no longer destiny, but design.</a:t>
+            </a:r>
+          </a:p>
+        </p:txBody>
+      </p:sp>
+    </p:spTree>
+  </p:cSld>
+  <p:clrMapOvr>
+    <a:masterClrMapping/>
+  </p:clrMapOvr>
+</p:sld>
+</file>
+
+<file path=ppt/slides/slide2.xml><?xml version="1.0" encoding="utf-8"?>
+<p:sld xmlns:a="http://schemas.openxmlformats.org/drawingml/2006/main" xmlns:p="http://schemas.openxmlformats.org/presentationml/2006/main" xmlns:r="http://schemas.openxmlformats.org/officeDocument/2006/relationships">
+  <p:cSld>
+    <p:spTree>
+      <p:nvGrpSpPr>
+        <p:cNvPr id="1" name=""/>
+        <p:cNvGrpSpPr/>
+        <p:nvPr/>
+      </p:nvGrpSpPr>
+      <p:grpSpPr/>
       <p:sp>
         <p:nvSpPr>
           <p:cNvPr id="2" name="Title 1"/>
@@ -6071,8 +6119,9 @@
           <a:bodyPr/>
           <a:lstStyle/>
           <a:p>
+            <a:pPr/>
             <a:r>
-              <a:t>Title</a:t>
+              <a:t>Example Title Slide - Top</a:t>
             </a:r>
           </a:p>
         </p:txBody>
@@ -6084,7 +6133,7 @@
             <a:spLocks noGrp="1"/>
           </p:cNvSpPr>
           <p:nvPr>
-            <p:ph type="body" sz="quarter" idx="1"/>
+            <p:ph type="body" idx="1" sz="quarter"/>
           </p:nvPr>
         </p:nvSpPr>
         <p:spPr/>
@@ -6092,8 +6141,340 @@
           <a:bodyPr/>
           <a:lstStyle/>
           <a:p>
+            <a:pPr/>
+          </a:p>
+        </p:txBody>
+      </p:sp>
+    </p:spTree>
+  </p:cSld>
+  <p:clrMapOvr>
+    <a:masterClrMapping/>
+  </p:clrMapOvr>
+</p:sld>
+</file>
+
+<file path=ppt/slides/slide3.xml><?xml version="1.0" encoding="utf-8"?>
+<p:sld xmlns:a="http://schemas.openxmlformats.org/drawingml/2006/main" xmlns:p="http://schemas.openxmlformats.org/presentationml/2006/main" xmlns:r="http://schemas.openxmlformats.org/officeDocument/2006/relationships">
+  <p:cSld>
+    <p:spTree>
+      <p:nvGrpSpPr>
+        <p:cNvPr id="1" name=""/>
+        <p:cNvGrpSpPr/>
+        <p:nvPr/>
+      </p:nvGrpSpPr>
+      <p:grpSpPr/>
+      <p:sp>
+        <p:nvSpPr>
+          <p:cNvPr id="2" name="Title 1"/>
+          <p:cNvSpPr>
+            <a:spLocks noGrp="1"/>
+          </p:cNvSpPr>
+          <p:nvPr>
+            <p:ph type="title"/>
+          </p:nvPr>
+        </p:nvSpPr>
+        <p:spPr/>
+        <p:txBody>
+          <a:bodyPr/>
+          <a:lstStyle/>
+          <a:p>
+            <a:pPr/>
             <a:r>
-              <a:t>Subtitle</a:t>
+              <a:t>Example Title Slide - Center</a:t>
+            </a:r>
+          </a:p>
+        </p:txBody>
+      </p:sp>
+    </p:spTree>
+  </p:cSld>
+  <p:clrMapOvr>
+    <a:masterClrMapping/>
+  </p:clrMapOvr>
+</p:sld>
+</file>
+
+<file path=ppt/slides/slide4.xml><?xml version="1.0" encoding="utf-8"?>
+<p:sld xmlns:a="http://schemas.openxmlformats.org/drawingml/2006/main" xmlns:p="http://schemas.openxmlformats.org/presentationml/2006/main" xmlns:r="http://schemas.openxmlformats.org/officeDocument/2006/relationships">
+  <p:cSld>
+    <p:spTree>
+      <p:nvGrpSpPr>
+        <p:cNvPr id="1" name=""/>
+        <p:cNvGrpSpPr/>
+        <p:nvPr/>
+      </p:nvGrpSpPr>
+      <p:grpSpPr/>
+      <p:sp>
+        <p:nvSpPr>
+          <p:cNvPr id="2" name="Title 1"/>
+          <p:cNvSpPr>
+            <a:spLocks noGrp="1"/>
+          </p:cNvSpPr>
+          <p:nvPr>
+            <p:ph type="title"/>
+          </p:nvPr>
+        </p:nvSpPr>
+        <p:spPr/>
+        <p:txBody>
+          <a:bodyPr/>
+          <a:lstStyle/>
+          <a:p>
+            <a:pPr/>
+            <a:r>
+              <a:t>Example Title</a:t>
+            </a:r>
+          </a:p>
+        </p:txBody>
+      </p:sp>
+      <p:sp>
+        <p:nvSpPr>
+          <p:cNvPr id="3" name="Text Placeholder 2"/>
+          <p:cNvSpPr>
+            <a:spLocks noGrp="1"/>
+          </p:cNvSpPr>
+          <p:nvPr>
+            <p:ph type="body" idx="1"/>
+          </p:nvPr>
+        </p:nvSpPr>
+        <p:spPr/>
+        <p:txBody>
+          <a:bodyPr/>
+          <a:lstStyle/>
+          <a:p>
+            <a:pPr/>
+            <a:r>
+              <a:t>Example Body Level One</a:t>
+            </a:r>
+          </a:p>
+        </p:txBody>
+      </p:sp>
+    </p:spTree>
+  </p:cSld>
+  <p:clrMapOvr>
+    <a:masterClrMapping/>
+  </p:clrMapOvr>
+</p:sld>
+</file>
+
+<file path=ppt/slides/slide5.xml><?xml version="1.0" encoding="utf-8"?>
+<p:sld xmlns:a="http://schemas.openxmlformats.org/drawingml/2006/main" xmlns:p="http://schemas.openxmlformats.org/presentationml/2006/main" xmlns:r="http://schemas.openxmlformats.org/officeDocument/2006/relationships">
+  <p:cSld>
+    <p:spTree>
+      <p:nvGrpSpPr>
+        <p:cNvPr id="1" name=""/>
+        <p:cNvGrpSpPr/>
+        <p:nvPr/>
+      </p:nvGrpSpPr>
+      <p:grpSpPr/>
+      <p:sp>
+        <p:nvSpPr>
+          <p:cNvPr id="2" name="Picture Placeholder 1"/>
+          <p:cNvSpPr>
+            <a:spLocks noGrp="1"/>
+          </p:cNvSpPr>
+          <p:nvPr>
+            <p:ph type="pic" idx="21" sz="half"/>
+          </p:nvPr>
+        </p:nvSpPr>
+        <p:spPr/>
+        <p:txBody>
+          <a:bodyPr/>
+          <a:p>
+            <a:pPr/>
+          </a:p>
+        </p:txBody>
+      </p:sp>
+      <p:sp>
+        <p:nvSpPr>
+          <p:cNvPr id="3" name="Title 2"/>
+          <p:cNvSpPr>
+            <a:spLocks noGrp="1"/>
+          </p:cNvSpPr>
+          <p:nvPr>
+            <p:ph type="title"/>
+          </p:nvPr>
+        </p:nvSpPr>
+        <p:spPr/>
+        <p:txBody>
+          <a:bodyPr/>
+          <a:lstStyle/>
+          <a:p/>
+        </p:txBody>
+      </p:sp>
+      <p:sp>
+        <p:nvSpPr>
+          <p:cNvPr id="4" name="Text Placeholder 3"/>
+          <p:cNvSpPr>
+            <a:spLocks noGrp="1"/>
+          </p:cNvSpPr>
+          <p:nvPr>
+            <p:ph type="body" idx="1" sz="half"/>
+          </p:nvPr>
+        </p:nvSpPr>
+        <p:spPr/>
+        <p:txBody>
+          <a:bodyPr/>
+          <a:lstStyle/>
+          <a:p/>
+        </p:txBody>
+      </p:sp>
+    </p:spTree>
+  </p:cSld>
+  <p:clrMapOvr>
+    <a:masterClrMapping/>
+  </p:clrMapOvr>
+</p:sld>
+</file>
+
+<file path=ppt/slides/slide6.xml><?xml version="1.0" encoding="utf-8"?>
+<p:sld xmlns:a="http://schemas.openxmlformats.org/drawingml/2006/main" xmlns:p="http://schemas.openxmlformats.org/presentationml/2006/main" xmlns:r="http://schemas.openxmlformats.org/officeDocument/2006/relationships">
+  <p:cSld>
+    <p:spTree>
+      <p:nvGrpSpPr>
+        <p:cNvPr id="1" name=""/>
+        <p:cNvGrpSpPr/>
+        <p:nvPr/>
+      </p:nvGrpSpPr>
+      <p:grpSpPr/>
+      <p:sp>
+        <p:nvSpPr>
+          <p:cNvPr id="2" name="Title 1"/>
+          <p:cNvSpPr>
+            <a:spLocks noGrp="1"/>
+          </p:cNvSpPr>
+          <p:nvPr>
+            <p:ph type="title"/>
+          </p:nvPr>
+        </p:nvSpPr>
+        <p:spPr/>
+        <p:txBody>
+          <a:bodyPr/>
+          <a:lstStyle/>
+          <a:p/>
+        </p:txBody>
+      </p:sp>
+      <p:sp>
+        <p:nvSpPr>
+          <p:cNvPr id="3" name="Text Placeholder 2"/>
+          <p:cNvSpPr>
+            <a:spLocks noGrp="1"/>
+          </p:cNvSpPr>
+          <p:nvPr>
+            <p:ph type="body" idx="1" sz="quarter"/>
+          </p:nvPr>
+        </p:nvSpPr>
+        <p:spPr/>
+        <p:txBody>
+          <a:bodyPr/>
+          <a:lstStyle/>
+          <a:p/>
+        </p:txBody>
+      </p:sp>
+      <p:sp>
+        <p:nvSpPr>
+          <p:cNvPr id="4" name="TextBox 3"/>
+          <p:cNvSpPr txBox="1"/>
+          <p:nvPr/>
+        </p:nvSpPr>
+        <p:spPr>
+          <a:xfrm>
+            <a:off x="4114464" y="3095576"/>
+            <a:ext cx="3963073" cy="666849"/>
+          </a:xfrm>
+          <a:prstGeom prst="rect">
+            <a:avLst/>
+          </a:prstGeom>
+          <a:noFill/>
+        </p:spPr>
+        <p:txBody>
+          <a:bodyPr wrap="none">
+            <a:spAutoFit/>
+          </a:bodyPr>
+          <a:lstStyle/>
+          <a:p>
+            <a:r>
+              <a:rPr sz="4000"/>
+              <a:t>THANK YOU</a:t>
+            </a:r>
+          </a:p>
+        </p:txBody>
+      </p:sp>
+    </p:spTree>
+  </p:cSld>
+  <p:clrMapOvr>
+    <a:masterClrMapping/>
+  </p:clrMapOvr>
+</p:sld>
+</file>
+
+<file path=ppt/slides/slide7.xml><?xml version="1.0" encoding="utf-8"?>
+<p:sld xmlns:a="http://schemas.openxmlformats.org/drawingml/2006/main" xmlns:p="http://schemas.openxmlformats.org/presentationml/2006/main" xmlns:r="http://schemas.openxmlformats.org/officeDocument/2006/relationships">
+  <p:cSld>
+    <p:spTree>
+      <p:nvGrpSpPr>
+        <p:cNvPr id="1" name=""/>
+        <p:cNvGrpSpPr/>
+        <p:nvPr/>
+      </p:nvGrpSpPr>
+      <p:grpSpPr/>
+      <p:sp>
+        <p:nvSpPr>
+          <p:cNvPr id="2" name="Title 1"/>
+          <p:cNvSpPr>
+            <a:spLocks noGrp="1"/>
+          </p:cNvSpPr>
+          <p:nvPr>
+            <p:ph type="title"/>
+          </p:nvPr>
+        </p:nvSpPr>
+        <p:spPr/>
+        <p:txBody>
+          <a:bodyPr/>
+          <a:lstStyle/>
+          <a:p/>
+        </p:txBody>
+      </p:sp>
+      <p:sp>
+        <p:nvSpPr>
+          <p:cNvPr id="3" name="Text Placeholder 2"/>
+          <p:cNvSpPr>
+            <a:spLocks noGrp="1"/>
+          </p:cNvSpPr>
+          <p:nvPr>
+            <p:ph type="body" idx="1" sz="quarter"/>
+          </p:nvPr>
+        </p:nvSpPr>
+        <p:spPr/>
+        <p:txBody>
+          <a:bodyPr/>
+          <a:lstStyle/>
+          <a:p/>
+        </p:txBody>
+      </p:sp>
+      <p:sp>
+        <p:nvSpPr>
+          <p:cNvPr id="4" name="TextBox 3"/>
+          <p:cNvSpPr txBox="1"/>
+          <p:nvPr/>
+        </p:nvSpPr>
+        <p:spPr>
+          <a:xfrm>
+            <a:off x="606361" y="3195603"/>
+            <a:ext cx="10979279" cy="466794"/>
+          </a:xfrm>
+          <a:prstGeom prst="rect">
+            <a:avLst/>
+          </a:prstGeom>
+          <a:noFill/>
+        </p:spPr>
+        <p:txBody>
+          <a:bodyPr wrap="none">
+            <a:spAutoFit/>
+          </a:bodyPr>
+          <a:lstStyle/>
+          <a:p>
+            <a:r>
+              <a:rPr sz="3000"/>
+              <a:t>Appendix</a:t>
             </a:r>
           </a:p>
         </p:txBody>
